--- a/submission/ControlPlane_Round2_Pitch.pptx
+++ b/submission/ControlPlane_Round2_Pitch.pptx
@@ -8093,8 +8093,47 @@
         </p:nvSpPr>
         <p:spPr>
           <a:xfrm>
-            <a:off x="1243584" y="7461504"/>
-            <a:ext cx="15819120" cy="1417320"/>
+            <a:off x="1243584" y="7424928"/>
+            <a:ext cx="15819120" cy="329184"/>
+          </a:xfrm>
+          <a:prstGeom prst="rect">
+            <a:avLst/>
+          </a:prstGeom>
+          <a:noFill/>
+          <a:ln/>
+        </p:spPr>
+        <p:txBody>
+          <a:bodyPr wrap="square" lIns="0" tIns="0" rIns="0" bIns="0" rtlCol="0" anchor="ctr"/>
+          <a:lstStyle/>
+          <a:p>
+            <a:pPr indent="0" marL="0">
+              <a:buNone/>
+            </a:pPr>
+            <a:r>
+              <a:rPr lang="en-US" sz="1400" dirty="0">
+                <a:solidFill>
+                  <a:srgbClr val="F2C572"/>
+                </a:solidFill>
+                <a:latin typeface="Arial" pitchFamily="34" charset="0"/>
+                <a:ea typeface="Arial" pitchFamily="34" charset="-122"/>
+                <a:cs typeface="Arial" pitchFamily="34" charset="-120"/>
+              </a:rPr>
+              <a:t>Measured gate (submission/latency_bench.json, n=200): p50≈0.074 ms · p95≈0.134 ms — under target; quote measured vs targets separately.</a:t>
+            </a:r>
+            <a:endParaRPr lang="en-US" sz="1400" dirty="0"/>
+          </a:p>
+        </p:txBody>
+      </p:sp>
+      <p:sp>
+        <p:nvSpPr>
+          <p:cNvPr id="53" name="Text 50"/>
+          <p:cNvSpPr/>
+          <p:nvPr/>
+        </p:nvSpPr>
+        <p:spPr>
+          <a:xfrm>
+            <a:off x="1243584" y="7772400"/>
+            <a:ext cx="15819120" cy="1234440"/>
           </a:xfrm>
           <a:prstGeom prst="rect">
             <a:avLst/>

--- a/submission/ControlPlane_Round2_Pitch.pptx
+++ b/submission/ControlPlane_Round2_Pitch.pptx
@@ -8118,7 +8118,7 @@
                 <a:ea typeface="Arial" pitchFamily="34" charset="-122"/>
                 <a:cs typeface="Arial" pitchFamily="34" charset="-120"/>
               </a:rPr>
-              <a:t>Measured gate (submission/latency_bench.json, n=200): p50≈0.074 ms · p95≈0.134 ms — under target; quote measured vs targets separately.</a:t>
+              <a:t>Measured gate (submission/latency_bench.json, n=10000): p50≈0.43 ms · p95≈0.51 ms — under target; quote measured vs targets separately.</a:t>
             </a:r>
             <a:endParaRPr lang="en-US" sz="1400" dirty="0"/>
           </a:p>

--- a/submission/ControlPlane_Round2_Pitch.pptx
+++ b/submission/ControlPlane_Round2_Pitch.pptx
@@ -18,9 +18,10 @@
     <p:sldId id="266" r:id="rId12"/>
     <p:sldId id="267" r:id="rId13"/>
     <p:sldId id="268" r:id="rId14"/>
+    <p:sldId id="269" r:id="rId15"/>
   </p:sldIdLst>
   <p:notesMasterIdLst>
-    <p:notesMasterId r:id="rId15"/>
+    <p:notesMasterId r:id="rId16"/>
   </p:notesMasterIdLst>
   <p:sldSz cx="18288000" cy="10287000"/>
   <p:notesSz cx="10287000" cy="18288000"/>
@@ -866,7 +867,7 @@
           <a:p>
             <a:r>
               <a:rPr lang="en-US" dirty="0"/>
-              <a:t>We are asking to take this into shadow on one support route and one acting route. Enforcement is earned per route. The first artefact you get is the counterfactual — would have held N, of which M were true positives — not a block. That system was never asked to prove anything. Now nothing acts until it can prove it should.</a:t>
+              <a:t>This is the honesty slide. Every number here is measured by make eval and make bench on a 168-case self-authored corpus — no production traffic. Ungrounded FNR is 1.1 percent with a Wilson interval of 0.19 to 5.78. Passable-action FPR is 0.0 percent with a 15.5 percent upper bound. The hard-negative hold rate is 64 percent — we over-flag, and we name that as the next milestone rather than hide it. Gate latency over ten thousand runs is p50 0.44ms, p95 0.52ms, p99 0.64ms. Then the refusals, about us and never about competitors: we do not claim eliminated hallucinations, zero integration, zero added latency, one accuracy number, or production-scale proof. In the demo the refund was held and escalated with the evidence packet.</a:t>
             </a:r>
             <a:endParaRPr lang="en-US" dirty="0"/>
           </a:p>
@@ -890,6 +891,94 @@
             <a:fld id="{F7021451-1387-4CA6-816F-3879F97B5CBC}" type="slidenum">
               <a:rPr lang="en-US"/>
               <a:t>13</a:t>
+            </a:fld>
+            <a:endParaRPr lang="en-US"/>
+          </a:p>
+        </p:txBody>
+      </p:sp>
+    </p:spTree>
+    <p:extLst>
+      <p:ext uri="{BB962C8B-B14F-4D97-AF65-F5344CB8AC3E}">
+        <p14:creationId xmlns:p14="http://schemas.microsoft.com/office/powerpoint/2010/main" val="1024086991"/>
+      </p:ext>
+    </p:extLst>
+  </p:cSld>
+  <p:clrMapOvr>
+    <a:masterClrMapping/>
+  </p:clrMapOvr>
+</p:notes>
+</file>
+
+<file path=ppt/notesSlides/notesSlide14.xml><?xml version="1.0" encoding="utf-8"?>
+<p:notes xmlns:a="http://schemas.openxmlformats.org/drawingml/2006/main" xmlns:r="http://schemas.openxmlformats.org/officeDocument/2006/relationships" xmlns:p="http://schemas.openxmlformats.org/presentationml/2006/main">
+  <p:cSld>
+    <p:spTree>
+      <p:nvGrpSpPr>
+        <p:cNvPr id="1" name=""/>
+        <p:cNvGrpSpPr/>
+        <p:nvPr/>
+      </p:nvGrpSpPr>
+      <p:grpSpPr>
+        <a:xfrm>
+          <a:off x="0" y="0"/>
+          <a:ext cx="0" cy="0"/>
+          <a:chOff x="0" y="0"/>
+          <a:chExt cx="0" cy="0"/>
+        </a:xfrm>
+      </p:grpSpPr>
+      <p:sp>
+        <p:nvSpPr>
+          <p:cNvPr id="2" name="Slide Image Placeholder 1"/>
+          <p:cNvSpPr>
+            <a:spLocks noGrp="1" noRot="1" noChangeAspect="1"/>
+          </p:cNvSpPr>
+          <p:nvPr>
+            <p:ph type="sldImg"/>
+          </p:nvPr>
+        </p:nvSpPr>
+        <p:spPr/>
+      </p:sp>
+      <p:sp>
+        <p:nvSpPr>
+          <p:cNvPr id="3" name="Notes Placeholder 2"/>
+          <p:cNvSpPr>
+            <a:spLocks noGrp="1"/>
+          </p:cNvSpPr>
+          <p:nvPr>
+            <p:ph type="body" idx="1"/>
+          </p:nvPr>
+        </p:nvSpPr>
+        <p:spPr/>
+        <p:txBody>
+          <a:bodyPr/>
+          <a:lstStyle/>
+          <a:p>
+            <a:r>
+              <a:rPr lang="en-US" dirty="0"/>
+              <a:t>We are asking to take this into shadow on one support route and one acting route. Enforcement is earned per route. The first artefact you get is the counterfactual — would have held N, of which M were true positives — not a block. That system was never asked to prove anything. Now nothing acts until it can prove it should.</a:t>
+            </a:r>
+            <a:endParaRPr lang="en-US" dirty="0"/>
+          </a:p>
+        </p:txBody>
+      </p:sp>
+      <p:sp>
+        <p:nvSpPr>
+          <p:cNvPr id="4" name="Slide Number Placeholder 3"/>
+          <p:cNvSpPr>
+            <a:spLocks noGrp="1"/>
+          </p:cNvSpPr>
+          <p:nvPr>
+            <p:ph type="sldNum" sz="quarter" idx="10"/>
+          </p:nvPr>
+        </p:nvSpPr>
+        <p:spPr/>
+        <p:txBody>
+          <a:bodyPr/>
+          <a:lstStyle/>
+          <a:p>
+            <a:fld id="{F7021451-1387-4CA6-816F-3879F97B5CBC}" type="slidenum">
+              <a:rPr lang="en-US"/>
+              <a:t>14</a:t>
             </a:fld>
             <a:endParaRPr lang="en-US"/>
           </a:p>
@@ -9351,6 +9440,1247 @@
     <p:bg>
       <p:bgPr>
         <a:solidFill>
+          <a:srgbClr val="120806"/>
+        </a:solidFill>
+      </p:bgPr>
+    </p:bg>
+    <p:spTree>
+      <p:nvGrpSpPr>
+        <p:cNvPr id="1" name=""/>
+        <p:cNvGrpSpPr/>
+        <p:nvPr/>
+      </p:nvGrpSpPr>
+      <p:grpSpPr>
+        <a:xfrm>
+          <a:off x="0" y="0"/>
+          <a:ext cx="0" cy="0"/>
+          <a:chOff x="0" y="0"/>
+          <a:chExt cx="0" cy="0"/>
+        </a:xfrm>
+      </p:grpSpPr>
+      <p:sp>
+        <p:nvSpPr>
+          <p:cNvPr id="2" name="Shape 0"/>
+          <p:cNvSpPr/>
+          <p:nvPr/>
+        </p:nvSpPr>
+        <p:spPr>
+          <a:xfrm>
+            <a:off x="0" y="0"/>
+            <a:ext cx="18288000" cy="10287000"/>
+          </a:xfrm>
+          <a:prstGeom prst="rect">
+            <a:avLst/>
+          </a:prstGeom>
+          <a:solidFill>
+            <a:srgbClr val="2A120C">
+              <a:alpha val="30000"/>
+            </a:srgbClr>
+          </a:solidFill>
+          <a:ln/>
+        </p:spPr>
+      </p:sp>
+      <p:sp>
+        <p:nvSpPr>
+          <p:cNvPr id="3" name="Text 1"/>
+          <p:cNvSpPr/>
+          <p:nvPr/>
+        </p:nvSpPr>
+        <p:spPr>
+          <a:xfrm>
+            <a:off x="384048" y="402336"/>
+            <a:ext cx="210312" cy="228600"/>
+          </a:xfrm>
+          <a:prstGeom prst="rect">
+            <a:avLst/>
+          </a:prstGeom>
+          <a:noFill/>
+          <a:ln/>
+        </p:spPr>
+        <p:txBody>
+          <a:bodyPr wrap="square" lIns="0" tIns="0" rIns="0" bIns="0" rtlCol="0" anchor="ctr"/>
+          <a:lstStyle/>
+          <a:p>
+            <a:pPr indent="0" marL="0">
+              <a:buNone/>
+            </a:pPr>
+            <a:r>
+              <a:rPr lang="en-US" sz="1200" dirty="0">
+                <a:solidFill>
+                  <a:srgbClr val="D9482A"/>
+                </a:solidFill>
+                <a:latin typeface="Arial" pitchFamily="34" charset="0"/>
+                <a:ea typeface="Arial" pitchFamily="34" charset="-122"/>
+                <a:cs typeface="Arial" pitchFamily="34" charset="-120"/>
+              </a:rPr>
+              <a:t>◢</a:t>
+            </a:r>
+            <a:endParaRPr lang="en-US" sz="1200" dirty="0"/>
+          </a:p>
+        </p:txBody>
+      </p:sp>
+      <p:sp>
+        <p:nvSpPr>
+          <p:cNvPr id="4" name="Text 2"/>
+          <p:cNvSpPr/>
+          <p:nvPr/>
+        </p:nvSpPr>
+        <p:spPr>
+          <a:xfrm>
+            <a:off x="621792" y="384048"/>
+            <a:ext cx="3840480" cy="265176"/>
+          </a:xfrm>
+          <a:prstGeom prst="rect">
+            <a:avLst/>
+          </a:prstGeom>
+          <a:noFill/>
+          <a:ln/>
+        </p:spPr>
+        <p:txBody>
+          <a:bodyPr wrap="square" lIns="0" tIns="0" rIns="0" bIns="0" rtlCol="0" anchor="ctr"/>
+          <a:lstStyle/>
+          <a:p>
+            <a:pPr indent="0" marL="0">
+              <a:buNone/>
+            </a:pPr>
+            <a:r>
+              <a:rPr lang="en-US" sz="1500" spc="150" kern="0" dirty="0">
+                <a:solidFill>
+                  <a:srgbClr val="F2E3D5"/>
+                </a:solidFill>
+                <a:latin typeface="Arial" pitchFamily="34" charset="0"/>
+                <a:ea typeface="Arial" pitchFamily="34" charset="-122"/>
+                <a:cs typeface="Arial" pitchFamily="34" charset="-120"/>
+              </a:rPr>
+              <a:t>CONTROLPLANE//SYS</a:t>
+            </a:r>
+            <a:endParaRPr lang="en-US" sz="1500" dirty="0"/>
+          </a:p>
+        </p:txBody>
+      </p:sp>
+      <p:sp>
+        <p:nvSpPr>
+          <p:cNvPr id="5" name="Text 3"/>
+          <p:cNvSpPr/>
+          <p:nvPr/>
+        </p:nvSpPr>
+        <p:spPr>
+          <a:xfrm>
+            <a:off x="11521440" y="384048"/>
+            <a:ext cx="6217920" cy="265176"/>
+          </a:xfrm>
+          <a:prstGeom prst="rect">
+            <a:avLst/>
+          </a:prstGeom>
+          <a:noFill/>
+          <a:ln/>
+        </p:spPr>
+        <p:txBody>
+          <a:bodyPr wrap="square" lIns="0" tIns="0" rIns="0" bIns="0" rtlCol="0" anchor="ctr"/>
+          <a:lstStyle/>
+          <a:p>
+            <a:pPr algn="r" indent="0" marL="0">
+              <a:buNone/>
+            </a:pPr>
+            <a:r>
+              <a:rPr lang="en-US" sz="1500" spc="150" kern="0" dirty="0">
+                <a:solidFill>
+                  <a:srgbClr val="7A5D4E"/>
+                </a:solidFill>
+                <a:latin typeface="Arial" pitchFamily="34" charset="0"/>
+                <a:ea typeface="Arial" pitchFamily="34" charset="-122"/>
+                <a:cs typeface="Arial" pitchFamily="34" charset="-120"/>
+              </a:rPr>
+              <a:t>11 // MEASURED</a:t>
+            </a:r>
+            <a:endParaRPr lang="en-US" sz="1500" dirty="0"/>
+          </a:p>
+        </p:txBody>
+      </p:sp>
+      <p:sp>
+        <p:nvSpPr>
+          <p:cNvPr id="6" name="Text 4"/>
+          <p:cNvSpPr/>
+          <p:nvPr/>
+        </p:nvSpPr>
+        <p:spPr>
+          <a:xfrm>
+            <a:off x="17775936" y="402336"/>
+            <a:ext cx="210312" cy="228600"/>
+          </a:xfrm>
+          <a:prstGeom prst="rect">
+            <a:avLst/>
+          </a:prstGeom>
+          <a:noFill/>
+          <a:ln/>
+        </p:spPr>
+        <p:txBody>
+          <a:bodyPr wrap="square" lIns="0" tIns="0" rIns="0" bIns="0" rtlCol="0" anchor="ctr"/>
+          <a:lstStyle/>
+          <a:p>
+            <a:pPr indent="0" marL="0">
+              <a:buNone/>
+            </a:pPr>
+            <a:r>
+              <a:rPr lang="en-US" sz="1200" dirty="0">
+                <a:solidFill>
+                  <a:srgbClr val="D9482A"/>
+                </a:solidFill>
+                <a:latin typeface="Arial" pitchFamily="34" charset="0"/>
+                <a:ea typeface="Arial" pitchFamily="34" charset="-122"/>
+                <a:cs typeface="Arial" pitchFamily="34" charset="-120"/>
+              </a:rPr>
+              <a:t>◣</a:t>
+            </a:r>
+            <a:endParaRPr lang="en-US" sz="1200" dirty="0"/>
+          </a:p>
+        </p:txBody>
+      </p:sp>
+      <p:sp>
+        <p:nvSpPr>
+          <p:cNvPr id="7" name="Shape 5"/>
+          <p:cNvSpPr/>
+          <p:nvPr/>
+        </p:nvSpPr>
+        <p:spPr>
+          <a:xfrm>
+            <a:off x="384048" y="9747504"/>
+            <a:ext cx="91440" cy="91440"/>
+          </a:xfrm>
+          <a:prstGeom prst="rect">
+            <a:avLst/>
+          </a:prstGeom>
+          <a:solidFill>
+            <a:srgbClr val="D9482A"/>
+          </a:solidFill>
+          <a:ln/>
+        </p:spPr>
+      </p:sp>
+      <p:sp>
+        <p:nvSpPr>
+          <p:cNvPr id="8" name="Text 6"/>
+          <p:cNvSpPr/>
+          <p:nvPr/>
+        </p:nvSpPr>
+        <p:spPr>
+          <a:xfrm>
+            <a:off x="566928" y="9683496"/>
+            <a:ext cx="2194560" cy="265176"/>
+          </a:xfrm>
+          <a:prstGeom prst="rect">
+            <a:avLst/>
+          </a:prstGeom>
+          <a:noFill/>
+          <a:ln/>
+        </p:spPr>
+        <p:txBody>
+          <a:bodyPr wrap="square" lIns="0" tIns="0" rIns="0" bIns="0" rtlCol="0" anchor="ctr"/>
+          <a:lstStyle/>
+          <a:p>
+            <a:pPr indent="0" marL="0">
+              <a:buNone/>
+            </a:pPr>
+            <a:r>
+              <a:rPr lang="en-US" sz="1500" dirty="0">
+                <a:solidFill>
+                  <a:srgbClr val="7A5D4E"/>
+                </a:solidFill>
+                <a:latin typeface="Arial" pitchFamily="34" charset="0"/>
+                <a:ea typeface="Arial" pitchFamily="34" charset="-122"/>
+                <a:cs typeface="Arial" pitchFamily="34" charset="-120"/>
+              </a:rPr>
+              <a:t>ADMIT//PROVE</a:t>
+            </a:r>
+            <a:endParaRPr lang="en-US" sz="1500" dirty="0"/>
+          </a:p>
+        </p:txBody>
+      </p:sp>
+      <p:sp>
+        <p:nvSpPr>
+          <p:cNvPr id="9" name="Text 7"/>
+          <p:cNvSpPr/>
+          <p:nvPr/>
+        </p:nvSpPr>
+        <p:spPr>
+          <a:xfrm>
+            <a:off x="13350240" y="9683496"/>
+            <a:ext cx="4480560" cy="265176"/>
+          </a:xfrm>
+          <a:prstGeom prst="rect">
+            <a:avLst/>
+          </a:prstGeom>
+          <a:noFill/>
+          <a:ln/>
+        </p:spPr>
+        <p:txBody>
+          <a:bodyPr wrap="square" lIns="0" tIns="0" rIns="0" bIns="0" rtlCol="0" anchor="ctr"/>
+          <a:lstStyle/>
+          <a:p>
+            <a:pPr algn="r" indent="0" marL="0">
+              <a:buNone/>
+            </a:pPr>
+            <a:r>
+              <a:rPr lang="en-US" sz="1500" spc="150" kern="0" dirty="0">
+                <a:solidFill>
+                  <a:srgbClr val="7A5D4E"/>
+                </a:solidFill>
+                <a:latin typeface="Arial" pitchFamily="34" charset="0"/>
+                <a:ea typeface="Arial" pitchFamily="34" charset="-122"/>
+                <a:cs typeface="Arial" pitchFamily="34" charset="-120"/>
+              </a:rPr>
+              <a:t>AIC.2026 · PS #1 · IITGN</a:t>
+            </a:r>
+            <a:endParaRPr lang="en-US" sz="1500" dirty="0"/>
+          </a:p>
+        </p:txBody>
+      </p:sp>
+      <p:sp>
+        <p:nvSpPr>
+          <p:cNvPr id="11" name="Text 8"/>
+          <p:cNvSpPr/>
+          <p:nvPr/>
+        </p:nvSpPr>
+        <p:spPr>
+          <a:xfrm>
+            <a:off x="950976" y="914400"/>
+            <a:ext cx="12801600" cy="265176"/>
+          </a:xfrm>
+          <a:prstGeom prst="rect">
+            <a:avLst/>
+          </a:prstGeom>
+          <a:noFill/>
+          <a:ln/>
+        </p:spPr>
+        <p:txBody>
+          <a:bodyPr wrap="square" lIns="0" tIns="0" rIns="0" bIns="0" rtlCol="0" anchor="ctr"/>
+          <a:lstStyle/>
+          <a:p>
+            <a:pPr algn="l" indent="0" marL="0">
+              <a:buNone/>
+            </a:pPr>
+            <a:r>
+              <a:rPr lang="en-US" sz="1500" spc="300" kern="0" dirty="0">
+                <a:solidFill>
+                  <a:srgbClr val="D9482A"/>
+                </a:solidFill>
+                <a:latin typeface="Arial" pitchFamily="34" charset="0"/>
+                <a:ea typeface="Arial" pitchFamily="34" charset="-122"/>
+                <a:cs typeface="Arial" pitchFamily="34" charset="-120"/>
+              </a:rPr>
+              <a:t>12 · WHAT WE MEASURED  ·  AND WHAT WE REFUSE TO CLAIM</a:t>
+            </a:r>
+            <a:endParaRPr lang="en-US" sz="1500" dirty="0"/>
+          </a:p>
+        </p:txBody>
+      </p:sp>
+      <p:sp>
+        <p:nvSpPr>
+          <p:cNvPr id="12" name="Text 9"/>
+          <p:cNvSpPr/>
+          <p:nvPr/>
+        </p:nvSpPr>
+        <p:spPr>
+          <a:xfrm>
+            <a:off x="950976" y="1207008"/>
+            <a:ext cx="16367760" cy="475488"/>
+          </a:xfrm>
+          <a:prstGeom prst="rect">
+            <a:avLst/>
+          </a:prstGeom>
+          <a:noFill/>
+          <a:ln/>
+        </p:spPr>
+        <p:txBody>
+          <a:bodyPr wrap="square" lIns="0" tIns="0" rIns="0" bIns="0" rtlCol="0" anchor="t"/>
+          <a:lstStyle/>
+          <a:p>
+            <a:pPr algn="l" indent="0" marL="0">
+              <a:buNone/>
+            </a:pPr>
+            <a:r>
+              <a:rPr lang="en-US" sz="2800" b="1" spc="-75" kern="0" dirty="0">
+                <a:solidFill>
+                  <a:srgbClr val="F2E3D5"/>
+                </a:solidFill>
+                <a:latin typeface="Arial" pitchFamily="34" charset="0"/>
+                <a:ea typeface="Arial" pitchFamily="34" charset="-122"/>
+                <a:cs typeface="Arial" pitchFamily="34" charset="-120"/>
+              </a:rPr>
+              <a:t>168 CASES. </a:t>
+            </a:r>
+            <a:pPr algn="l" indent="0" marL="0">
+              <a:buNone/>
+            </a:pPr>
+            <a:r>
+              <a:rPr lang="en-US" sz="2800" b="1" spc="-75" kern="0" dirty="0">
+                <a:solidFill>
+                  <a:srgbClr val="D9482A"/>
+                </a:solidFill>
+                <a:latin typeface="Arial" pitchFamily="34" charset="0"/>
+                <a:ea typeface="Arial" pitchFamily="34" charset="-122"/>
+                <a:cs typeface="Arial" pitchFamily="34" charset="-120"/>
+              </a:rPr>
+              <a:t>SELF-AUTHORED</a:t>
+            </a:r>
+            <a:pPr algn="l" indent="0" marL="0">
+              <a:buNone/>
+            </a:pPr>
+            <a:r>
+              <a:rPr lang="en-US" sz="2800" b="1" spc="-75" kern="0" dirty="0">
+                <a:solidFill>
+                  <a:srgbClr val="F2E3D5"/>
+                </a:solidFill>
+                <a:latin typeface="Arial" pitchFamily="34" charset="0"/>
+                <a:ea typeface="Arial" pitchFamily="34" charset="-122"/>
+                <a:cs typeface="Arial" pitchFamily="34" charset="-120"/>
+              </a:rPr>
+              <a:t>. NO PRODUCTION TRAFFIC.</a:t>
+            </a:r>
+            <a:endParaRPr lang="en-US" sz="2800" dirty="0"/>
+          </a:p>
+        </p:txBody>
+      </p:sp>
+      <p:sp>
+        <p:nvSpPr>
+          <p:cNvPr id="13" name="Text 10"/>
+          <p:cNvSpPr/>
+          <p:nvPr/>
+        </p:nvSpPr>
+        <p:spPr>
+          <a:xfrm>
+            <a:off x="950976" y="1719072"/>
+            <a:ext cx="16367760" cy="292608"/>
+          </a:xfrm>
+          <a:prstGeom prst="rect">
+            <a:avLst/>
+          </a:prstGeom>
+          <a:noFill/>
+          <a:ln/>
+        </p:spPr>
+        <p:txBody>
+          <a:bodyPr wrap="square" lIns="0" tIns="0" rIns="0" bIns="0" rtlCol="0" anchor="ctr"/>
+          <a:lstStyle/>
+          <a:p>
+            <a:pPr indent="0" marL="0">
+              <a:buNone/>
+            </a:pPr>
+            <a:r>
+              <a:rPr lang="en-US" sz="1500" dirty="0">
+                <a:solidFill>
+                  <a:srgbClr val="C9B5A3"/>
+                </a:solidFill>
+                <a:latin typeface="Arial" pitchFamily="34" charset="0"/>
+                <a:ea typeface="Arial" pitchFamily="34" charset="-122"/>
+                <a:cs typeface="Arial" pitchFamily="34" charset="-120"/>
+              </a:rPr>
+              <a:t>Every number below regenerates from `make eval` and `make bench`. Intervals, not point estimates. The miss is published, not smoothed.</a:t>
+            </a:r>
+            <a:endParaRPr lang="en-US" sz="1500" dirty="0"/>
+          </a:p>
+        </p:txBody>
+      </p:sp>
+      <p:sp>
+        <p:nvSpPr>
+          <p:cNvPr id="14" name="Shape 11"/>
+          <p:cNvSpPr/>
+          <p:nvPr/>
+        </p:nvSpPr>
+        <p:spPr>
+          <a:xfrm>
+            <a:off x="950976" y="2121408"/>
+            <a:ext cx="9281160" cy="4864608"/>
+          </a:xfrm>
+          <a:prstGeom prst="rect">
+            <a:avLst/>
+          </a:prstGeom>
+          <a:solidFill>
+            <a:srgbClr val="1A0D0A"/>
+          </a:solidFill>
+          <a:ln w="8636">
+            <a:solidFill>
+              <a:srgbClr val="5A2E20"/>
+            </a:solidFill>
+            <a:prstDash val="solid"/>
+          </a:ln>
+        </p:spPr>
+      </p:sp>
+      <p:sp>
+        <p:nvSpPr>
+          <p:cNvPr id="15" name="Shape 12"/>
+          <p:cNvSpPr/>
+          <p:nvPr/>
+        </p:nvSpPr>
+        <p:spPr>
+          <a:xfrm>
+            <a:off x="960120" y="2560320"/>
+            <a:ext cx="9262872" cy="9144"/>
+          </a:xfrm>
+          <a:prstGeom prst="rect">
+            <a:avLst/>
+          </a:prstGeom>
+          <a:solidFill>
+            <a:srgbClr val="3A1E16"/>
+          </a:solidFill>
+          <a:ln/>
+        </p:spPr>
+      </p:sp>
+      <p:sp>
+        <p:nvSpPr>
+          <p:cNvPr id="16" name="Text 13"/>
+          <p:cNvSpPr/>
+          <p:nvPr/>
+        </p:nvSpPr>
+        <p:spPr>
+          <a:xfrm>
+            <a:off x="1115568" y="2194560"/>
+            <a:ext cx="4810658" cy="292608"/>
+          </a:xfrm>
+          <a:prstGeom prst="rect">
+            <a:avLst/>
+          </a:prstGeom>
+          <a:noFill/>
+          <a:ln/>
+        </p:spPr>
+        <p:txBody>
+          <a:bodyPr wrap="square" lIns="0" tIns="0" rIns="0" bIns="0" rtlCol="0" anchor="ctr"/>
+          <a:lstStyle/>
+          <a:p>
+            <a:pPr indent="0" marL="0">
+              <a:buNone/>
+            </a:pPr>
+            <a:r>
+              <a:rPr lang="en-US" sz="1300" spc="120" kern="0" dirty="0">
+                <a:solidFill>
+                  <a:srgbClr val="7A5D4E"/>
+                </a:solidFill>
+                <a:latin typeface="Arial" pitchFamily="34" charset="0"/>
+                <a:ea typeface="Arial" pitchFamily="34" charset="-122"/>
+                <a:cs typeface="Arial" pitchFamily="34" charset="-120"/>
+              </a:rPr>
+              <a:t>▸ MEASURED — evals/last_run.json</a:t>
+            </a:r>
+            <a:endParaRPr lang="en-US" sz="1300" dirty="0"/>
+          </a:p>
+        </p:txBody>
+      </p:sp>
+      <p:sp>
+        <p:nvSpPr>
+          <p:cNvPr id="17" name="Text 14"/>
+          <p:cNvSpPr/>
+          <p:nvPr/>
+        </p:nvSpPr>
+        <p:spPr>
+          <a:xfrm>
+            <a:off x="6334049" y="2194560"/>
+            <a:ext cx="3715207" cy="292608"/>
+          </a:xfrm>
+          <a:prstGeom prst="rect">
+            <a:avLst/>
+          </a:prstGeom>
+          <a:noFill/>
+          <a:ln/>
+        </p:spPr>
+        <p:txBody>
+          <a:bodyPr wrap="square" lIns="0" tIns="0" rIns="0" bIns="0" rtlCol="0" anchor="ctr"/>
+          <a:lstStyle/>
+          <a:p>
+            <a:pPr algn="r" indent="0" marL="0">
+              <a:buNone/>
+            </a:pPr>
+            <a:r>
+              <a:rPr lang="en-US" sz="1300" spc="100" kern="0" dirty="0">
+                <a:solidFill>
+                  <a:srgbClr val="7A5D4E"/>
+                </a:solidFill>
+                <a:latin typeface="Arial" pitchFamily="34" charset="0"/>
+                <a:ea typeface="Arial" pitchFamily="34" charset="-122"/>
+                <a:cs typeface="Arial" pitchFamily="34" charset="-120"/>
+              </a:rPr>
+              <a:t>168 CASES · SELF-AUTHORED</a:t>
+            </a:r>
+            <a:endParaRPr lang="en-US" sz="1300" dirty="0"/>
+          </a:p>
+        </p:txBody>
+      </p:sp>
+      <p:sp>
+        <p:nvSpPr>
+          <p:cNvPr id="18" name="Text 15"/>
+          <p:cNvSpPr/>
+          <p:nvPr/>
+        </p:nvSpPr>
+        <p:spPr>
+          <a:xfrm>
+            <a:off x="1207008" y="2724912"/>
+            <a:ext cx="8778240" cy="4023360"/>
+          </a:xfrm>
+          <a:prstGeom prst="rect">
+            <a:avLst/>
+          </a:prstGeom>
+          <a:noFill/>
+          <a:ln/>
+        </p:spPr>
+        <p:txBody>
+          <a:bodyPr wrap="square" lIns="0" tIns="0" rIns="0" bIns="0" rtlCol="0" anchor="t"/>
+          <a:lstStyle/>
+          <a:p>
+            <a:pPr indent="0" marL="0">
+              <a:buNone/>
+            </a:pPr>
+            <a:r>
+              <a:rPr lang="en-US" sz="1400" dirty="0">
+                <a:solidFill>
+                  <a:srgbClr val="C9B5A3"/>
+                </a:solidFill>
+                <a:latin typeface="Courier New" pitchFamily="34" charset="0"/>
+                <a:ea typeface="Courier New" pitchFamily="34" charset="-122"/>
+                <a:cs typeface="Courier New" pitchFamily="34" charset="-120"/>
+              </a:rPr>
+              <a:t>corpus                    168 cases, self-authored</a:t>
+            </a:r>
+            <a:endParaRPr lang="en-US" sz="1400" dirty="0"/>
+          </a:p>
+          <a:p>
+            <a:pPr indent="0" marL="0">
+              <a:buNone/>
+            </a:pPr>
+            <a:r>
+              <a:rPr lang="en-US" sz="1400" dirty="0">
+                <a:solidFill>
+                  <a:srgbClr val="C9B5A3"/>
+                </a:solidFill>
+                <a:latin typeface="Courier New" pitchFamily="34" charset="0"/>
+                <a:ea typeface="Courier New" pitchFamily="34" charset="-122"/>
+                <a:cs typeface="Courier New" pitchFamily="34" charset="-120"/>
+              </a:rPr>
+              <a:t>production traffic        none</a:t>
+            </a:r>
+            <a:endParaRPr lang="en-US" sz="1400" dirty="0"/>
+          </a:p>
+          <a:p>
+            <a:pPr indent="0" marL="0">
+              <a:buNone/>
+            </a:pPr>
+            <a:r>
+              <a:rPr lang="en-US" sz="1400" dirty="0">
+                <a:solidFill>
+                  <a:srgbClr val="C9B5A3"/>
+                </a:solidFill>
+                <a:latin typeface="Courier New" pitchFamily="34" charset="0"/>
+                <a:ea typeface="Courier New" pitchFamily="34" charset="-122"/>
+                <a:cs typeface="Courier New" pitchFamily="34" charset="-120"/>
+              </a:rPr>
+              <a:t>ungrounded FNR            1.1%   95% CI 0.19% - 5.78%</a:t>
+            </a:r>
+            <a:endParaRPr lang="en-US" sz="1400" dirty="0"/>
+          </a:p>
+          <a:p>
+            <a:pPr indent="0" marL="0">
+              <a:buNone/>
+            </a:pPr>
+            <a:r>
+              <a:rPr lang="en-US" sz="1400" dirty="0">
+                <a:solidFill>
+                  <a:srgbClr val="C9B5A3"/>
+                </a:solidFill>
+                <a:latin typeface="Courier New" pitchFamily="34" charset="0"/>
+                <a:ea typeface="Courier New" pitchFamily="34" charset="-122"/>
+                <a:cs typeface="Courier New" pitchFamily="34" charset="-120"/>
+              </a:rPr>
+              <a:t>passable-action FPR       0.0%   95% upper bound 15.5%</a:t>
+            </a:r>
+            <a:endParaRPr lang="en-US" sz="1400" dirty="0"/>
+          </a:p>
+          <a:p>
+            <a:pPr indent="0" marL="0">
+              <a:buNone/>
+            </a:pPr>
+            <a:r>
+              <a:rPr lang="en-US" sz="1400" dirty="0">
+                <a:solidFill>
+                  <a:srgbClr val="C9B5A3"/>
+                </a:solidFill>
+                <a:latin typeface="Courier New" pitchFamily="34" charset="0"/>
+                <a:ea typeface="Courier New" pitchFamily="34" charset="-122"/>
+                <a:cs typeface="Courier New" pitchFamily="34" charset="-120"/>
+              </a:rPr>
+              <a:t>hard-negative hold rate   64%    95% CI 50.7% - 75.7%</a:t>
+            </a:r>
+            <a:endParaRPr lang="en-US" sz="1400" dirty="0"/>
+          </a:p>
+          <a:p>
+            <a:pPr indent="0" marL="0">
+              <a:buNone/>
+            </a:pPr>
+            <a:r>
+              <a:rPr lang="en-US" sz="1400" dirty="0">
+                <a:solidFill>
+                  <a:srgbClr val="C9B5A3"/>
+                </a:solidFill>
+                <a:latin typeface="Courier New" pitchFamily="34" charset="0"/>
+                <a:ea typeface="Courier New" pitchFamily="34" charset="-122"/>
+                <a:cs typeface="Courier New" pitchFamily="34" charset="-120"/>
+              </a:rPr>
+              <a:t>gate latency  n=10000     p50 0.44ms</a:t>
+            </a:r>
+            <a:endParaRPr lang="en-US" sz="1400" dirty="0"/>
+          </a:p>
+          <a:p>
+            <a:pPr indent="0" marL="0">
+              <a:buNone/>
+            </a:pPr>
+            <a:r>
+              <a:rPr lang="en-US" sz="1400" dirty="0">
+                <a:solidFill>
+                  <a:srgbClr val="C9B5A3"/>
+                </a:solidFill>
+                <a:latin typeface="Courier New" pitchFamily="34" charset="0"/>
+                <a:ea typeface="Courier New" pitchFamily="34" charset="-122"/>
+                <a:cs typeface="Courier New" pitchFamily="34" charset="-120"/>
+              </a:rPr>
+              <a:t>                          p95 0.52ms</a:t>
+            </a:r>
+            <a:endParaRPr lang="en-US" sz="1400" dirty="0"/>
+          </a:p>
+          <a:p>
+            <a:pPr indent="0" marL="0">
+              <a:buNone/>
+            </a:pPr>
+            <a:r>
+              <a:rPr lang="en-US" sz="1400" dirty="0">
+                <a:solidFill>
+                  <a:srgbClr val="C9B5A3"/>
+                </a:solidFill>
+                <a:latin typeface="Courier New" pitchFamily="34" charset="0"/>
+                <a:ea typeface="Courier New" pitchFamily="34" charset="-122"/>
+                <a:cs typeface="Courier New" pitchFamily="34" charset="-120"/>
+              </a:rPr>
+              <a:t>                          p99 0.64ms</a:t>
+            </a:r>
+            <a:endParaRPr lang="en-US" sz="1400" dirty="0"/>
+          </a:p>
+        </p:txBody>
+      </p:sp>
+      <p:sp>
+        <p:nvSpPr>
+          <p:cNvPr id="19" name="Shape 16"/>
+          <p:cNvSpPr/>
+          <p:nvPr/>
+        </p:nvSpPr>
+        <p:spPr>
+          <a:xfrm>
+            <a:off x="950976" y="7187184"/>
+            <a:ext cx="9281160" cy="1975104"/>
+          </a:xfrm>
+          <a:prstGeom prst="rect">
+            <a:avLst/>
+          </a:prstGeom>
+          <a:solidFill>
+            <a:srgbClr val="2A140F"/>
+          </a:solidFill>
+          <a:ln w="12700">
+            <a:solidFill>
+              <a:srgbClr val="D9482A"/>
+            </a:solidFill>
+            <a:prstDash val="solid"/>
+          </a:ln>
+        </p:spPr>
+      </p:sp>
+      <p:sp>
+        <p:nvSpPr>
+          <p:cNvPr id="20" name="Shape 17"/>
+          <p:cNvSpPr/>
+          <p:nvPr/>
+        </p:nvSpPr>
+        <p:spPr>
+          <a:xfrm>
+            <a:off x="950976" y="7187184"/>
+            <a:ext cx="9281160" cy="41148"/>
+          </a:xfrm>
+          <a:prstGeom prst="rect">
+            <a:avLst/>
+          </a:prstGeom>
+          <a:solidFill>
+            <a:srgbClr val="D9482A"/>
+          </a:solidFill>
+          <a:ln/>
+        </p:spPr>
+      </p:sp>
+      <p:sp>
+        <p:nvSpPr>
+          <p:cNvPr id="21" name="Text 18"/>
+          <p:cNvSpPr/>
+          <p:nvPr/>
+        </p:nvSpPr>
+        <p:spPr>
+          <a:xfrm>
+            <a:off x="1225296" y="7370064"/>
+            <a:ext cx="8732520" cy="274320"/>
+          </a:xfrm>
+          <a:prstGeom prst="rect">
+            <a:avLst/>
+          </a:prstGeom>
+          <a:noFill/>
+          <a:ln/>
+        </p:spPr>
+        <p:txBody>
+          <a:bodyPr wrap="square" lIns="0" tIns="0" rIns="0" bIns="0" rtlCol="0" anchor="ctr"/>
+          <a:lstStyle/>
+          <a:p>
+            <a:pPr indent="0" marL="0">
+              <a:buNone/>
+            </a:pPr>
+            <a:r>
+              <a:rPr lang="en-US" sz="1200" spc="140" kern="0" dirty="0">
+                <a:solidFill>
+                  <a:srgbClr val="7A5D4E"/>
+                </a:solidFill>
+                <a:latin typeface="Arial" pitchFamily="34" charset="0"/>
+                <a:ea typeface="Arial" pitchFamily="34" charset="-122"/>
+                <a:cs typeface="Arial" pitchFamily="34" charset="-120"/>
+              </a:rPr>
+              <a:t>THE MISS  ·  NAMED, NOT SMOOTHED</a:t>
+            </a:r>
+            <a:endParaRPr lang="en-US" sz="1200" dirty="0"/>
+          </a:p>
+        </p:txBody>
+      </p:sp>
+      <p:sp>
+        <p:nvSpPr>
+          <p:cNvPr id="22" name="Text 19"/>
+          <p:cNvSpPr/>
+          <p:nvPr/>
+        </p:nvSpPr>
+        <p:spPr>
+          <a:xfrm>
+            <a:off x="1225296" y="7717536"/>
+            <a:ext cx="8732520" cy="384048"/>
+          </a:xfrm>
+          <a:prstGeom prst="rect">
+            <a:avLst/>
+          </a:prstGeom>
+          <a:noFill/>
+          <a:ln/>
+        </p:spPr>
+        <p:txBody>
+          <a:bodyPr wrap="square" lIns="0" tIns="0" rIns="0" bIns="0" rtlCol="0" anchor="ctr"/>
+          <a:lstStyle/>
+          <a:p>
+            <a:pPr indent="0" marL="0">
+              <a:buNone/>
+            </a:pPr>
+            <a:r>
+              <a:rPr lang="en-US" sz="2000" b="1" dirty="0">
+                <a:solidFill>
+                  <a:srgbClr val="F2E3D5"/>
+                </a:solidFill>
+                <a:latin typeface="Arial" pitchFamily="34" charset="0"/>
+                <a:ea typeface="Arial" pitchFamily="34" charset="-122"/>
+                <a:cs typeface="Arial" pitchFamily="34" charset="-120"/>
+              </a:rPr>
+              <a:t>Hard-negative hold rate 64% — we over-flag.</a:t>
+            </a:r>
+            <a:endParaRPr lang="en-US" sz="2000" dirty="0"/>
+          </a:p>
+        </p:txBody>
+      </p:sp>
+      <p:sp>
+        <p:nvSpPr>
+          <p:cNvPr id="23" name="Text 20"/>
+          <p:cNvSpPr/>
+          <p:nvPr/>
+        </p:nvSpPr>
+        <p:spPr>
+          <a:xfrm>
+            <a:off x="1225296" y="8174736"/>
+            <a:ext cx="8732520" cy="868680"/>
+          </a:xfrm>
+          <a:prstGeom prst="rect">
+            <a:avLst/>
+          </a:prstGeom>
+          <a:noFill/>
+          <a:ln/>
+        </p:spPr>
+        <p:txBody>
+          <a:bodyPr wrap="square" lIns="0" tIns="0" rIns="0" bIns="0" rtlCol="0" anchor="t"/>
+          <a:lstStyle/>
+          <a:p>
+            <a:pPr indent="0" marL="0">
+              <a:buNone/>
+            </a:pPr>
+            <a:r>
+              <a:rPr lang="en-US" sz="1500" dirty="0">
+                <a:solidFill>
+                  <a:srgbClr val="C9B5A3"/>
+                </a:solidFill>
+                <a:latin typeface="Arial" pitchFamily="34" charset="0"/>
+                <a:ea typeface="Arial" pitchFamily="34" charset="-122"/>
+                <a:cs typeface="Arial" pitchFamily="34" charset="-120"/>
+              </a:rPr>
+              <a:t>Measured, published, and named as the next milestone. 53/168 cases are hard negatives (31.7%). Clean strata hold 0/13.</a:t>
+            </a:r>
+            <a:endParaRPr lang="en-US" sz="1500" dirty="0"/>
+          </a:p>
+        </p:txBody>
+      </p:sp>
+      <p:sp>
+        <p:nvSpPr>
+          <p:cNvPr id="24" name="Shape 21"/>
+          <p:cNvSpPr/>
+          <p:nvPr/>
+        </p:nvSpPr>
+        <p:spPr>
+          <a:xfrm>
+            <a:off x="10442448" y="2121408"/>
+            <a:ext cx="6894576" cy="7040880"/>
+          </a:xfrm>
+          <a:prstGeom prst="rect">
+            <a:avLst/>
+          </a:prstGeom>
+          <a:solidFill>
+            <a:srgbClr val="1A0D0A"/>
+          </a:solidFill>
+          <a:ln w="12700">
+            <a:solidFill>
+              <a:srgbClr val="D9482A"/>
+            </a:solidFill>
+            <a:prstDash val="solid"/>
+          </a:ln>
+        </p:spPr>
+      </p:sp>
+      <p:sp>
+        <p:nvSpPr>
+          <p:cNvPr id="25" name="Shape 22"/>
+          <p:cNvSpPr/>
+          <p:nvPr/>
+        </p:nvSpPr>
+        <p:spPr>
+          <a:xfrm>
+            <a:off x="10442448" y="2121408"/>
+            <a:ext cx="6894576" cy="41148"/>
+          </a:xfrm>
+          <a:prstGeom prst="rect">
+            <a:avLst/>
+          </a:prstGeom>
+          <a:solidFill>
+            <a:srgbClr val="D9482A"/>
+          </a:solidFill>
+          <a:ln/>
+        </p:spPr>
+      </p:sp>
+      <p:sp>
+        <p:nvSpPr>
+          <p:cNvPr id="26" name="Text 23"/>
+          <p:cNvSpPr/>
+          <p:nvPr/>
+        </p:nvSpPr>
+        <p:spPr>
+          <a:xfrm>
+            <a:off x="10716768" y="2304288"/>
+            <a:ext cx="6400800" cy="274320"/>
+          </a:xfrm>
+          <a:prstGeom prst="rect">
+            <a:avLst/>
+          </a:prstGeom>
+          <a:noFill/>
+          <a:ln/>
+        </p:spPr>
+        <p:txBody>
+          <a:bodyPr wrap="square" lIns="0" tIns="0" rIns="0" bIns="0" rtlCol="0" anchor="ctr"/>
+          <a:lstStyle/>
+          <a:p>
+            <a:pPr indent="0" marL="0">
+              <a:buNone/>
+            </a:pPr>
+            <a:r>
+              <a:rPr lang="en-US" sz="1200" spc="120" kern="0" dirty="0">
+                <a:solidFill>
+                  <a:srgbClr val="7A5D4E"/>
+                </a:solidFill>
+                <a:latin typeface="Arial" pitchFamily="34" charset="0"/>
+                <a:ea typeface="Arial" pitchFamily="34" charset="-122"/>
+                <a:cs typeface="Arial" pitchFamily="34" charset="-120"/>
+              </a:rPr>
+              <a:t>WE REFUSE TO CLAIM  ·  ABOUT US, NOT COMPETITORS</a:t>
+            </a:r>
+            <a:endParaRPr lang="en-US" sz="1200" dirty="0"/>
+          </a:p>
+        </p:txBody>
+      </p:sp>
+      <p:sp>
+        <p:nvSpPr>
+          <p:cNvPr id="27" name="Text 24"/>
+          <p:cNvSpPr/>
+          <p:nvPr/>
+        </p:nvSpPr>
+        <p:spPr>
+          <a:xfrm>
+            <a:off x="10716768" y="2688336"/>
+            <a:ext cx="6400800" cy="365760"/>
+          </a:xfrm>
+          <a:prstGeom prst="rect">
+            <a:avLst/>
+          </a:prstGeom>
+          <a:noFill/>
+          <a:ln/>
+        </p:spPr>
+        <p:txBody>
+          <a:bodyPr wrap="square" lIns="0" tIns="0" rIns="0" bIns="0" rtlCol="0" anchor="ctr"/>
+          <a:lstStyle/>
+          <a:p>
+            <a:pPr indent="0" marL="0">
+              <a:buNone/>
+            </a:pPr>
+            <a:r>
+              <a:rPr lang="en-US" sz="2000" b="1" dirty="0">
+                <a:solidFill>
+                  <a:srgbClr val="F2E3D5"/>
+                </a:solidFill>
+                <a:latin typeface="Arial" pitchFamily="34" charset="0"/>
+                <a:ea typeface="Arial" pitchFamily="34" charset="-122"/>
+                <a:cs typeface="Arial" pitchFamily="34" charset="-120"/>
+              </a:rPr>
+              <a:t>We do not claim:</a:t>
+            </a:r>
+            <a:endParaRPr lang="en-US" sz="2000" dirty="0"/>
+          </a:p>
+        </p:txBody>
+      </p:sp>
+      <p:sp>
+        <p:nvSpPr>
+          <p:cNvPr id="28" name="Text 25"/>
+          <p:cNvSpPr/>
+          <p:nvPr/>
+        </p:nvSpPr>
+        <p:spPr>
+          <a:xfrm>
+            <a:off x="10716768" y="3218688"/>
+            <a:ext cx="6400800" cy="2834640"/>
+          </a:xfrm>
+          <a:prstGeom prst="rect">
+            <a:avLst/>
+          </a:prstGeom>
+          <a:noFill/>
+          <a:ln/>
+        </p:spPr>
+        <p:txBody>
+          <a:bodyPr wrap="square" lIns="0" tIns="0" rIns="0" bIns="0" rtlCol="0" anchor="t"/>
+          <a:lstStyle/>
+          <a:p>
+            <a:pPr indent="0" marL="0">
+              <a:buNone/>
+            </a:pPr>
+            <a:r>
+              <a:rPr lang="en-US" sz="1500" dirty="0">
+                <a:solidFill>
+                  <a:srgbClr val="C9B5A3"/>
+                </a:solidFill>
+                <a:latin typeface="Courier New" pitchFamily="34" charset="0"/>
+                <a:ea typeface="Courier New" pitchFamily="34" charset="-122"/>
+                <a:cs typeface="Courier New" pitchFamily="34" charset="-120"/>
+              </a:rPr>
+              <a:t>-  eliminated hallucinations</a:t>
+            </a:r>
+            <a:endParaRPr lang="en-US" sz="1500" dirty="0"/>
+          </a:p>
+          <a:p>
+            <a:pPr indent="0" marL="0">
+              <a:buNone/>
+            </a:pPr>
+            <a:r>
+              <a:rPr lang="en-US" sz="1500" dirty="0">
+                <a:solidFill>
+                  <a:srgbClr val="C9B5A3"/>
+                </a:solidFill>
+                <a:latin typeface="Courier New" pitchFamily="34" charset="0"/>
+                <a:ea typeface="Courier New" pitchFamily="34" charset="-122"/>
+                <a:cs typeface="Courier New" pitchFamily="34" charset="-120"/>
+              </a:rPr>
+              <a:t>-  zero integration</a:t>
+            </a:r>
+            <a:endParaRPr lang="en-US" sz="1500" dirty="0"/>
+          </a:p>
+          <a:p>
+            <a:pPr indent="0" marL="0">
+              <a:buNone/>
+            </a:pPr>
+            <a:r>
+              <a:rPr lang="en-US" sz="1500" dirty="0">
+                <a:solidFill>
+                  <a:srgbClr val="C9B5A3"/>
+                </a:solidFill>
+                <a:latin typeface="Courier New" pitchFamily="34" charset="0"/>
+                <a:ea typeface="Courier New" pitchFamily="34" charset="-122"/>
+                <a:cs typeface="Courier New" pitchFamily="34" charset="-120"/>
+              </a:rPr>
+              <a:t>-  zero added latency</a:t>
+            </a:r>
+            <a:endParaRPr lang="en-US" sz="1500" dirty="0"/>
+          </a:p>
+          <a:p>
+            <a:pPr indent="0" marL="0">
+              <a:buNone/>
+            </a:pPr>
+            <a:r>
+              <a:rPr lang="en-US" sz="1500" dirty="0">
+                <a:solidFill>
+                  <a:srgbClr val="C9B5A3"/>
+                </a:solidFill>
+                <a:latin typeface="Courier New" pitchFamily="34" charset="0"/>
+                <a:ea typeface="Courier New" pitchFamily="34" charset="-122"/>
+                <a:cs typeface="Courier New" pitchFamily="34" charset="-120"/>
+              </a:rPr>
+              <a:t>-  one accuracy number across</a:t>
+            </a:r>
+            <a:endParaRPr lang="en-US" sz="1500" dirty="0"/>
+          </a:p>
+          <a:p>
+            <a:pPr indent="0" marL="0">
+              <a:buNone/>
+            </a:pPr>
+            <a:r>
+              <a:rPr lang="en-US" sz="1500" dirty="0">
+                <a:solidFill>
+                  <a:srgbClr val="C9B5A3"/>
+                </a:solidFill>
+                <a:latin typeface="Courier New" pitchFamily="34" charset="0"/>
+                <a:ea typeface="Courier New" pitchFamily="34" charset="-122"/>
+                <a:cs typeface="Courier New" pitchFamily="34" charset="-120"/>
+              </a:rPr>
+              <a:t>   three failure modes</a:t>
+            </a:r>
+            <a:endParaRPr lang="en-US" sz="1500" dirty="0"/>
+          </a:p>
+          <a:p>
+            <a:pPr indent="0" marL="0">
+              <a:buNone/>
+            </a:pPr>
+            <a:r>
+              <a:rPr lang="en-US" sz="1500" dirty="0">
+                <a:solidFill>
+                  <a:srgbClr val="C9B5A3"/>
+                </a:solidFill>
+                <a:latin typeface="Courier New" pitchFamily="34" charset="0"/>
+                <a:ea typeface="Courier New" pitchFamily="34" charset="-122"/>
+                <a:cs typeface="Courier New" pitchFamily="34" charset="-120"/>
+              </a:rPr>
+              <a:t>-  production-scale proof</a:t>
+            </a:r>
+            <a:endParaRPr lang="en-US" sz="1500" dirty="0"/>
+          </a:p>
+        </p:txBody>
+      </p:sp>
+      <p:sp>
+        <p:nvSpPr>
+          <p:cNvPr id="29" name="Shape 26"/>
+          <p:cNvSpPr/>
+          <p:nvPr/>
+        </p:nvSpPr>
+        <p:spPr>
+          <a:xfrm>
+            <a:off x="10716768" y="6144768"/>
+            <a:ext cx="6400800" cy="9144"/>
+          </a:xfrm>
+          <a:prstGeom prst="rect">
+            <a:avLst/>
+          </a:prstGeom>
+          <a:solidFill>
+            <a:srgbClr val="3A1E16"/>
+          </a:solidFill>
+          <a:ln/>
+        </p:spPr>
+      </p:sp>
+      <p:sp>
+        <p:nvSpPr>
+          <p:cNvPr id="30" name="Text 27"/>
+          <p:cNvSpPr/>
+          <p:nvPr/>
+        </p:nvSpPr>
+        <p:spPr>
+          <a:xfrm>
+            <a:off x="10716768" y="6382512"/>
+            <a:ext cx="6400800" cy="1188720"/>
+          </a:xfrm>
+          <a:prstGeom prst="rect">
+            <a:avLst/>
+          </a:prstGeom>
+          <a:noFill/>
+          <a:ln/>
+        </p:spPr>
+        <p:txBody>
+          <a:bodyPr wrap="square" lIns="0" tIns="0" rIns="0" bIns="0" rtlCol="0" anchor="t"/>
+          <a:lstStyle/>
+          <a:p>
+            <a:pPr indent="0" marL="0">
+              <a:buNone/>
+            </a:pPr>
+            <a:r>
+              <a:rPr lang="en-US" sz="1500" dirty="0">
+                <a:solidFill>
+                  <a:srgbClr val="C9B5A3"/>
+                </a:solidFill>
+                <a:latin typeface="Arial" pitchFamily="34" charset="0"/>
+                <a:ea typeface="Arial" pitchFamily="34" charset="-122"/>
+                <a:cs typeface="Arial" pitchFamily="34" charset="-120"/>
+              </a:rPr>
+              <a:t>What we do claim is bounded: 168 self-authored cases, every rate published with its Wilson interval. Production is unknown until shadow replay.</a:t>
+            </a:r>
+            <a:endParaRPr lang="en-US" sz="1500" dirty="0"/>
+          </a:p>
+        </p:txBody>
+      </p:sp>
+      <p:sp>
+        <p:nvSpPr>
+          <p:cNvPr id="31" name="Text 28"/>
+          <p:cNvSpPr/>
+          <p:nvPr/>
+        </p:nvSpPr>
+        <p:spPr>
+          <a:xfrm>
+            <a:off x="10716768" y="7699248"/>
+            <a:ext cx="6400800" cy="1005840"/>
+          </a:xfrm>
+          <a:prstGeom prst="rect">
+            <a:avLst/>
+          </a:prstGeom>
+          <a:noFill/>
+          <a:ln/>
+        </p:spPr>
+        <p:txBody>
+          <a:bodyPr wrap="square" lIns="0" tIns="0" rIns="0" bIns="0" rtlCol="0" anchor="t"/>
+          <a:lstStyle/>
+          <a:p>
+            <a:pPr indent="0" marL="0">
+              <a:buNone/>
+            </a:pPr>
+            <a:r>
+              <a:rPr lang="en-US" sz="1700" b="1" dirty="0">
+                <a:solidFill>
+                  <a:srgbClr val="F2C572"/>
+                </a:solidFill>
+                <a:latin typeface="Arial" pitchFamily="34" charset="0"/>
+                <a:ea typeface="Arial" pitchFamily="34" charset="-122"/>
+                <a:cs typeface="Arial" pitchFamily="34" charset="-120"/>
+              </a:rPr>
+              <a:t>In the demo, the refund was held and escalated with the evidence packet.</a:t>
+            </a:r>
+            <a:endParaRPr lang="en-US" sz="1700" dirty="0"/>
+          </a:p>
+        </p:txBody>
+      </p:sp>
+    </p:spTree>
+  </p:cSld>
+  <p:clrMapOvr>
+    <a:masterClrMapping/>
+  </p:clrMapOvr>
+</p:sld>
+</file>
+
+<file path=ppt/slides/slide14.xml><?xml version="1.0" encoding="utf-8"?>
+<p:sld xmlns:a="http://schemas.openxmlformats.org/drawingml/2006/main" xmlns:r="http://schemas.openxmlformats.org/officeDocument/2006/relationships" xmlns:p="http://schemas.openxmlformats.org/presentationml/2006/main">
+  <p:cSld name="Slide 14">
+    <p:bg>
+      <p:bgPr>
+        <a:solidFill>
           <a:srgbClr val="0A0504"/>
         </a:solidFill>
       </p:bgPr>
@@ -9502,7 +10832,7 @@
                 <a:ea typeface="Arial" pitchFamily="34" charset="-122"/>
                 <a:cs typeface="Arial" pitchFamily="34" charset="-120"/>
               </a:rPr>
-              <a:t>11 // ASK</a:t>
+              <a:t>12 // ASK</a:t>
             </a:r>
             <a:endParaRPr lang="en-US" sz="1500" dirty="0"/>
           </a:p>

--- a/submission/ControlPlane_Round2_Pitch.pptx
+++ b/submission/ControlPlane_Round2_Pitch.pptx
@@ -867,7 +867,7 @@
           <a:p>
             <a:r>
               <a:rPr lang="en-US" dirty="0"/>
-              <a:t>This is the honesty slide. Every number here is measured by make eval and make bench on a 168-case self-authored corpus — no production traffic. Ungrounded FNR is 1.1 percent with a Wilson interval of 0.19 to 5.78. Passable-action FPR is 0.0 percent with a 15.5 percent upper bound. The hard-negative hold rate is 64 percent — we over-flag, and we name that as the next milestone rather than hide it. Gate latency over ten thousand runs is p50 0.44ms, p95 0.52ms, p99 0.64ms. Then the refusals, about us and never about competitors: we do not claim eliminated hallucinations, zero integration, zero added latency, one accuracy number, or production-scale proof. In the demo the refund was held and escalated with the evidence packet.</a:t>
+              <a:t>This is the honesty slide. Every number here is measured by make eval and make bench on a 168-case self-authored corpus — no production traffic. Ungrounded FNR is 1.1% with a Wilson interval of 0.2% to 5.8%. Passable-action FPR is 0.0% with a 15.5% upper bound. The hard-negative hold rate is 64% — we over-flag, and we name that as the next milestone rather than hide it. Gate latency over 10000 runs is p50 0.43ms, p95 0.51ms, p99 0.61ms. Published miss: struct-miss-000. Then the refusals, about us and never about competitors: we do not claim eliminated hallucinations, zero integration, zero added latency, one accuracy number, or production-scale proof. In the demo the refund was held and escalated with the evidence packet.</a:t>
             </a:r>
             <a:endParaRPr lang="en-US" dirty="0"/>
           </a:p>
@@ -8207,7 +8207,7 @@
                 <a:ea typeface="Arial" pitchFamily="34" charset="-122"/>
                 <a:cs typeface="Arial" pitchFamily="34" charset="-120"/>
               </a:rPr>
-              <a:t>Measured gate (submission/latency_bench.json, n=10000): p50≈0.43 ms · p95≈0.51 ms — under target; quote measured vs targets separately.</a:t>
+              <a:t>Measured gate (submission/latency_bench.json, n=10000): p50=0.43 ms · p95=0.51 ms — under target; quote measured vs targets separately.</a:t>
             </a:r>
             <a:endParaRPr lang="en-US" sz="1400" dirty="0"/>
           </a:p>
@@ -8699,7 +8699,7 @@
                 <a:ea typeface="Arial" pitchFamily="34" charset="-122"/>
                 <a:cs typeface="Arial" pitchFamily="34" charset="-120"/>
               </a:rPr>
-              <a:t>Per route. Not what we caught — what we missed. Gate report: empty schema. The emptiness is the claim.</a:t>
+              <a:t>Per route. Not what we caught — what we missed. Schema empty until earned. This build: 1.1% FNR (0.2%–5.8%) on a self-authored corpus — next slide.</a:t>
             </a:r>
             <a:endParaRPr lang="en-US" sz="1500" dirty="0"/>
           </a:p>
@@ -10069,7 +10069,7 @@
                 <a:ea typeface="Courier New" pitchFamily="34" charset="-122"/>
                 <a:cs typeface="Courier New" pitchFamily="34" charset="-120"/>
               </a:rPr>
-              <a:t>ungrounded FNR            1.1%   95% CI 0.19% - 5.78%</a:t>
+              <a:t>ungrounded FNR            1.1%   95% CI 0.2% - 5.8%</a:t>
             </a:r>
             <a:endParaRPr lang="en-US" sz="1400" dirty="0"/>
           </a:p>
@@ -10120,7 +10120,7 @@
                 <a:ea typeface="Courier New" pitchFamily="34" charset="-122"/>
                 <a:cs typeface="Courier New" pitchFamily="34" charset="-120"/>
               </a:rPr>
-              <a:t>gate latency  n=10000     p50 0.44ms</a:t>
+              <a:t>gate latency  n=10000     p50 0.43ms</a:t>
             </a:r>
             <a:endParaRPr lang="en-US" sz="1400" dirty="0"/>
           </a:p>
@@ -10137,7 +10137,7 @@
                 <a:ea typeface="Courier New" pitchFamily="34" charset="-122"/>
                 <a:cs typeface="Courier New" pitchFamily="34" charset="-120"/>
               </a:rPr>
-              <a:t>                          p95 0.52ms</a:t>
+              <a:t>                          p95 0.51ms</a:t>
             </a:r>
             <a:endParaRPr lang="en-US" sz="1400" dirty="0"/>
           </a:p>
@@ -10154,7 +10154,7 @@
                 <a:ea typeface="Courier New" pitchFamily="34" charset="-122"/>
                 <a:cs typeface="Courier New" pitchFamily="34" charset="-120"/>
               </a:rPr>
-              <a:t>                          p99 0.64ms</a:t>
+              <a:t>                          p99 0.61ms</a:t>
             </a:r>
             <a:endParaRPr lang="en-US" sz="1400" dirty="0"/>
           </a:p>
@@ -10316,7 +10316,7 @@
                 <a:ea typeface="Arial" pitchFamily="34" charset="-122"/>
                 <a:cs typeface="Arial" pitchFamily="34" charset="-120"/>
               </a:rPr>
-              <a:t>Measured, published, and named as the next milestone. 53/168 cases are hard negatives (31.7%). Clean strata hold 0/13.</a:t>
+              <a:t>Measured, published, and named as the next milestone. 53/168 cases are hard negatives (31.5%). Published miss: struct-miss-000.</a:t>
             </a:r>
             <a:endParaRPr lang="en-US" sz="1500" dirty="0"/>
           </a:p>

--- a/submission/ControlPlane_Round2_Pitch.pptx
+++ b/submission/ControlPlane_Round2_Pitch.pptx
@@ -867,7 +867,7 @@
           <a:p>
             <a:r>
               <a:rPr lang="en-US" dirty="0"/>
-              <a:t>This is the honesty slide. Every number here is measured by make eval and make bench on a 168-case self-authored corpus — no production traffic. Ungrounded FNR is 1.1% with a Wilson interval of 0.2% to 5.8%. Passable-action FPR is 0.0% with a 15.5% upper bound. The hard-negative hold rate is 64% — we over-flag, and we name that as the next milestone rather than hide it. Gate latency over 10000 runs is p50 0.43ms, p95 0.51ms, p99 0.61ms. Published miss: struct-miss-000. Then the refusals, about us and never about competitors: we do not claim eliminated hallucinations, zero integration, zero added latency, one accuracy number, or production-scale proof. In the demo the refund was held and escalated with the evidence packet.</a:t>
+              <a:t>This is the honesty slide. Every number here is measured by make eval and make bench on a 168-case self-authored corpus — no production traffic. Ungrounded FNR is 1.1% with a Wilson interval of 0.2% to 5.8%. Passable-action FPR is 0.0% with a 15.5% upper bound. The hard-negative hold rate is 64% — we over-flag, and we name that as the next milestone rather than hide it. Gate latency over 10000 runs is p50 0.42ms, p95 0.49ms, p99 0.59ms. Published miss: struct-miss-000. Then the refusals, about us and never about competitors: we do not claim eliminated hallucinations, zero integration, zero added latency, one accuracy number, or production-scale proof. In the demo the refund was held and escalated with the evidence packet.</a:t>
             </a:r>
             <a:endParaRPr lang="en-US" dirty="0"/>
           </a:p>
@@ -8207,7 +8207,7 @@
                 <a:ea typeface="Arial" pitchFamily="34" charset="-122"/>
                 <a:cs typeface="Arial" pitchFamily="34" charset="-120"/>
               </a:rPr>
-              <a:t>Measured gate (submission/latency_bench.json, n=10000): p50=0.43 ms · p95=0.51 ms — under target; quote measured vs targets separately.</a:t>
+              <a:t>Measured gate (submission/latency_bench.json, n=10000): p50=0.42 ms · p95=0.49 ms — under target; quote measured vs targets separately.</a:t>
             </a:r>
             <a:endParaRPr lang="en-US" sz="1400" dirty="0"/>
           </a:p>
@@ -10120,7 +10120,7 @@
                 <a:ea typeface="Courier New" pitchFamily="34" charset="-122"/>
                 <a:cs typeface="Courier New" pitchFamily="34" charset="-120"/>
               </a:rPr>
-              <a:t>gate latency  n=10000     p50 0.43ms</a:t>
+              <a:t>gate latency  n=10000     p50 0.42ms</a:t>
             </a:r>
             <a:endParaRPr lang="en-US" sz="1400" dirty="0"/>
           </a:p>
@@ -10137,7 +10137,7 @@
                 <a:ea typeface="Courier New" pitchFamily="34" charset="-122"/>
                 <a:cs typeface="Courier New" pitchFamily="34" charset="-120"/>
               </a:rPr>
-              <a:t>                          p95 0.51ms</a:t>
+              <a:t>                          p95 0.49ms</a:t>
             </a:r>
             <a:endParaRPr lang="en-US" sz="1400" dirty="0"/>
           </a:p>
@@ -10154,7 +10154,7 @@
                 <a:ea typeface="Courier New" pitchFamily="34" charset="-122"/>
                 <a:cs typeface="Courier New" pitchFamily="34" charset="-120"/>
               </a:rPr>
-              <a:t>                          p99 0.61ms</a:t>
+              <a:t>                          p99 0.59ms</a:t>
             </a:r>
             <a:endParaRPr lang="en-US" sz="1400" dirty="0"/>
           </a:p>

--- a/submission/ControlPlane_Round2_Pitch.pptx
+++ b/submission/ControlPlane_Round2_Pitch.pptx
@@ -19,9 +19,10 @@
     <p:sldId id="267" r:id="rId13"/>
     <p:sldId id="268" r:id="rId14"/>
     <p:sldId id="269" r:id="rId15"/>
+    <p:sldId id="270" r:id="rId16"/>
   </p:sldIdLst>
   <p:notesMasterIdLst>
-    <p:notesMasterId r:id="rId16"/>
+    <p:notesMasterId r:id="rId17"/>
   </p:notesMasterIdLst>
   <p:sldSz cx="18288000" cy="10287000"/>
   <p:notesSz cx="10287000" cy="18288000"/>
@@ -691,7 +692,7 @@
           <a:p>
             <a:r>
               <a:rPr lang="en-US" dirty="0"/>
-              <a:t>At forty thousand interactions a week, uniform deep checking is how planes get disabled. Budget follows blast radius. We will not put a savings percentage on this slide — that number is knowable only on your traffic. What is knowable now: a missing clause cannot authorise a payout; an HR span cannot ride along to the wrong caller; dead compute is a walk backward on the same graph, not an estimate. Shadow first. Enforce R3 next. We hook context assembly — that is real integration, and it is why the design works.</a:t>
+              <a:t>At tens of thousands of interactions a week (directional), uniform deep checking is how planes get disabled. Budget follows blast radius. We will not put a savings percentage on this slide — that number is knowable only on your traffic. What is knowable now: a missing clause cannot authorise a payout; an HR span cannot ride along to the wrong caller; dead compute is a walk backward on the same graph, not an estimate. Shadow first. Enforce R3 next. We hook context assembly — that is real integration, and it is why the design works.</a:t>
             </a:r>
             <a:endParaRPr lang="en-US" dirty="0"/>
           </a:p>
@@ -867,7 +868,7 @@
           <a:p>
             <a:r>
               <a:rPr lang="en-US" dirty="0"/>
-              <a:t>This is the honesty slide. Every number here is measured by make eval and make bench on a 168-case self-authored corpus — no production traffic. Ungrounded FNR is 1.1% with a Wilson interval of 0.2% to 5.8%. Passable-action FPR is 0.0% with a 15.5% upper bound. The hard-negative hold rate is 64% — we over-flag, and we name that as the next milestone rather than hide it. Gate latency over 10000 runs is p50 0.44ms, p95 0.57ms, p99 0.72ms. Published miss: struct-miss-000. Then the refusals, about us and never about competitors: we do not claim eliminated hallucinations, zero integration, zero added latency, one accuracy number, or production-scale proof. In the demo the refund was held and escalated with the evidence packet.</a:t>
+              <a:t>This is the honesty slide. Every number here is measured by make eval and make bench on a 168-case self-authored corpus — no production traffic. Ungrounded FNR is 1.1% with a Wilson interval of 0.2% to 5.8%. Passable-action FPR is 0.0% with a 15.5% upper bound. The hard-negative hold rate is 64% — we over-flag, and we name that as the next milestone rather than hide it. Gate latency over 10000 runs is p50 0.43ms, p95 0.48ms, p99 0.60ms. Published miss: struct-miss-000. Then the refusals, about us and never about competitors: we do not claim eliminated hallucinations, zero integration, zero added latency, one accuracy number, or production-scale proof. In the demo the refund was held and escalated with the evidence packet.</a:t>
             </a:r>
             <a:endParaRPr lang="en-US" dirty="0"/>
           </a:p>
@@ -955,7 +956,7 @@
           <a:p>
             <a:r>
               <a:rPr lang="en-US" dirty="0"/>
-              <a:t>We are asking to take this into shadow on one support route and one acting route. Enforcement is earned per route. The first artefact you get is the counterfactual — would have held N, of which M were true positives — not a block. That system was never asked to prove anything. Now nothing acts until it can prove it should.</a:t>
+              <a:t>Two-person team. Srujan owns architecture, mechanism, the demo build, and the latency and eval numbers. Dhrithika owns narrative, the pitch, and hostile-Q&amp;A defense. Both can draw the matrix from memory and answer B1 and B5 without hesitating. The repo is the proof: 36 modules, 50+ tests, frozen matrix, deterministic rebuild of every portal artifact from measured JSON.</a:t>
             </a:r>
             <a:endParaRPr lang="en-US" dirty="0"/>
           </a:p>
@@ -979,6 +980,94 @@
             <a:fld id="{F7021451-1387-4CA6-816F-3879F97B5CBC}" type="slidenum">
               <a:rPr lang="en-US"/>
               <a:t>14</a:t>
+            </a:fld>
+            <a:endParaRPr lang="en-US"/>
+          </a:p>
+        </p:txBody>
+      </p:sp>
+    </p:spTree>
+    <p:extLst>
+      <p:ext uri="{BB962C8B-B14F-4D97-AF65-F5344CB8AC3E}">
+        <p14:creationId xmlns:p14="http://schemas.microsoft.com/office/powerpoint/2010/main" val="1024086991"/>
+      </p:ext>
+    </p:extLst>
+  </p:cSld>
+  <p:clrMapOvr>
+    <a:masterClrMapping/>
+  </p:clrMapOvr>
+</p:notes>
+</file>
+
+<file path=ppt/notesSlides/notesSlide15.xml><?xml version="1.0" encoding="utf-8"?>
+<p:notes xmlns:a="http://schemas.openxmlformats.org/drawingml/2006/main" xmlns:r="http://schemas.openxmlformats.org/officeDocument/2006/relationships" xmlns:p="http://schemas.openxmlformats.org/presentationml/2006/main">
+  <p:cSld>
+    <p:spTree>
+      <p:nvGrpSpPr>
+        <p:cNvPr id="1" name=""/>
+        <p:cNvGrpSpPr/>
+        <p:nvPr/>
+      </p:nvGrpSpPr>
+      <p:grpSpPr>
+        <a:xfrm>
+          <a:off x="0" y="0"/>
+          <a:ext cx="0" cy="0"/>
+          <a:chOff x="0" y="0"/>
+          <a:chExt cx="0" cy="0"/>
+        </a:xfrm>
+      </p:grpSpPr>
+      <p:sp>
+        <p:nvSpPr>
+          <p:cNvPr id="2" name="Slide Image Placeholder 1"/>
+          <p:cNvSpPr>
+            <a:spLocks noGrp="1" noRot="1" noChangeAspect="1"/>
+          </p:cNvSpPr>
+          <p:nvPr>
+            <p:ph type="sldImg"/>
+          </p:nvPr>
+        </p:nvSpPr>
+        <p:spPr/>
+      </p:sp>
+      <p:sp>
+        <p:nvSpPr>
+          <p:cNvPr id="3" name="Notes Placeholder 2"/>
+          <p:cNvSpPr>
+            <a:spLocks noGrp="1"/>
+          </p:cNvSpPr>
+          <p:nvPr>
+            <p:ph type="body" idx="1"/>
+          </p:nvPr>
+        </p:nvSpPr>
+        <p:spPr/>
+        <p:txBody>
+          <a:bodyPr/>
+          <a:lstStyle/>
+          <a:p>
+            <a:r>
+              <a:rPr lang="en-US" dirty="0"/>
+              <a:t>We are asking to take this into shadow on one support route and one acting route. Enforcement is earned per route. The first artefact you get is the counterfactual — would have held N, of which M were true positives — not a block. That system was never asked to prove anything. Now nothing acts until it can prove it should.</a:t>
+            </a:r>
+            <a:endParaRPr lang="en-US" dirty="0"/>
+          </a:p>
+        </p:txBody>
+      </p:sp>
+      <p:sp>
+        <p:nvSpPr>
+          <p:cNvPr id="4" name="Slide Number Placeholder 3"/>
+          <p:cNvSpPr>
+            <a:spLocks noGrp="1"/>
+          </p:cNvSpPr>
+          <p:nvPr>
+            <p:ph type="sldNum" sz="quarter" idx="10"/>
+          </p:nvPr>
+        </p:nvSpPr>
+        <p:spPr/>
+        <p:txBody>
+          <a:bodyPr/>
+          <a:lstStyle/>
+          <a:p>
+            <a:fld id="{F7021451-1387-4CA6-816F-3879F97B5CBC}" type="slidenum">
+              <a:rPr lang="en-US"/>
+              <a:t>15</a:t>
             </a:fld>
             <a:endParaRPr lang="en-US"/>
           </a:p>
@@ -2075,9 +2164,6 @@
           <a:bodyPr wrap="square" lIns="0" tIns="0" rIns="0" bIns="0" rtlCol="0" anchor="ctr"/>
           <a:lstStyle/>
           <a:p>
-            <a:pPr indent="0" marL="0">
-              <a:buNone/>
-            </a:pPr>
             <a:r>
               <a:rPr lang="en-US" sz="1200" dirty="0">
                 <a:solidFill>
@@ -2114,9 +2200,6 @@
           <a:bodyPr wrap="square" lIns="0" tIns="0" rIns="0" bIns="0" rtlCol="0" anchor="ctr"/>
           <a:lstStyle/>
           <a:p>
-            <a:pPr indent="0" marL="0">
-              <a:buNone/>
-            </a:pPr>
             <a:r>
               <a:rPr lang="en-US" sz="1500" spc="150" kern="0" dirty="0">
                 <a:solidFill>
@@ -2153,9 +2236,7 @@
           <a:bodyPr wrap="square" lIns="0" tIns="0" rIns="0" bIns="0" rtlCol="0" anchor="ctr"/>
           <a:lstStyle/>
           <a:p>
-            <a:pPr algn="r" indent="0" marL="0">
-              <a:buNone/>
-            </a:pPr>
+            <a:pPr algn="r"/>
             <a:r>
               <a:rPr lang="en-US" sz="1500" spc="150" kern="0" dirty="0">
                 <a:solidFill>
@@ -2192,9 +2273,6 @@
           <a:bodyPr wrap="square" lIns="0" tIns="0" rIns="0" bIns="0" rtlCol="0" anchor="ctr"/>
           <a:lstStyle/>
           <a:p>
-            <a:pPr indent="0" marL="0">
-              <a:buNone/>
-            </a:pPr>
             <a:r>
               <a:rPr lang="en-US" sz="1200" dirty="0">
                 <a:solidFill>
@@ -2251,9 +2329,6 @@
           <a:bodyPr wrap="square" lIns="0" tIns="0" rIns="0" bIns="0" rtlCol="0" anchor="ctr"/>
           <a:lstStyle/>
           <a:p>
-            <a:pPr indent="0" marL="0">
-              <a:buNone/>
-            </a:pPr>
             <a:r>
               <a:rPr lang="en-US" sz="1500" dirty="0">
                 <a:solidFill>
@@ -2290,9 +2365,7 @@
           <a:bodyPr wrap="square" lIns="0" tIns="0" rIns="0" bIns="0" rtlCol="0" anchor="ctr"/>
           <a:lstStyle/>
           <a:p>
-            <a:pPr algn="r" indent="0" marL="0">
-              <a:buNone/>
-            </a:pPr>
+            <a:pPr algn="r"/>
             <a:r>
               <a:rPr lang="en-US" sz="1500" spc="150" kern="0" dirty="0">
                 <a:solidFill>
@@ -2329,9 +2402,6 @@
           <a:bodyPr wrap="square" lIns="0" tIns="0" rIns="0" bIns="0" rtlCol="0" anchor="ctr"/>
           <a:lstStyle/>
           <a:p>
-            <a:pPr indent="0" marL="0">
-              <a:buNone/>
-            </a:pPr>
             <a:r>
               <a:rPr lang="en-US" sz="1400" spc="220" kern="0" dirty="0">
                 <a:solidFill>
@@ -2368,9 +2438,6 @@
           <a:bodyPr wrap="square" lIns="0" tIns="0" rIns="0" bIns="0" rtlCol="0" anchor="ctr"/>
           <a:lstStyle/>
           <a:p>
-            <a:pPr indent="0" marL="0">
-              <a:buNone/>
-            </a:pPr>
             <a:r>
               <a:rPr lang="en-US" sz="7200" b="1" spc="-200" kern="0" dirty="0">
                 <a:solidFill>
@@ -2382,9 +2449,6 @@
               </a:rPr>
               <a:t>CONTROL</a:t>
             </a:r>
-            <a:pPr indent="0" marL="0">
-              <a:buNone/>
-            </a:pPr>
             <a:r>
               <a:rPr lang="en-US" sz="7200" b="1" spc="-200" kern="0" dirty="0">
                 <a:solidFill>
@@ -2396,9 +2460,6 @@
               </a:rPr>
               <a:t>PLANE</a:t>
             </a:r>
-            <a:pPr indent="0" marL="0">
-              <a:buNone/>
-            </a:pPr>
             <a:r>
               <a:rPr lang="en-US" sz="7200" b="1" spc="-200" kern="0" dirty="0">
                 <a:solidFill>
@@ -2435,9 +2496,6 @@
           <a:bodyPr wrap="square" lIns="0" tIns="0" rIns="0" bIns="0" rtlCol="0" anchor="ctr"/>
           <a:lstStyle/>
           <a:p>
-            <a:pPr indent="0" marL="0">
-              <a:buNone/>
-            </a:pPr>
             <a:r>
               <a:rPr lang="en-US" sz="2400" dirty="0">
                 <a:solidFill>
@@ -2474,9 +2532,6 @@
           <a:bodyPr wrap="square" lIns="0" tIns="0" rIns="0" bIns="0" rtlCol="0" anchor="ctr"/>
           <a:lstStyle/>
           <a:p>
-            <a:pPr indent="0" marL="0">
-              <a:buNone/>
-            </a:pPr>
             <a:r>
               <a:rPr lang="en-US" sz="1800" dirty="0">
                 <a:solidFill>
@@ -2535,9 +2590,6 @@
           <a:bodyPr wrap="square" lIns="0" tIns="0" rIns="0" bIns="0" rtlCol="0" anchor="ctr"/>
           <a:lstStyle/>
           <a:p>
-            <a:pPr indent="0" marL="0">
-              <a:buNone/>
-            </a:pPr>
             <a:r>
               <a:rPr lang="en-US" sz="1400" spc="120" kern="0" dirty="0">
                 <a:solidFill>
@@ -2596,9 +2648,6 @@
           <a:bodyPr wrap="square" lIns="0" tIns="0" rIns="0" bIns="0" rtlCol="0" anchor="ctr"/>
           <a:lstStyle/>
           <a:p>
-            <a:pPr indent="0" marL="0">
-              <a:buNone/>
-            </a:pPr>
             <a:r>
               <a:rPr lang="en-US" sz="1400" spc="120" kern="0" dirty="0">
                 <a:solidFill>
@@ -2657,9 +2706,6 @@
           <a:bodyPr wrap="square" lIns="0" tIns="0" rIns="0" bIns="0" rtlCol="0" anchor="ctr"/>
           <a:lstStyle/>
           <a:p>
-            <a:pPr indent="0" marL="0">
-              <a:buNone/>
-            </a:pPr>
             <a:r>
               <a:rPr lang="en-US" sz="1400" spc="120" kern="0" dirty="0">
                 <a:solidFill>
@@ -2696,9 +2742,6 @@
           <a:bodyPr wrap="square" lIns="0" tIns="0" rIns="0" bIns="0" rtlCol="0" anchor="ctr"/>
           <a:lstStyle/>
           <a:p>
-            <a:pPr indent="0" marL="0">
-              <a:buNone/>
-            </a:pPr>
             <a:r>
               <a:rPr lang="en-US" sz="1600" spc="150" kern="0" dirty="0">
                 <a:solidFill>
@@ -2735,9 +2778,6 @@
           <a:bodyPr wrap="square" lIns="0" tIns="0" rIns="0" bIns="0" rtlCol="0" anchor="ctr"/>
           <a:lstStyle/>
           <a:p>
-            <a:pPr indent="0" marL="0">
-              <a:buNone/>
-            </a:pPr>
             <a:r>
               <a:rPr lang="en-US" sz="1400" spc="120" kern="0" dirty="0">
                 <a:solidFill>
@@ -2819,9 +2859,6 @@
           <a:bodyPr wrap="square" lIns="0" tIns="0" rIns="0" bIns="0" rtlCol="0" anchor="ctr"/>
           <a:lstStyle/>
           <a:p>
-            <a:pPr indent="0" marL="0">
-              <a:buNone/>
-            </a:pPr>
             <a:r>
               <a:rPr lang="en-US" sz="1300" spc="120" kern="0" dirty="0">
                 <a:solidFill>
@@ -2858,9 +2895,7 @@
           <a:bodyPr wrap="square" lIns="0" tIns="0" rIns="0" bIns="0" rtlCol="0" anchor="ctr"/>
           <a:lstStyle/>
           <a:p>
-            <a:pPr algn="r" indent="0" marL="0">
-              <a:buNone/>
-            </a:pPr>
+            <a:pPr algn="r"/>
             <a:r>
               <a:rPr lang="en-US" sz="1300" spc="100" kern="0" dirty="0">
                 <a:solidFill>
@@ -2897,9 +2932,6 @@
           <a:bodyPr wrap="square" lIns="0" tIns="0" rIns="0" bIns="0" rtlCol="0" anchor="ctr"/>
           <a:lstStyle/>
           <a:p>
-            <a:pPr indent="0" marL="0">
-              <a:buNone/>
-            </a:pPr>
             <a:r>
               <a:rPr lang="en-US" sz="1500" b="1" dirty="0">
                 <a:solidFill>
@@ -2936,9 +2968,7 @@
           <a:bodyPr wrap="square" lIns="0" tIns="0" rIns="0" bIns="0" rtlCol="0" anchor="ctr"/>
           <a:lstStyle/>
           <a:p>
-            <a:pPr algn="ctr" indent="0" marL="0">
-              <a:buNone/>
-            </a:pPr>
+            <a:pPr algn="ctr"/>
             <a:r>
               <a:rPr lang="en-US" sz="1300" dirty="0">
                 <a:solidFill>
@@ -2975,9 +3005,6 @@
           <a:bodyPr wrap="square" lIns="0" tIns="0" rIns="0" bIns="0" rtlCol="0" anchor="ctr"/>
           <a:lstStyle/>
           <a:p>
-            <a:pPr indent="0" marL="0">
-              <a:buNone/>
-            </a:pPr>
             <a:r>
               <a:rPr lang="en-US" sz="1500" b="1" dirty="0">
                 <a:solidFill>
@@ -3014,9 +3041,6 @@
           <a:bodyPr wrap="square" lIns="0" tIns="0" rIns="0" bIns="0" rtlCol="0" anchor="ctr"/>
           <a:lstStyle/>
           <a:p>
-            <a:pPr indent="0" marL="0">
-              <a:buNone/>
-            </a:pPr>
             <a:r>
               <a:rPr lang="en-US" sz="1500" b="1" dirty="0">
                 <a:solidFill>
@@ -3053,9 +3077,7 @@
           <a:bodyPr wrap="square" lIns="0" tIns="0" rIns="0" bIns="0" rtlCol="0" anchor="ctr"/>
           <a:lstStyle/>
           <a:p>
-            <a:pPr algn="ctr" indent="0" marL="0">
-              <a:buNone/>
-            </a:pPr>
+            <a:pPr algn="ctr"/>
             <a:r>
               <a:rPr lang="en-US" sz="1300" dirty="0">
                 <a:solidFill>
@@ -3092,9 +3114,6 @@
           <a:bodyPr wrap="square" lIns="0" tIns="0" rIns="0" bIns="0" rtlCol="0" anchor="ctr"/>
           <a:lstStyle/>
           <a:p>
-            <a:pPr indent="0" marL="0">
-              <a:buNone/>
-            </a:pPr>
             <a:r>
               <a:rPr lang="en-US" sz="1500" b="1" dirty="0">
                 <a:solidFill>
@@ -3131,9 +3150,6 @@
           <a:bodyPr wrap="square" lIns="0" tIns="0" rIns="0" bIns="0" rtlCol="0" anchor="ctr"/>
           <a:lstStyle/>
           <a:p>
-            <a:pPr indent="0" marL="0">
-              <a:buNone/>
-            </a:pPr>
             <a:r>
               <a:rPr lang="en-US" sz="1500" b="1" dirty="0">
                 <a:solidFill>
@@ -3170,9 +3186,7 @@
           <a:bodyPr wrap="square" lIns="0" tIns="0" rIns="0" bIns="0" rtlCol="0" anchor="ctr"/>
           <a:lstStyle/>
           <a:p>
-            <a:pPr algn="ctr" indent="0" marL="0">
-              <a:buNone/>
-            </a:pPr>
+            <a:pPr algn="ctr"/>
             <a:r>
               <a:rPr lang="en-US" sz="1300" dirty="0">
                 <a:solidFill>
@@ -3209,9 +3223,6 @@
           <a:bodyPr wrap="square" lIns="0" tIns="0" rIns="0" bIns="0" rtlCol="0" anchor="ctr"/>
           <a:lstStyle/>
           <a:p>
-            <a:pPr indent="0" marL="0">
-              <a:buNone/>
-            </a:pPr>
             <a:r>
               <a:rPr lang="en-US" sz="1500" b="1" dirty="0">
                 <a:solidFill>
@@ -3248,9 +3259,6 @@
           <a:bodyPr wrap="square" lIns="0" tIns="0" rIns="0" bIns="0" rtlCol="0" anchor="ctr"/>
           <a:lstStyle/>
           <a:p>
-            <a:pPr indent="0" marL="0">
-              <a:buNone/>
-            </a:pPr>
             <a:r>
               <a:rPr lang="en-US" sz="1400" spc="180" kern="0" dirty="0">
                 <a:solidFill>
@@ -3287,9 +3295,6 @@
           <a:bodyPr wrap="square" lIns="0" tIns="0" rIns="0" bIns="0" rtlCol="0" anchor="ctr"/>
           <a:lstStyle/>
           <a:p>
-            <a:pPr indent="0" marL="0">
-              <a:buNone/>
-            </a:pPr>
             <a:r>
               <a:rPr lang="en-US" sz="1600" b="1" dirty="0">
                 <a:solidFill>
@@ -3326,9 +3331,6 @@
           <a:bodyPr wrap="square" lIns="0" tIns="0" rIns="0" bIns="0" rtlCol="0" anchor="ctr"/>
           <a:lstStyle/>
           <a:p>
-            <a:pPr indent="0" marL="0">
-              <a:buNone/>
-            </a:pPr>
             <a:r>
               <a:rPr lang="en-US" sz="1600" b="1" spc="120" kern="0" dirty="0">
                 <a:solidFill>
@@ -3365,9 +3367,6 @@
           <a:bodyPr wrap="square" lIns="0" tIns="0" rIns="0" bIns="0" rtlCol="0" anchor="ctr"/>
           <a:lstStyle/>
           <a:p>
-            <a:pPr indent="0" marL="0">
-              <a:buNone/>
-            </a:pPr>
             <a:r>
               <a:rPr lang="en-US" sz="1500" dirty="0">
                 <a:solidFill>
@@ -3404,9 +3403,6 @@
           <a:bodyPr wrap="square" lIns="0" tIns="0" rIns="0" bIns="0" rtlCol="0" anchor="ctr"/>
           <a:lstStyle/>
           <a:p>
-            <a:pPr indent="0" marL="0">
-              <a:buNone/>
-            </a:pPr>
             <a:r>
               <a:rPr lang="en-US" sz="1600" b="1" dirty="0">
                 <a:solidFill>
@@ -3443,9 +3439,6 @@
           <a:bodyPr wrap="square" lIns="0" tIns="0" rIns="0" bIns="0" rtlCol="0" anchor="ctr"/>
           <a:lstStyle/>
           <a:p>
-            <a:pPr indent="0" marL="0">
-              <a:buNone/>
-            </a:pPr>
             <a:r>
               <a:rPr lang="en-US" sz="1600" b="1" spc="120" kern="0" dirty="0">
                 <a:solidFill>
@@ -3482,9 +3475,6 @@
           <a:bodyPr wrap="square" lIns="0" tIns="0" rIns="0" bIns="0" rtlCol="0" anchor="ctr"/>
           <a:lstStyle/>
           <a:p>
-            <a:pPr indent="0" marL="0">
-              <a:buNone/>
-            </a:pPr>
             <a:r>
               <a:rPr lang="en-US" sz="1500" dirty="0">
                 <a:solidFill>
@@ -3521,9 +3511,6 @@
           <a:bodyPr wrap="square" lIns="0" tIns="0" rIns="0" bIns="0" rtlCol="0" anchor="ctr"/>
           <a:lstStyle/>
           <a:p>
-            <a:pPr indent="0" marL="0">
-              <a:buNone/>
-            </a:pPr>
             <a:r>
               <a:rPr lang="en-US" sz="1600" b="1" dirty="0">
                 <a:solidFill>
@@ -3560,9 +3547,6 @@
           <a:bodyPr wrap="square" lIns="0" tIns="0" rIns="0" bIns="0" rtlCol="0" anchor="ctr"/>
           <a:lstStyle/>
           <a:p>
-            <a:pPr indent="0" marL="0">
-              <a:buNone/>
-            </a:pPr>
             <a:r>
               <a:rPr lang="en-US" sz="1600" b="1" spc="120" kern="0" dirty="0">
                 <a:solidFill>
@@ -3599,9 +3583,6 @@
           <a:bodyPr wrap="square" lIns="0" tIns="0" rIns="0" bIns="0" rtlCol="0" anchor="ctr"/>
           <a:lstStyle/>
           <a:p>
-            <a:pPr indent="0" marL="0">
-              <a:buNone/>
-            </a:pPr>
             <a:r>
               <a:rPr lang="en-US" sz="1500" dirty="0">
                 <a:solidFill>
@@ -3692,9 +3673,6 @@
           <a:bodyPr wrap="square" lIns="0" tIns="0" rIns="0" bIns="0" rtlCol="0" anchor="ctr"/>
           <a:lstStyle/>
           <a:p>
-            <a:pPr indent="0" marL="0">
-              <a:buNone/>
-            </a:pPr>
             <a:r>
               <a:rPr lang="en-US" sz="1200" dirty="0">
                 <a:solidFill>
@@ -3731,9 +3709,6 @@
           <a:bodyPr wrap="square" lIns="0" tIns="0" rIns="0" bIns="0" rtlCol="0" anchor="ctr"/>
           <a:lstStyle/>
           <a:p>
-            <a:pPr indent="0" marL="0">
-              <a:buNone/>
-            </a:pPr>
             <a:r>
               <a:rPr lang="en-US" sz="1500" spc="150" kern="0" dirty="0">
                 <a:solidFill>
@@ -3770,9 +3745,7 @@
           <a:bodyPr wrap="square" lIns="0" tIns="0" rIns="0" bIns="0" rtlCol="0" anchor="ctr"/>
           <a:lstStyle/>
           <a:p>
-            <a:pPr algn="r" indent="0" marL="0">
-              <a:buNone/>
-            </a:pPr>
+            <a:pPr algn="r"/>
             <a:r>
               <a:rPr lang="en-US" sz="1500" spc="150" kern="0" dirty="0">
                 <a:solidFill>
@@ -3809,9 +3782,6 @@
           <a:bodyPr wrap="square" lIns="0" tIns="0" rIns="0" bIns="0" rtlCol="0" anchor="ctr"/>
           <a:lstStyle/>
           <a:p>
-            <a:pPr indent="0" marL="0">
-              <a:buNone/>
-            </a:pPr>
             <a:r>
               <a:rPr lang="en-US" sz="1200" dirty="0">
                 <a:solidFill>
@@ -3868,9 +3838,6 @@
           <a:bodyPr wrap="square" lIns="0" tIns="0" rIns="0" bIns="0" rtlCol="0" anchor="ctr"/>
           <a:lstStyle/>
           <a:p>
-            <a:pPr indent="0" marL="0">
-              <a:buNone/>
-            </a:pPr>
             <a:r>
               <a:rPr lang="en-US" sz="1500" dirty="0">
                 <a:solidFill>
@@ -3907,9 +3874,7 @@
           <a:bodyPr wrap="square" lIns="0" tIns="0" rIns="0" bIns="0" rtlCol="0" anchor="ctr"/>
           <a:lstStyle/>
           <a:p>
-            <a:pPr algn="r" indent="0" marL="0">
-              <a:buNone/>
-            </a:pPr>
+            <a:pPr algn="r"/>
             <a:r>
               <a:rPr lang="en-US" sz="1500" spc="150" kern="0" dirty="0">
                 <a:solidFill>
@@ -3946,9 +3911,7 @@
           <a:bodyPr wrap="square" lIns="0" tIns="0" rIns="0" bIns="0" rtlCol="0" anchor="ctr"/>
           <a:lstStyle/>
           <a:p>
-            <a:pPr algn="l" indent="0" marL="0">
-              <a:buNone/>
-            </a:pPr>
+            <a:pPr algn="l"/>
             <a:r>
               <a:rPr lang="en-US" sz="1500" spc="300" kern="0" dirty="0">
                 <a:solidFill>
@@ -3958,7 +3921,7 @@
                 <a:ea typeface="Segoe UI" pitchFamily="34" charset="-122"/>
                 <a:cs typeface="Segoe UI" pitchFamily="34" charset="-120"/>
               </a:rPr>
-              <a:t>08 · MULTI-USE-CASE</a:t>
+              <a:t>09 · MULTI-USE-CASE</a:t>
             </a:r>
             <a:endParaRPr lang="en-US" sz="1500" dirty="0"/>
           </a:p>
@@ -3985,9 +3948,7 @@
           <a:bodyPr wrap="square" lIns="0" tIns="0" rIns="0" bIns="0" rtlCol="0" anchor="t"/>
           <a:lstStyle/>
           <a:p>
-            <a:pPr algn="l" indent="0" marL="0">
-              <a:buNone/>
-            </a:pPr>
+            <a:pPr algn="l"/>
             <a:r>
               <a:rPr lang="en-US" sz="2800" b="1" spc="-75" kern="0" dirty="0">
                 <a:solidFill>
@@ -3999,9 +3960,7 @@
               </a:rPr>
               <a:t>TRANSCRIBED. NEVER </a:t>
             </a:r>
-            <a:pPr algn="l" indent="0" marL="0">
-              <a:buNone/>
-            </a:pPr>
+            <a:pPr algn="l"/>
             <a:r>
               <a:rPr lang="en-US" sz="2800" b="1" spc="-75" kern="0" dirty="0">
                 <a:solidFill>
@@ -4013,9 +3972,7 @@
               </a:rPr>
               <a:t>REDRAWN</a:t>
             </a:r>
-            <a:pPr algn="l" indent="0" marL="0">
-              <a:buNone/>
-            </a:pPr>
+            <a:pPr algn="l"/>
             <a:r>
               <a:rPr lang="en-US" sz="2800" b="1" spc="-75" kern="0" dirty="0">
                 <a:solidFill>
@@ -4066,9 +4023,7 @@
                     <a:bodyPr/>
                     <a:lstStyle/>
                     <a:p>
-                      <a:pPr algn="ctr" indent="0" marL="0">
-                        <a:buNone/>
-                      </a:pPr>
+                      <a:pPr algn="ctr"/>
                       <a:endParaRPr lang="en-US" sz="1100" dirty="0">
                         <a:latin typeface="Segoe UI" charset="0"/>
                         <a:ea typeface="Segoe UI" charset="0"/>
@@ -4123,9 +4078,7 @@
                     <a:bodyPr/>
                     <a:lstStyle/>
                     <a:p>
-                      <a:pPr algn="ctr" indent="0" marL="0">
-                        <a:buNone/>
-                      </a:pPr>
+                      <a:pPr algn="ctr"/>
                       <a:r>
                         <a:rPr lang="en-US" sz="1100" b="1" dirty="0">
                           <a:solidFill>
@@ -4144,9 +4097,7 @@
                       </a:endParaRPr>
                     </a:p>
                     <a:p>
-                      <a:pPr algn="ctr" indent="0" marL="0">
-                        <a:buNone/>
-                      </a:pPr>
+                      <a:pPr algn="ctr"/>
                       <a:r>
                         <a:rPr lang="en-US" sz="1100" b="1" dirty="0">
                           <a:solidFill>
@@ -4212,9 +4163,7 @@
                     <a:bodyPr/>
                     <a:lstStyle/>
                     <a:p>
-                      <a:pPr algn="ctr" indent="0" marL="0">
-                        <a:buNone/>
-                      </a:pPr>
+                      <a:pPr algn="ctr"/>
                       <a:r>
                         <a:rPr lang="en-US" sz="1100" b="1" dirty="0">
                           <a:solidFill>
@@ -4233,9 +4182,7 @@
                       </a:endParaRPr>
                     </a:p>
                     <a:p>
-                      <a:pPr algn="ctr" indent="0" marL="0">
-                        <a:buNone/>
-                      </a:pPr>
+                      <a:pPr algn="ctr"/>
                       <a:r>
                         <a:rPr lang="en-US" sz="1100" b="1" dirty="0">
                           <a:solidFill>
@@ -4301,9 +4248,7 @@
                     <a:bodyPr/>
                     <a:lstStyle/>
                     <a:p>
-                      <a:pPr algn="ctr" indent="0" marL="0">
-                        <a:buNone/>
-                      </a:pPr>
+                      <a:pPr algn="ctr"/>
                       <a:r>
                         <a:rPr lang="en-US" sz="1100" b="1" dirty="0">
                           <a:solidFill>
@@ -4322,9 +4267,7 @@
                       </a:endParaRPr>
                     </a:p>
                     <a:p>
-                      <a:pPr algn="ctr" indent="0" marL="0">
-                        <a:buNone/>
-                      </a:pPr>
+                      <a:pPr algn="ctr"/>
                       <a:r>
                         <a:rPr lang="en-US" sz="1100" b="1" dirty="0">
                           <a:solidFill>
@@ -4390,9 +4333,7 @@
                     <a:bodyPr/>
                     <a:lstStyle/>
                     <a:p>
-                      <a:pPr algn="ctr" indent="0" marL="0">
-                        <a:buNone/>
-                      </a:pPr>
+                      <a:pPr algn="ctr"/>
                       <a:r>
                         <a:rPr lang="en-US" sz="1100" b="1" dirty="0">
                           <a:solidFill>
@@ -4460,9 +4401,7 @@
                     <a:bodyPr/>
                     <a:lstStyle/>
                     <a:p>
-                      <a:pPr algn="ctr" indent="0" marL="0">
-                        <a:buNone/>
-                      </a:pPr>
+                      <a:pPr algn="ctr"/>
                       <a:r>
                         <a:rPr lang="en-US" sz="1300" b="1" dirty="0">
                           <a:solidFill>
@@ -4528,9 +4467,7 @@
                     <a:bodyPr/>
                     <a:lstStyle/>
                     <a:p>
-                      <a:pPr algn="ctr" indent="0" marL="0">
-                        <a:buNone/>
-                      </a:pPr>
+                      <a:pPr algn="ctr"/>
                       <a:r>
                         <a:rPr lang="en-US" sz="1300" b="1" dirty="0">
                           <a:solidFill>
@@ -4596,9 +4533,7 @@
                     <a:bodyPr/>
                     <a:lstStyle/>
                     <a:p>
-                      <a:pPr algn="ctr" indent="0" marL="0">
-                        <a:buNone/>
-                      </a:pPr>
+                      <a:pPr algn="ctr"/>
                       <a:r>
                         <a:rPr lang="en-US" sz="1300" b="1" dirty="0">
                           <a:solidFill>
@@ -4664,9 +4599,7 @@
                     <a:bodyPr/>
                     <a:lstStyle/>
                     <a:p>
-                      <a:pPr algn="ctr" indent="0" marL="0">
-                        <a:buNone/>
-                      </a:pPr>
+                      <a:pPr algn="ctr"/>
                       <a:r>
                         <a:rPr lang="en-US" sz="1300" b="1" dirty="0">
                           <a:solidFill>
@@ -4732,9 +4665,7 @@
                     <a:bodyPr/>
                     <a:lstStyle/>
                     <a:p>
-                      <a:pPr algn="ctr" indent="0" marL="0">
-                        <a:buNone/>
-                      </a:pPr>
+                      <a:pPr algn="ctr"/>
                       <a:r>
                         <a:rPr lang="en-US" sz="1300" b="1" dirty="0">
                           <a:solidFill>
@@ -4802,9 +4733,7 @@
                     <a:bodyPr/>
                     <a:lstStyle/>
                     <a:p>
-                      <a:pPr algn="ctr" indent="0" marL="0">
-                        <a:buNone/>
-                      </a:pPr>
+                      <a:pPr algn="ctr"/>
                       <a:r>
                         <a:rPr lang="en-US" sz="1300" b="1" dirty="0">
                           <a:solidFill>
@@ -4870,9 +4799,7 @@
                     <a:bodyPr/>
                     <a:lstStyle/>
                     <a:p>
-                      <a:pPr algn="ctr" indent="0" marL="0">
-                        <a:buNone/>
-                      </a:pPr>
+                      <a:pPr algn="ctr"/>
                       <a:r>
                         <a:rPr lang="en-US" sz="1300" b="1" dirty="0">
                           <a:solidFill>
@@ -4938,9 +4865,7 @@
                     <a:bodyPr/>
                     <a:lstStyle/>
                     <a:p>
-                      <a:pPr algn="ctr" indent="0" marL="0">
-                        <a:buNone/>
-                      </a:pPr>
+                      <a:pPr algn="ctr"/>
                       <a:r>
                         <a:rPr lang="en-US" sz="1300" b="1" dirty="0">
                           <a:solidFill>
@@ -5006,9 +4931,7 @@
                     <a:bodyPr/>
                     <a:lstStyle/>
                     <a:p>
-                      <a:pPr algn="ctr" indent="0" marL="0">
-                        <a:buNone/>
-                      </a:pPr>
+                      <a:pPr algn="ctr"/>
                       <a:r>
                         <a:rPr lang="en-US" sz="1300" b="1" dirty="0">
                           <a:solidFill>
@@ -5074,9 +4997,7 @@
                     <a:bodyPr/>
                     <a:lstStyle/>
                     <a:p>
-                      <a:pPr algn="ctr" indent="0" marL="0">
-                        <a:buNone/>
-                      </a:pPr>
+                      <a:pPr algn="ctr"/>
                       <a:r>
                         <a:rPr lang="en-US" sz="1300" b="1" dirty="0">
                           <a:solidFill>
@@ -5144,9 +5065,7 @@
                     <a:bodyPr/>
                     <a:lstStyle/>
                     <a:p>
-                      <a:pPr algn="ctr" indent="0" marL="0">
-                        <a:buNone/>
-                      </a:pPr>
+                      <a:pPr algn="ctr"/>
                       <a:r>
                         <a:rPr lang="en-US" sz="1300" b="1" dirty="0">
                           <a:solidFill>
@@ -5212,9 +5131,7 @@
                     <a:bodyPr/>
                     <a:lstStyle/>
                     <a:p>
-                      <a:pPr algn="ctr" indent="0" marL="0">
-                        <a:buNone/>
-                      </a:pPr>
+                      <a:pPr algn="ctr"/>
                       <a:r>
                         <a:rPr lang="en-US" sz="1300" b="1" dirty="0">
                           <a:solidFill>
@@ -5280,9 +5197,7 @@
                     <a:bodyPr/>
                     <a:lstStyle/>
                     <a:p>
-                      <a:pPr algn="ctr" indent="0" marL="0">
-                        <a:buNone/>
-                      </a:pPr>
+                      <a:pPr algn="ctr"/>
                       <a:r>
                         <a:rPr lang="en-US" sz="1300" b="1" dirty="0">
                           <a:solidFill>
@@ -5348,9 +5263,7 @@
                     <a:bodyPr/>
                     <a:lstStyle/>
                     <a:p>
-                      <a:pPr algn="ctr" indent="0" marL="0">
-                        <a:buNone/>
-                      </a:pPr>
+                      <a:pPr algn="ctr"/>
                       <a:r>
                         <a:rPr lang="en-US" sz="1300" b="1" dirty="0">
                           <a:solidFill>
@@ -5416,11 +5329,9 @@
                     <a:bodyPr/>
                     <a:lstStyle/>
                     <a:p>
-                      <a:pPr algn="ctr" indent="0" marL="0">
-                        <a:buNone/>
-                      </a:pPr>
+                      <a:pPr algn="ctr"/>
                       <a:r>
-                        <a:rPr lang="en-US" sz="1300" dirty="0">
+                        <a:rPr lang="en-US" sz="1300" b="0" dirty="0">
                           <a:solidFill>
                             <a:srgbClr val="D0C8B8"/>
                           </a:solidFill>
@@ -5486,9 +5397,7 @@
                     <a:bodyPr/>
                     <a:lstStyle/>
                     <a:p>
-                      <a:pPr algn="ctr" indent="0" marL="0">
-                        <a:buNone/>
-                      </a:pPr>
+                      <a:pPr algn="ctr"/>
                       <a:r>
                         <a:rPr lang="en-US" sz="1300" b="1" dirty="0">
                           <a:solidFill>
@@ -5554,11 +5463,9 @@
                     <a:bodyPr/>
                     <a:lstStyle/>
                     <a:p>
-                      <a:pPr algn="ctr" indent="0" marL="0">
-                        <a:buNone/>
-                      </a:pPr>
+                      <a:pPr algn="ctr"/>
                       <a:r>
-                        <a:rPr lang="en-US" sz="1300" dirty="0">
+                        <a:rPr lang="en-US" sz="1300" b="0" dirty="0">
                           <a:solidFill>
                             <a:srgbClr val="D0C8B8"/>
                           </a:solidFill>
@@ -5622,11 +5529,9 @@
                     <a:bodyPr/>
                     <a:lstStyle/>
                     <a:p>
-                      <a:pPr algn="ctr" indent="0" marL="0">
-                        <a:buNone/>
-                      </a:pPr>
+                      <a:pPr algn="ctr"/>
                       <a:r>
-                        <a:rPr lang="en-US" sz="1300" dirty="0">
+                        <a:rPr lang="en-US" sz="1300" b="0" dirty="0">
                           <a:solidFill>
                             <a:srgbClr val="D0C8B8"/>
                           </a:solidFill>
@@ -5690,11 +5595,9 @@
                     <a:bodyPr/>
                     <a:lstStyle/>
                     <a:p>
-                      <a:pPr algn="ctr" indent="0" marL="0">
-                        <a:buNone/>
-                      </a:pPr>
+                      <a:pPr algn="ctr"/>
                       <a:r>
-                        <a:rPr lang="en-US" sz="1300" dirty="0">
+                        <a:rPr lang="en-US" sz="1300" b="0" dirty="0">
                           <a:solidFill>
                             <a:srgbClr val="D0C8B8"/>
                           </a:solidFill>
@@ -5758,11 +5661,9 @@
                     <a:bodyPr/>
                     <a:lstStyle/>
                     <a:p>
-                      <a:pPr algn="ctr" indent="0" marL="0">
-                        <a:buNone/>
-                      </a:pPr>
+                      <a:pPr algn="ctr"/>
                       <a:r>
-                        <a:rPr lang="en-US" sz="1300" dirty="0">
+                        <a:rPr lang="en-US" sz="1300" b="0" dirty="0">
                           <a:solidFill>
                             <a:srgbClr val="D0C8B8"/>
                           </a:solidFill>
@@ -5872,9 +5773,6 @@
           <a:bodyPr wrap="square" lIns="0" tIns="0" rIns="0" bIns="0" rtlCol="0" anchor="ctr"/>
           <a:lstStyle/>
           <a:p>
-            <a:pPr indent="0" marL="0">
-              <a:buNone/>
-            </a:pPr>
             <a:r>
               <a:rPr lang="en-US" sz="1200" spc="110" kern="0" dirty="0">
                 <a:solidFill>
@@ -5911,9 +5809,6 @@
           <a:bodyPr wrap="square" lIns="0" tIns="0" rIns="0" bIns="0" rtlCol="0" anchor="ctr"/>
           <a:lstStyle/>
           <a:p>
-            <a:pPr indent="0" marL="0">
-              <a:buNone/>
-            </a:pPr>
             <a:r>
               <a:rPr lang="en-US" sz="1500" dirty="0">
                 <a:solidFill>
@@ -5950,9 +5845,6 @@
           <a:bodyPr wrap="square" lIns="0" tIns="0" rIns="0" bIns="0" rtlCol="0" anchor="t"/>
           <a:lstStyle/>
           <a:p>
-            <a:pPr indent="0" marL="0">
-              <a:buNone/>
-            </a:pPr>
             <a:r>
               <a:rPr lang="en-US" sz="1400" dirty="0">
                 <a:solidFill>
@@ -5989,9 +5881,6 @@
           <a:bodyPr wrap="square" lIns="0" tIns="0" rIns="0" bIns="0" rtlCol="0" anchor="ctr"/>
           <a:lstStyle/>
           <a:p>
-            <a:pPr indent="0" marL="0">
-              <a:buNone/>
-            </a:pPr>
             <a:r>
               <a:rPr lang="en-US" sz="2200" b="1" dirty="0">
                 <a:solidFill>
@@ -6053,9 +5942,6 @@
           <a:bodyPr wrap="square" lIns="0" tIns="0" rIns="0" bIns="0" rtlCol="0" anchor="ctr"/>
           <a:lstStyle/>
           <a:p>
-            <a:pPr indent="0" marL="0">
-              <a:buNone/>
-            </a:pPr>
             <a:r>
               <a:rPr lang="en-US" sz="1200" spc="110" kern="0" dirty="0">
                 <a:solidFill>
@@ -6092,9 +5978,6 @@
           <a:bodyPr wrap="square" lIns="0" tIns="0" rIns="0" bIns="0" rtlCol="0" anchor="ctr"/>
           <a:lstStyle/>
           <a:p>
-            <a:pPr indent="0" marL="0">
-              <a:buNone/>
-            </a:pPr>
             <a:r>
               <a:rPr lang="en-US" sz="1500" dirty="0">
                 <a:solidFill>
@@ -6131,9 +6014,6 @@
           <a:bodyPr wrap="square" lIns="0" tIns="0" rIns="0" bIns="0" rtlCol="0" anchor="t"/>
           <a:lstStyle/>
           <a:p>
-            <a:pPr indent="0" marL="0">
-              <a:buNone/>
-            </a:pPr>
             <a:r>
               <a:rPr lang="en-US" sz="1400" dirty="0">
                 <a:solidFill>
@@ -6170,9 +6050,6 @@
           <a:bodyPr wrap="square" lIns="0" tIns="0" rIns="0" bIns="0" rtlCol="0" anchor="ctr"/>
           <a:lstStyle/>
           <a:p>
-            <a:pPr indent="0" marL="0">
-              <a:buNone/>
-            </a:pPr>
             <a:r>
               <a:rPr lang="en-US" sz="2200" b="1" dirty="0">
                 <a:solidFill>
@@ -6234,9 +6111,6 @@
           <a:bodyPr wrap="square" lIns="0" tIns="0" rIns="0" bIns="0" rtlCol="0" anchor="ctr"/>
           <a:lstStyle/>
           <a:p>
-            <a:pPr indent="0" marL="0">
-              <a:buNone/>
-            </a:pPr>
             <a:r>
               <a:rPr lang="en-US" sz="1200" spc="110" kern="0" dirty="0">
                 <a:solidFill>
@@ -6273,9 +6147,6 @@
           <a:bodyPr wrap="square" lIns="0" tIns="0" rIns="0" bIns="0" rtlCol="0" anchor="ctr"/>
           <a:lstStyle/>
           <a:p>
-            <a:pPr indent="0" marL="0">
-              <a:buNone/>
-            </a:pPr>
             <a:r>
               <a:rPr lang="en-US" sz="1500" dirty="0">
                 <a:solidFill>
@@ -6312,9 +6183,6 @@
           <a:bodyPr wrap="square" lIns="0" tIns="0" rIns="0" bIns="0" rtlCol="0" anchor="t"/>
           <a:lstStyle/>
           <a:p>
-            <a:pPr indent="0" marL="0">
-              <a:buNone/>
-            </a:pPr>
             <a:r>
               <a:rPr lang="en-US" sz="1400" dirty="0">
                 <a:solidFill>
@@ -6351,9 +6219,6 @@
           <a:bodyPr wrap="square" lIns="0" tIns="0" rIns="0" bIns="0" rtlCol="0" anchor="ctr"/>
           <a:lstStyle/>
           <a:p>
-            <a:pPr indent="0" marL="0">
-              <a:buNone/>
-            </a:pPr>
             <a:r>
               <a:rPr lang="en-US" sz="2200" b="1" dirty="0">
                 <a:solidFill>
@@ -6390,9 +6255,6 @@
           <a:bodyPr wrap="square" lIns="0" tIns="0" rIns="0" bIns="0" rtlCol="0" anchor="ctr"/>
           <a:lstStyle/>
           <a:p>
-            <a:pPr indent="0" marL="0">
-              <a:buNone/>
-            </a:pPr>
             <a:r>
               <a:rPr lang="en-US" sz="1500" dirty="0">
                 <a:solidFill>
@@ -6483,9 +6345,6 @@
           <a:bodyPr wrap="square" lIns="0" tIns="0" rIns="0" bIns="0" rtlCol="0" anchor="ctr"/>
           <a:lstStyle/>
           <a:p>
-            <a:pPr indent="0" marL="0">
-              <a:buNone/>
-            </a:pPr>
             <a:r>
               <a:rPr lang="en-US" sz="1200" dirty="0">
                 <a:solidFill>
@@ -6522,9 +6381,6 @@
           <a:bodyPr wrap="square" lIns="0" tIns="0" rIns="0" bIns="0" rtlCol="0" anchor="ctr"/>
           <a:lstStyle/>
           <a:p>
-            <a:pPr indent="0" marL="0">
-              <a:buNone/>
-            </a:pPr>
             <a:r>
               <a:rPr lang="en-US" sz="1500" spc="150" kern="0" dirty="0">
                 <a:solidFill>
@@ -6561,9 +6417,7 @@
           <a:bodyPr wrap="square" lIns="0" tIns="0" rIns="0" bIns="0" rtlCol="0" anchor="ctr"/>
           <a:lstStyle/>
           <a:p>
-            <a:pPr algn="r" indent="0" marL="0">
-              <a:buNone/>
-            </a:pPr>
+            <a:pPr algn="r"/>
             <a:r>
               <a:rPr lang="en-US" sz="1500" spc="150" kern="0" dirty="0">
                 <a:solidFill>
@@ -6573,7 +6427,7 @@
                 <a:ea typeface="Segoe UI" pitchFamily="34" charset="-122"/>
                 <a:cs typeface="Segoe UI" pitchFamily="34" charset="-120"/>
               </a:rPr>
-              <a:t>09 // ROADMAP</a:t>
+              <a:t>11 // ROADMAP</a:t>
             </a:r>
             <a:endParaRPr lang="en-US" sz="1500" dirty="0"/>
           </a:p>
@@ -6600,9 +6454,6 @@
           <a:bodyPr wrap="square" lIns="0" tIns="0" rIns="0" bIns="0" rtlCol="0" anchor="ctr"/>
           <a:lstStyle/>
           <a:p>
-            <a:pPr indent="0" marL="0">
-              <a:buNone/>
-            </a:pPr>
             <a:r>
               <a:rPr lang="en-US" sz="1200" dirty="0">
                 <a:solidFill>
@@ -6659,9 +6510,6 @@
           <a:bodyPr wrap="square" lIns="0" tIns="0" rIns="0" bIns="0" rtlCol="0" anchor="ctr"/>
           <a:lstStyle/>
           <a:p>
-            <a:pPr indent="0" marL="0">
-              <a:buNone/>
-            </a:pPr>
             <a:r>
               <a:rPr lang="en-US" sz="1500" dirty="0">
                 <a:solidFill>
@@ -6698,9 +6546,7 @@
           <a:bodyPr wrap="square" lIns="0" tIns="0" rIns="0" bIns="0" rtlCol="0" anchor="ctr"/>
           <a:lstStyle/>
           <a:p>
-            <a:pPr algn="r" indent="0" marL="0">
-              <a:buNone/>
-            </a:pPr>
+            <a:pPr algn="r"/>
             <a:r>
               <a:rPr lang="en-US" sz="1500" spc="150" kern="0" dirty="0">
                 <a:solidFill>
@@ -6737,9 +6583,7 @@
           <a:bodyPr wrap="square" lIns="0" tIns="0" rIns="0" bIns="0" rtlCol="0" anchor="ctr"/>
           <a:lstStyle/>
           <a:p>
-            <a:pPr algn="l" indent="0" marL="0">
-              <a:buNone/>
-            </a:pPr>
+            <a:pPr algn="l"/>
             <a:r>
               <a:rPr lang="en-US" sz="1500" spc="300" kern="0" dirty="0">
                 <a:solidFill>
@@ -6749,7 +6593,7 @@
                 <a:ea typeface="Segoe UI" pitchFamily="34" charset="-122"/>
                 <a:cs typeface="Segoe UI" pitchFamily="34" charset="-120"/>
               </a:rPr>
-              <a:t>10 · BUSINESS CASE + ROADMAP</a:t>
+              <a:t>11 · BUSINESS CASE + ROADMAP</a:t>
             </a:r>
             <a:endParaRPr lang="en-US" sz="1500" dirty="0"/>
           </a:p>
@@ -6776,9 +6620,7 @@
           <a:bodyPr wrap="square" lIns="0" tIns="0" rIns="0" bIns="0" rtlCol="0" anchor="t"/>
           <a:lstStyle/>
           <a:p>
-            <a:pPr algn="l" indent="0" marL="0">
-              <a:buNone/>
-            </a:pPr>
+            <a:pPr algn="l"/>
             <a:r>
               <a:rPr lang="en-US" sz="2800" b="1" spc="-75" kern="0" dirty="0">
                 <a:solidFill>
@@ -6790,9 +6632,7 @@
               </a:rPr>
               <a:t>BUDGET FOLLOWS </a:t>
             </a:r>
-            <a:pPr algn="l" indent="0" marL="0">
-              <a:buNone/>
-            </a:pPr>
+            <a:pPr algn="l"/>
             <a:r>
               <a:rPr lang="en-US" sz="2800" b="1" spc="-75" kern="0" dirty="0">
                 <a:solidFill>
@@ -6804,9 +6644,7 @@
               </a:rPr>
               <a:t>BLAST RADIUS</a:t>
             </a:r>
-            <a:pPr algn="l" indent="0" marL="0">
-              <a:buNone/>
-            </a:pPr>
+            <a:pPr algn="l"/>
             <a:r>
               <a:rPr lang="en-US" sz="2800" b="1" spc="-75" kern="0" dirty="0">
                 <a:solidFill>
@@ -6843,9 +6681,7 @@
           <a:bodyPr wrap="square" lIns="0" tIns="0" rIns="0" bIns="0" rtlCol="0" anchor="ctr"/>
           <a:lstStyle/>
           <a:p>
-            <a:pPr algn="r" indent="0" marL="0">
-              <a:buNone/>
-            </a:pPr>
+            <a:pPr algn="r"/>
             <a:r>
               <a:rPr lang="en-US" sz="2400" b="1" dirty="0">
                 <a:solidFill>
@@ -6855,7 +6691,7 @@
                 <a:ea typeface="Segoe UI" pitchFamily="34" charset="-122"/>
                 <a:cs typeface="Segoe UI" pitchFamily="34" charset="-120"/>
               </a:rPr>
-              <a:t>~40,000 / week</a:t>
+              <a:t>Tens of thousands / week  (directional)</a:t>
             </a:r>
             <a:endParaRPr lang="en-US" sz="2400" dirty="0"/>
           </a:p>
@@ -6882,9 +6718,7 @@
           <a:bodyPr wrap="square" lIns="0" tIns="0" rIns="0" bIns="0" rtlCol="0" anchor="ctr"/>
           <a:lstStyle/>
           <a:p>
-            <a:pPr algn="r" indent="0" marL="0">
-              <a:buNone/>
-            </a:pPr>
+            <a:pPr algn="r"/>
             <a:r>
               <a:rPr lang="en-US" sz="1100" spc="60" kern="0" dirty="0">
                 <a:solidFill>
@@ -6966,9 +6800,6 @@
           <a:bodyPr wrap="square" lIns="0" tIns="0" rIns="0" bIns="0" rtlCol="0" anchor="ctr"/>
           <a:lstStyle/>
           <a:p>
-            <a:pPr indent="0" marL="0">
-              <a:buNone/>
-            </a:pPr>
             <a:r>
               <a:rPr lang="en-US" sz="1200" spc="140" kern="0" dirty="0">
                 <a:solidFill>
@@ -7005,9 +6836,6 @@
           <a:bodyPr wrap="square" lIns="0" tIns="0" rIns="0" bIns="0" rtlCol="0" anchor="ctr"/>
           <a:lstStyle/>
           <a:p>
-            <a:pPr indent="0" marL="0">
-              <a:buNone/>
-            </a:pPr>
             <a:r>
               <a:rPr lang="en-US" sz="1500" b="1" dirty="0">
                 <a:solidFill>
@@ -7044,9 +6872,6 @@
           <a:bodyPr wrap="square" lIns="0" tIns="0" rIns="0" bIns="0" rtlCol="0" anchor="t"/>
           <a:lstStyle/>
           <a:p>
-            <a:pPr indent="0" marL="0">
-              <a:buNone/>
-            </a:pPr>
             <a:r>
               <a:rPr lang="en-US" sz="1400" dirty="0">
                 <a:solidFill>
@@ -7128,9 +6953,6 @@
           <a:bodyPr wrap="square" lIns="0" tIns="0" rIns="0" bIns="0" rtlCol="0" anchor="ctr"/>
           <a:lstStyle/>
           <a:p>
-            <a:pPr indent="0" marL="0">
-              <a:buNone/>
-            </a:pPr>
             <a:r>
               <a:rPr lang="en-US" sz="1200" spc="140" kern="0" dirty="0">
                 <a:solidFill>
@@ -7167,9 +6989,6 @@
           <a:bodyPr wrap="square" lIns="0" tIns="0" rIns="0" bIns="0" rtlCol="0" anchor="ctr"/>
           <a:lstStyle/>
           <a:p>
-            <a:pPr indent="0" marL="0">
-              <a:buNone/>
-            </a:pPr>
             <a:r>
               <a:rPr lang="en-US" sz="1500" b="1" dirty="0">
                 <a:solidFill>
@@ -7206,9 +7025,6 @@
           <a:bodyPr wrap="square" lIns="0" tIns="0" rIns="0" bIns="0" rtlCol="0" anchor="t"/>
           <a:lstStyle/>
           <a:p>
-            <a:pPr indent="0" marL="0">
-              <a:buNone/>
-            </a:pPr>
             <a:r>
               <a:rPr lang="en-US" sz="1400" dirty="0">
                 <a:solidFill>
@@ -7290,9 +7106,6 @@
           <a:bodyPr wrap="square" lIns="0" tIns="0" rIns="0" bIns="0" rtlCol="0" anchor="ctr"/>
           <a:lstStyle/>
           <a:p>
-            <a:pPr indent="0" marL="0">
-              <a:buNone/>
-            </a:pPr>
             <a:r>
               <a:rPr lang="en-US" sz="1200" spc="140" kern="0" dirty="0">
                 <a:solidFill>
@@ -7329,9 +7142,6 @@
           <a:bodyPr wrap="square" lIns="0" tIns="0" rIns="0" bIns="0" rtlCol="0" anchor="ctr"/>
           <a:lstStyle/>
           <a:p>
-            <a:pPr indent="0" marL="0">
-              <a:buNone/>
-            </a:pPr>
             <a:r>
               <a:rPr lang="en-US" sz="1500" b="1" dirty="0">
                 <a:solidFill>
@@ -7368,9 +7178,6 @@
           <a:bodyPr wrap="square" lIns="0" tIns="0" rIns="0" bIns="0" rtlCol="0" anchor="t"/>
           <a:lstStyle/>
           <a:p>
-            <a:pPr indent="0" marL="0">
-              <a:buNone/>
-            </a:pPr>
             <a:r>
               <a:rPr lang="en-US" sz="1400" dirty="0">
                 <a:solidFill>
@@ -7432,9 +7239,6 @@
           <a:bodyPr wrap="square" lIns="0" tIns="0" rIns="0" bIns="0" rtlCol="0" anchor="ctr"/>
           <a:lstStyle/>
           <a:p>
-            <a:pPr indent="0" marL="0">
-              <a:buNone/>
-            </a:pPr>
             <a:r>
               <a:rPr lang="en-US" sz="1200" spc="140" kern="0" dirty="0">
                 <a:solidFill>
@@ -7471,9 +7275,6 @@
           <a:bodyPr wrap="square" lIns="0" tIns="0" rIns="0" bIns="0" rtlCol="0" anchor="ctr"/>
           <a:lstStyle/>
           <a:p>
-            <a:pPr indent="0" marL="0">
-              <a:buNone/>
-            </a:pPr>
             <a:r>
               <a:rPr lang="en-US" sz="1600" b="1" dirty="0">
                 <a:solidFill>
@@ -7510,9 +7311,6 @@
           <a:bodyPr wrap="square" lIns="0" tIns="0" rIns="0" bIns="0" rtlCol="0" anchor="ctr"/>
           <a:lstStyle/>
           <a:p>
-            <a:pPr indent="0" marL="0">
-              <a:buNone/>
-            </a:pPr>
             <a:r>
               <a:rPr lang="en-US" sz="1300" dirty="0">
                 <a:solidFill>
@@ -7549,9 +7347,6 @@
           <a:bodyPr wrap="square" lIns="0" tIns="0" rIns="0" bIns="0" rtlCol="0" anchor="t"/>
           <a:lstStyle/>
           <a:p>
-            <a:pPr indent="0" marL="0">
-              <a:buNone/>
-            </a:pPr>
             <a:r>
               <a:rPr lang="en-US" sz="1300" dirty="0">
                 <a:solidFill>
@@ -7613,9 +7408,6 @@
           <a:bodyPr wrap="square" lIns="0" tIns="0" rIns="0" bIns="0" rtlCol="0" anchor="ctr"/>
           <a:lstStyle/>
           <a:p>
-            <a:pPr indent="0" marL="0">
-              <a:buNone/>
-            </a:pPr>
             <a:r>
               <a:rPr lang="en-US" sz="1200" spc="140" kern="0" dirty="0">
                 <a:solidFill>
@@ -7652,9 +7444,6 @@
           <a:bodyPr wrap="square" lIns="0" tIns="0" rIns="0" bIns="0" rtlCol="0" anchor="ctr"/>
           <a:lstStyle/>
           <a:p>
-            <a:pPr indent="0" marL="0">
-              <a:buNone/>
-            </a:pPr>
             <a:r>
               <a:rPr lang="en-US" sz="1600" b="1" dirty="0">
                 <a:solidFill>
@@ -7691,9 +7480,6 @@
           <a:bodyPr wrap="square" lIns="0" tIns="0" rIns="0" bIns="0" rtlCol="0" anchor="ctr"/>
           <a:lstStyle/>
           <a:p>
-            <a:pPr indent="0" marL="0">
-              <a:buNone/>
-            </a:pPr>
             <a:r>
               <a:rPr lang="en-US" sz="1300" dirty="0">
                 <a:solidFill>
@@ -7730,9 +7516,6 @@
           <a:bodyPr wrap="square" lIns="0" tIns="0" rIns="0" bIns="0" rtlCol="0" anchor="t"/>
           <a:lstStyle/>
           <a:p>
-            <a:pPr indent="0" marL="0">
-              <a:buNone/>
-            </a:pPr>
             <a:r>
               <a:rPr lang="en-US" sz="1300" dirty="0">
                 <a:solidFill>
@@ -7794,9 +7577,6 @@
           <a:bodyPr wrap="square" lIns="0" tIns="0" rIns="0" bIns="0" rtlCol="0" anchor="ctr"/>
           <a:lstStyle/>
           <a:p>
-            <a:pPr indent="0" marL="0">
-              <a:buNone/>
-            </a:pPr>
             <a:r>
               <a:rPr lang="en-US" sz="1200" spc="140" kern="0" dirty="0">
                 <a:solidFill>
@@ -7833,9 +7613,6 @@
           <a:bodyPr wrap="square" lIns="0" tIns="0" rIns="0" bIns="0" rtlCol="0" anchor="ctr"/>
           <a:lstStyle/>
           <a:p>
-            <a:pPr indent="0" marL="0">
-              <a:buNone/>
-            </a:pPr>
             <a:r>
               <a:rPr lang="en-US" sz="1600" b="1" dirty="0">
                 <a:solidFill>
@@ -7872,9 +7649,6 @@
           <a:bodyPr wrap="square" lIns="0" tIns="0" rIns="0" bIns="0" rtlCol="0" anchor="ctr"/>
           <a:lstStyle/>
           <a:p>
-            <a:pPr indent="0" marL="0">
-              <a:buNone/>
-            </a:pPr>
             <a:r>
               <a:rPr lang="en-US" sz="1300" dirty="0">
                 <a:solidFill>
@@ -7911,9 +7685,6 @@
           <a:bodyPr wrap="square" lIns="0" tIns="0" rIns="0" bIns="0" rtlCol="0" anchor="t"/>
           <a:lstStyle/>
           <a:p>
-            <a:pPr indent="0" marL="0">
-              <a:buNone/>
-            </a:pPr>
             <a:r>
               <a:rPr lang="en-US" sz="1300" dirty="0">
                 <a:solidFill>
@@ -7975,9 +7746,6 @@
           <a:bodyPr wrap="square" lIns="0" tIns="0" rIns="0" bIns="0" rtlCol="0" anchor="ctr"/>
           <a:lstStyle/>
           <a:p>
-            <a:pPr indent="0" marL="0">
-              <a:buNone/>
-            </a:pPr>
             <a:r>
               <a:rPr lang="en-US" sz="1200" spc="140" kern="0" dirty="0">
                 <a:solidFill>
@@ -8014,9 +7782,6 @@
           <a:bodyPr wrap="square" lIns="0" tIns="0" rIns="0" bIns="0" rtlCol="0" anchor="ctr"/>
           <a:lstStyle/>
           <a:p>
-            <a:pPr indent="0" marL="0">
-              <a:buNone/>
-            </a:pPr>
             <a:r>
               <a:rPr lang="en-US" sz="1600" b="1" dirty="0">
                 <a:solidFill>
@@ -8053,9 +7818,6 @@
           <a:bodyPr wrap="square" lIns="0" tIns="0" rIns="0" bIns="0" rtlCol="0" anchor="ctr"/>
           <a:lstStyle/>
           <a:p>
-            <a:pPr indent="0" marL="0">
-              <a:buNone/>
-            </a:pPr>
             <a:r>
               <a:rPr lang="en-US" sz="1300" dirty="0">
                 <a:solidFill>
@@ -8092,9 +7854,6 @@
           <a:bodyPr wrap="square" lIns="0" tIns="0" rIns="0" bIns="0" rtlCol="0" anchor="t"/>
           <a:lstStyle/>
           <a:p>
-            <a:pPr indent="0" marL="0">
-              <a:buNone/>
-            </a:pPr>
             <a:r>
               <a:rPr lang="en-US" sz="1300" dirty="0">
                 <a:solidFill>
@@ -8156,9 +7915,6 @@
           <a:bodyPr wrap="square" lIns="0" tIns="0" rIns="0" bIns="0" rtlCol="0" anchor="ctr"/>
           <a:lstStyle/>
           <a:p>
-            <a:pPr indent="0" marL="0">
-              <a:buNone/>
-            </a:pPr>
             <a:r>
               <a:rPr lang="en-US" sz="1500" b="1" dirty="0">
                 <a:solidFill>
@@ -8195,9 +7951,6 @@
           <a:bodyPr wrap="square" lIns="0" tIns="0" rIns="0" bIns="0" rtlCol="0" anchor="ctr"/>
           <a:lstStyle/>
           <a:p>
-            <a:pPr indent="0" marL="0">
-              <a:buNone/>
-            </a:pPr>
             <a:r>
               <a:rPr lang="en-US" sz="1400" dirty="0">
                 <a:solidFill>
@@ -8207,7 +7960,7 @@
                 <a:ea typeface="Segoe UI" pitchFamily="34" charset="-122"/>
                 <a:cs typeface="Segoe UI" pitchFamily="34" charset="-120"/>
               </a:rPr>
-              <a:t>Measured gate (submission/latency_bench.json, n=10000): p50=0.44 ms · p95=0.57 ms — under target; quote measured vs targets separately.</a:t>
+              <a:t>Measured gate (submission/latency_bench.json, n=10000): p50=0.43 ms · p95=0.48 ms — under target; quote measured vs targets separately.</a:t>
             </a:r>
             <a:endParaRPr lang="en-US" sz="1400" dirty="0"/>
           </a:p>
@@ -8234,9 +7987,6 @@
           <a:bodyPr wrap="square" lIns="0" tIns="0" rIns="0" bIns="0" rtlCol="0" anchor="t"/>
           <a:lstStyle/>
           <a:p>
-            <a:pPr indent="0" marL="0">
-              <a:buNone/>
-            </a:pPr>
             <a:r>
               <a:rPr lang="en-US" sz="1500" dirty="0">
                 <a:solidFill>
@@ -8327,9 +8077,6 @@
           <a:bodyPr wrap="square" lIns="0" tIns="0" rIns="0" bIns="0" rtlCol="0" anchor="ctr"/>
           <a:lstStyle/>
           <a:p>
-            <a:pPr indent="0" marL="0">
-              <a:buNone/>
-            </a:pPr>
             <a:r>
               <a:rPr lang="en-US" sz="1200" dirty="0">
                 <a:solidFill>
@@ -8366,9 +8113,6 @@
           <a:bodyPr wrap="square" lIns="0" tIns="0" rIns="0" bIns="0" rtlCol="0" anchor="ctr"/>
           <a:lstStyle/>
           <a:p>
-            <a:pPr indent="0" marL="0">
-              <a:buNone/>
-            </a:pPr>
             <a:r>
               <a:rPr lang="en-US" sz="1500" spc="150" kern="0" dirty="0">
                 <a:solidFill>
@@ -8405,9 +8149,7 @@
           <a:bodyPr wrap="square" lIns="0" tIns="0" rIns="0" bIns="0" rtlCol="0" anchor="ctr"/>
           <a:lstStyle/>
           <a:p>
-            <a:pPr algn="r" indent="0" marL="0">
-              <a:buNone/>
-            </a:pPr>
+            <a:pPr algn="r"/>
             <a:r>
               <a:rPr lang="en-US" sz="1500" spc="150" kern="0" dirty="0">
                 <a:solidFill>
@@ -8417,7 +8159,7 @@
                 <a:ea typeface="Segoe UI" pitchFamily="34" charset="-122"/>
                 <a:cs typeface="Segoe UI" pitchFamily="34" charset="-120"/>
               </a:rPr>
-              <a:t>10 // FNR</a:t>
+              <a:t>12 // FNR</a:t>
             </a:r>
             <a:endParaRPr lang="en-US" sz="1500" dirty="0"/>
           </a:p>
@@ -8444,9 +8186,6 @@
           <a:bodyPr wrap="square" lIns="0" tIns="0" rIns="0" bIns="0" rtlCol="0" anchor="ctr"/>
           <a:lstStyle/>
           <a:p>
-            <a:pPr indent="0" marL="0">
-              <a:buNone/>
-            </a:pPr>
             <a:r>
               <a:rPr lang="en-US" sz="1200" dirty="0">
                 <a:solidFill>
@@ -8503,9 +8242,6 @@
           <a:bodyPr wrap="square" lIns="0" tIns="0" rIns="0" bIns="0" rtlCol="0" anchor="ctr"/>
           <a:lstStyle/>
           <a:p>
-            <a:pPr indent="0" marL="0">
-              <a:buNone/>
-            </a:pPr>
             <a:r>
               <a:rPr lang="en-US" sz="1500" dirty="0">
                 <a:solidFill>
@@ -8542,9 +8278,7 @@
           <a:bodyPr wrap="square" lIns="0" tIns="0" rIns="0" bIns="0" rtlCol="0" anchor="ctr"/>
           <a:lstStyle/>
           <a:p>
-            <a:pPr algn="r" indent="0" marL="0">
-              <a:buNone/>
-            </a:pPr>
+            <a:pPr algn="r"/>
             <a:r>
               <a:rPr lang="en-US" sz="1500" spc="150" kern="0" dirty="0">
                 <a:solidFill>
@@ -8581,9 +8315,7 @@
           <a:bodyPr wrap="square" lIns="0" tIns="0" rIns="0" bIns="0" rtlCol="0" anchor="ctr"/>
           <a:lstStyle/>
           <a:p>
-            <a:pPr algn="l" indent="0" marL="0">
-              <a:buNone/>
-            </a:pPr>
+            <a:pPr algn="l"/>
             <a:r>
               <a:rPr lang="en-US" sz="1500" spc="300" kern="0" dirty="0">
                 <a:solidFill>
@@ -8593,7 +8325,7 @@
                 <a:ea typeface="Segoe UI" pitchFamily="34" charset="-122"/>
                 <a:cs typeface="Segoe UI" pitchFamily="34" charset="-120"/>
               </a:rPr>
-              <a:t>11 · RISKS WE PUBLISH</a:t>
+              <a:t>12 · RISKS WE PUBLISH</a:t>
             </a:r>
             <a:endParaRPr lang="en-US" sz="1500" dirty="0"/>
           </a:p>
@@ -8620,9 +8352,7 @@
           <a:bodyPr wrap="square" lIns="0" tIns="0" rIns="0" bIns="0" rtlCol="0" anchor="t"/>
           <a:lstStyle/>
           <a:p>
-            <a:pPr algn="l" indent="0" marL="0">
-              <a:buNone/>
-            </a:pPr>
+            <a:pPr algn="l"/>
             <a:r>
               <a:rPr lang="en-US" sz="2800" b="1" spc="-75" kern="0" dirty="0">
                 <a:solidFill>
@@ -8634,9 +8364,7 @@
               </a:rPr>
               <a:t>WE PUBLISH OUR OWN </a:t>
             </a:r>
-            <a:pPr algn="l" indent="0" marL="0">
-              <a:buNone/>
-            </a:pPr>
+            <a:pPr algn="l"/>
             <a:r>
               <a:rPr lang="en-US" sz="2800" b="1" spc="-75" kern="0" dirty="0">
                 <a:solidFill>
@@ -8648,9 +8376,7 @@
               </a:rPr>
               <a:t>MISS RATE</a:t>
             </a:r>
-            <a:pPr algn="l" indent="0" marL="0">
-              <a:buNone/>
-            </a:pPr>
+            <a:pPr algn="l"/>
             <a:r>
               <a:rPr lang="en-US" sz="2800" b="1" spc="-75" kern="0" dirty="0">
                 <a:solidFill>
@@ -8687,9 +8413,6 @@
           <a:bodyPr wrap="square" lIns="0" tIns="0" rIns="0" bIns="0" rtlCol="0" anchor="ctr"/>
           <a:lstStyle/>
           <a:p>
-            <a:pPr indent="0" marL="0">
-              <a:buNone/>
-            </a:pPr>
             <a:r>
               <a:rPr lang="en-US" sz="1500" dirty="0">
                 <a:solidFill>
@@ -8771,9 +8494,6 @@
           <a:bodyPr wrap="square" lIns="0" tIns="0" rIns="0" bIns="0" rtlCol="0" anchor="ctr"/>
           <a:lstStyle/>
           <a:p>
-            <a:pPr indent="0" marL="0">
-              <a:buNone/>
-            </a:pPr>
             <a:r>
               <a:rPr lang="en-US" sz="1300" spc="120" kern="0" dirty="0">
                 <a:solidFill>
@@ -8810,9 +8530,7 @@
           <a:bodyPr wrap="square" lIns="0" tIns="0" rIns="0" bIns="0" rtlCol="0" anchor="ctr"/>
           <a:lstStyle/>
           <a:p>
-            <a:pPr algn="r" indent="0" marL="0">
-              <a:buNone/>
-            </a:pPr>
+            <a:pPr algn="r"/>
             <a:r>
               <a:rPr lang="en-US" sz="1300" spc="100" kern="0" dirty="0">
                 <a:solidFill>
@@ -8849,9 +8567,6 @@
           <a:bodyPr wrap="square" lIns="0" tIns="0" rIns="0" bIns="0" rtlCol="0" anchor="t"/>
           <a:lstStyle/>
           <a:p>
-            <a:pPr indent="0" marL="0">
-              <a:buNone/>
-            </a:pPr>
             <a:r>
               <a:rPr lang="en-US" sz="1400" dirty="0">
                 <a:solidFill>
@@ -8866,9 +8581,6 @@
             <a:endParaRPr lang="en-US" sz="1400" dirty="0"/>
           </a:p>
           <a:p>
-            <a:pPr indent="0" marL="0">
-              <a:buNone/>
-            </a:pPr>
             <a:r>
               <a:rPr lang="en-US" sz="1400" dirty="0">
                 <a:solidFill>
@@ -8883,9 +8595,6 @@
             <a:endParaRPr lang="en-US" sz="1400" dirty="0"/>
           </a:p>
           <a:p>
-            <a:pPr indent="0" marL="0">
-              <a:buNone/>
-            </a:pPr>
             <a:r>
               <a:rPr lang="en-US" sz="1400" dirty="0">
                 <a:solidFill>
@@ -8900,9 +8609,6 @@
             <a:endParaRPr lang="en-US" sz="1400" dirty="0"/>
           </a:p>
           <a:p>
-            <a:pPr indent="0" marL="0">
-              <a:buNone/>
-            </a:pPr>
             <a:r>
               <a:rPr lang="en-US" sz="1400" dirty="0">
                 <a:solidFill>
@@ -8917,9 +8623,6 @@
             <a:endParaRPr lang="en-US" sz="1400" dirty="0"/>
           </a:p>
           <a:p>
-            <a:pPr indent="0" marL="0">
-              <a:buNone/>
-            </a:pPr>
             <a:r>
               <a:rPr lang="en-US" sz="1400" dirty="0">
                 <a:solidFill>
@@ -8934,9 +8637,6 @@
             <a:endParaRPr lang="en-US" sz="1400" dirty="0"/>
           </a:p>
           <a:p>
-            <a:pPr indent="0" marL="0">
-              <a:buNone/>
-            </a:pPr>
             <a:r>
               <a:rPr lang="en-US" sz="1400" dirty="0">
                 <a:solidFill>
@@ -8951,9 +8651,6 @@
             <a:endParaRPr lang="en-US" sz="1400" dirty="0"/>
           </a:p>
           <a:p>
-            <a:pPr indent="0" marL="0">
-              <a:buNone/>
-            </a:pPr>
             <a:r>
               <a:rPr lang="en-US" sz="1400" dirty="0">
                 <a:solidFill>
@@ -8968,9 +8665,6 @@
             <a:endParaRPr lang="en-US" sz="1400" dirty="0"/>
           </a:p>
           <a:p>
-            <a:pPr indent="0" marL="0">
-              <a:buNone/>
-            </a:pPr>
             <a:r>
               <a:rPr lang="en-US" sz="1400" dirty="0">
                 <a:solidFill>
@@ -8985,9 +8679,6 @@
             <a:endParaRPr lang="en-US" sz="1400" dirty="0"/>
           </a:p>
           <a:p>
-            <a:pPr indent="0" marL="0">
-              <a:buNone/>
-            </a:pPr>
             <a:r>
               <a:rPr lang="en-US" sz="1400" dirty="0">
                 <a:solidFill>
@@ -9002,9 +8693,6 @@
             <a:endParaRPr lang="en-US" sz="1400" dirty="0"/>
           </a:p>
           <a:p>
-            <a:pPr indent="0" marL="0">
-              <a:buNone/>
-            </a:pPr>
             <a:r>
               <a:rPr lang="en-US" sz="1400" dirty="0">
                 <a:solidFill>
@@ -9019,9 +8707,6 @@
             <a:endParaRPr lang="en-US" sz="1400" dirty="0"/>
           </a:p>
           <a:p>
-            <a:pPr indent="0" marL="0">
-              <a:buNone/>
-            </a:pPr>
             <a:r>
               <a:rPr lang="en-US" sz="1400" dirty="0">
                 <a:solidFill>
@@ -9036,9 +8721,6 @@
             <a:endParaRPr lang="en-US" sz="1400" dirty="0"/>
           </a:p>
           <a:p>
-            <a:pPr indent="0" marL="0">
-              <a:buNone/>
-            </a:pPr>
             <a:r>
               <a:rPr lang="en-US" sz="1400" dirty="0">
                 <a:solidFill>
@@ -9053,9 +8735,6 @@
             <a:endParaRPr lang="en-US" sz="1400" dirty="0"/>
           </a:p>
           <a:p>
-            <a:pPr indent="0" marL="0">
-              <a:buNone/>
-            </a:pPr>
             <a:r>
               <a:rPr lang="en-US" sz="1400" dirty="0">
                 <a:solidFill>
@@ -9070,9 +8749,6 @@
             <a:endParaRPr lang="en-US" sz="1400" dirty="0"/>
           </a:p>
           <a:p>
-            <a:pPr indent="0" marL="0">
-              <a:buNone/>
-            </a:pPr>
             <a:r>
               <a:rPr lang="en-US" sz="1400" dirty="0">
                 <a:solidFill>
@@ -9087,9 +8763,6 @@
             <a:endParaRPr lang="en-US" sz="1400" dirty="0"/>
           </a:p>
           <a:p>
-            <a:pPr indent="0" marL="0">
-              <a:buNone/>
-            </a:pPr>
             <a:r>
               <a:rPr lang="en-US" sz="1400" dirty="0">
                 <a:solidFill>
@@ -9104,9 +8777,6 @@
             <a:endParaRPr lang="en-US" sz="1400" dirty="0"/>
           </a:p>
           <a:p>
-            <a:pPr indent="0" marL="0">
-              <a:buNone/>
-            </a:pPr>
             <a:r>
               <a:rPr lang="en-US" sz="1400" dirty="0">
                 <a:solidFill>
@@ -9188,9 +8858,6 @@
           <a:bodyPr wrap="square" lIns="0" tIns="0" rIns="0" bIns="0" rtlCol="0" anchor="ctr"/>
           <a:lstStyle/>
           <a:p>
-            <a:pPr indent="0" marL="0">
-              <a:buNone/>
-            </a:pPr>
             <a:r>
               <a:rPr lang="en-US" sz="1200" spc="140" kern="0" dirty="0">
                 <a:solidFill>
@@ -9227,9 +8894,6 @@
           <a:bodyPr wrap="square" lIns="0" tIns="0" rIns="0" bIns="0" rtlCol="0" anchor="ctr"/>
           <a:lstStyle/>
           <a:p>
-            <a:pPr indent="0" marL="0">
-              <a:buNone/>
-            </a:pPr>
             <a:r>
               <a:rPr lang="en-US" sz="1800" b="1" dirty="0">
                 <a:solidFill>
@@ -9266,9 +8930,6 @@
           <a:bodyPr wrap="square" lIns="0" tIns="0" rIns="0" bIns="0" rtlCol="0" anchor="t"/>
           <a:lstStyle/>
           <a:p>
-            <a:pPr indent="0" marL="0">
-              <a:buNone/>
-            </a:pPr>
             <a:r>
               <a:rPr lang="en-US" sz="1600" dirty="0">
                 <a:solidFill>
@@ -9330,9 +8991,6 @@
           <a:bodyPr wrap="square" lIns="0" tIns="0" rIns="0" bIns="0" rtlCol="0" anchor="ctr"/>
           <a:lstStyle/>
           <a:p>
-            <a:pPr indent="0" marL="0">
-              <a:buNone/>
-            </a:pPr>
             <a:r>
               <a:rPr lang="en-US" sz="1200" spc="120" kern="0" dirty="0">
                 <a:solidFill>
@@ -9369,9 +9027,6 @@
           <a:bodyPr wrap="square" lIns="0" tIns="0" rIns="0" bIns="0" rtlCol="0" anchor="ctr"/>
           <a:lstStyle/>
           <a:p>
-            <a:pPr indent="0" marL="0">
-              <a:buNone/>
-            </a:pPr>
             <a:r>
               <a:rPr lang="en-US" sz="1800" b="1" dirty="0">
                 <a:solidFill>
@@ -9408,9 +9063,6 @@
           <a:bodyPr wrap="square" lIns="0" tIns="0" rIns="0" bIns="0" rtlCol="0" anchor="t"/>
           <a:lstStyle/>
           <a:p>
-            <a:pPr indent="0" marL="0">
-              <a:buNone/>
-            </a:pPr>
             <a:r>
               <a:rPr lang="en-US" sz="1500" dirty="0">
                 <a:solidFill>
@@ -9501,9 +9153,6 @@
           <a:bodyPr wrap="square" lIns="0" tIns="0" rIns="0" bIns="0" rtlCol="0" anchor="ctr"/>
           <a:lstStyle/>
           <a:p>
-            <a:pPr indent="0" marL="0">
-              <a:buNone/>
-            </a:pPr>
             <a:r>
               <a:rPr lang="en-US" sz="1200" dirty="0">
                 <a:solidFill>
@@ -9540,9 +9189,6 @@
           <a:bodyPr wrap="square" lIns="0" tIns="0" rIns="0" bIns="0" rtlCol="0" anchor="ctr"/>
           <a:lstStyle/>
           <a:p>
-            <a:pPr indent="0" marL="0">
-              <a:buNone/>
-            </a:pPr>
             <a:r>
               <a:rPr lang="en-US" sz="1500" spc="150" kern="0" dirty="0">
                 <a:solidFill>
@@ -9579,9 +9225,7 @@
           <a:bodyPr wrap="square" lIns="0" tIns="0" rIns="0" bIns="0" rtlCol="0" anchor="ctr"/>
           <a:lstStyle/>
           <a:p>
-            <a:pPr algn="r" indent="0" marL="0">
-              <a:buNone/>
-            </a:pPr>
+            <a:pPr algn="r"/>
             <a:r>
               <a:rPr lang="en-US" sz="1500" spc="150" kern="0" dirty="0">
                 <a:solidFill>
@@ -9591,7 +9235,7 @@
                 <a:ea typeface="Segoe UI" pitchFamily="34" charset="-122"/>
                 <a:cs typeface="Segoe UI" pitchFamily="34" charset="-120"/>
               </a:rPr>
-              <a:t>11 // MEASURED</a:t>
+              <a:t>13 // MEASURED</a:t>
             </a:r>
             <a:endParaRPr lang="en-US" sz="1500" dirty="0"/>
           </a:p>
@@ -9618,9 +9262,6 @@
           <a:bodyPr wrap="square" lIns="0" tIns="0" rIns="0" bIns="0" rtlCol="0" anchor="ctr"/>
           <a:lstStyle/>
           <a:p>
-            <a:pPr indent="0" marL="0">
-              <a:buNone/>
-            </a:pPr>
             <a:r>
               <a:rPr lang="en-US" sz="1200" dirty="0">
                 <a:solidFill>
@@ -9677,9 +9318,6 @@
           <a:bodyPr wrap="square" lIns="0" tIns="0" rIns="0" bIns="0" rtlCol="0" anchor="ctr"/>
           <a:lstStyle/>
           <a:p>
-            <a:pPr indent="0" marL="0">
-              <a:buNone/>
-            </a:pPr>
             <a:r>
               <a:rPr lang="en-US" sz="1500" dirty="0">
                 <a:solidFill>
@@ -9716,9 +9354,7 @@
           <a:bodyPr wrap="square" lIns="0" tIns="0" rIns="0" bIns="0" rtlCol="0" anchor="ctr"/>
           <a:lstStyle/>
           <a:p>
-            <a:pPr algn="r" indent="0" marL="0">
-              <a:buNone/>
-            </a:pPr>
+            <a:pPr algn="r"/>
             <a:r>
               <a:rPr lang="en-US" sz="1500" spc="150" kern="0" dirty="0">
                 <a:solidFill>
@@ -9755,9 +9391,7 @@
           <a:bodyPr wrap="square" lIns="0" tIns="0" rIns="0" bIns="0" rtlCol="0" anchor="ctr"/>
           <a:lstStyle/>
           <a:p>
-            <a:pPr algn="l" indent="0" marL="0">
-              <a:buNone/>
-            </a:pPr>
+            <a:pPr algn="l"/>
             <a:r>
               <a:rPr lang="en-US" sz="1500" spc="300" kern="0" dirty="0">
                 <a:solidFill>
@@ -9767,7 +9401,7 @@
                 <a:ea typeface="Segoe UI" pitchFamily="34" charset="-122"/>
                 <a:cs typeface="Segoe UI" pitchFamily="34" charset="-120"/>
               </a:rPr>
-              <a:t>12 · WHAT WE MEASURED  ·  AND WHAT WE REFUSE TO CLAIM</a:t>
+              <a:t>13 · WHAT WE MEASURED  ·  AND WHAT WE REFUSE TO CLAIM</a:t>
             </a:r>
             <a:endParaRPr lang="en-US" sz="1500" dirty="0"/>
           </a:p>
@@ -9794,9 +9428,7 @@
           <a:bodyPr wrap="square" lIns="0" tIns="0" rIns="0" bIns="0" rtlCol="0" anchor="t"/>
           <a:lstStyle/>
           <a:p>
-            <a:pPr algn="l" indent="0" marL="0">
-              <a:buNone/>
-            </a:pPr>
+            <a:pPr algn="l"/>
             <a:r>
               <a:rPr lang="en-US" sz="2800" b="1" spc="-75" kern="0" dirty="0">
                 <a:solidFill>
@@ -9808,9 +9440,7 @@
               </a:rPr>
               <a:t>168 CASES. </a:t>
             </a:r>
-            <a:pPr algn="l" indent="0" marL="0">
-              <a:buNone/>
-            </a:pPr>
+            <a:pPr algn="l"/>
             <a:r>
               <a:rPr lang="en-US" sz="2800" b="1" spc="-75" kern="0" dirty="0">
                 <a:solidFill>
@@ -9822,9 +9452,7 @@
               </a:rPr>
               <a:t>SELF-AUTHORED</a:t>
             </a:r>
-            <a:pPr algn="l" indent="0" marL="0">
-              <a:buNone/>
-            </a:pPr>
+            <a:pPr algn="l"/>
             <a:r>
               <a:rPr lang="en-US" sz="2800" b="1" spc="-75" kern="0" dirty="0">
                 <a:solidFill>
@@ -9861,9 +9489,6 @@
           <a:bodyPr wrap="square" lIns="0" tIns="0" rIns="0" bIns="0" rtlCol="0" anchor="ctr"/>
           <a:lstStyle/>
           <a:p>
-            <a:pPr indent="0" marL="0">
-              <a:buNone/>
-            </a:pPr>
             <a:r>
               <a:rPr lang="en-US" sz="1500" dirty="0">
                 <a:solidFill>
@@ -9945,9 +9570,6 @@
           <a:bodyPr wrap="square" lIns="0" tIns="0" rIns="0" bIns="0" rtlCol="0" anchor="ctr"/>
           <a:lstStyle/>
           <a:p>
-            <a:pPr indent="0" marL="0">
-              <a:buNone/>
-            </a:pPr>
             <a:r>
               <a:rPr lang="en-US" sz="1300" spc="120" kern="0" dirty="0">
                 <a:solidFill>
@@ -9984,9 +9606,7 @@
           <a:bodyPr wrap="square" lIns="0" tIns="0" rIns="0" bIns="0" rtlCol="0" anchor="ctr"/>
           <a:lstStyle/>
           <a:p>
-            <a:pPr algn="r" indent="0" marL="0">
-              <a:buNone/>
-            </a:pPr>
+            <a:pPr algn="r"/>
             <a:r>
               <a:rPr lang="en-US" sz="1300" spc="100" kern="0" dirty="0">
                 <a:solidFill>
@@ -10023,9 +9643,6 @@
           <a:bodyPr wrap="square" lIns="0" tIns="0" rIns="0" bIns="0" rtlCol="0" anchor="t"/>
           <a:lstStyle/>
           <a:p>
-            <a:pPr indent="0" marL="0">
-              <a:buNone/>
-            </a:pPr>
             <a:r>
               <a:rPr lang="en-US" sz="1400" dirty="0">
                 <a:solidFill>
@@ -10040,9 +9657,6 @@
             <a:endParaRPr lang="en-US" sz="1400" dirty="0"/>
           </a:p>
           <a:p>
-            <a:pPr indent="0" marL="0">
-              <a:buNone/>
-            </a:pPr>
             <a:r>
               <a:rPr lang="en-US" sz="1400" dirty="0">
                 <a:solidFill>
@@ -10057,9 +9671,6 @@
             <a:endParaRPr lang="en-US" sz="1400" dirty="0"/>
           </a:p>
           <a:p>
-            <a:pPr indent="0" marL="0">
-              <a:buNone/>
-            </a:pPr>
             <a:r>
               <a:rPr lang="en-US" sz="1400" dirty="0">
                 <a:solidFill>
@@ -10074,9 +9685,6 @@
             <a:endParaRPr lang="en-US" sz="1400" dirty="0"/>
           </a:p>
           <a:p>
-            <a:pPr indent="0" marL="0">
-              <a:buNone/>
-            </a:pPr>
             <a:r>
               <a:rPr lang="en-US" sz="1400" dirty="0">
                 <a:solidFill>
@@ -10091,9 +9699,6 @@
             <a:endParaRPr lang="en-US" sz="1400" dirty="0"/>
           </a:p>
           <a:p>
-            <a:pPr indent="0" marL="0">
-              <a:buNone/>
-            </a:pPr>
             <a:r>
               <a:rPr lang="en-US" sz="1400" dirty="0">
                 <a:solidFill>
@@ -10108,9 +9713,6 @@
             <a:endParaRPr lang="en-US" sz="1400" dirty="0"/>
           </a:p>
           <a:p>
-            <a:pPr indent="0" marL="0">
-              <a:buNone/>
-            </a:pPr>
             <a:r>
               <a:rPr lang="en-US" sz="1400" dirty="0">
                 <a:solidFill>
@@ -10120,14 +9722,11 @@
                 <a:ea typeface="SF Mono" pitchFamily="34" charset="-122"/>
                 <a:cs typeface="SF Mono" pitchFamily="34" charset="-120"/>
               </a:rPr>
-              <a:t>gate latency  n=10000     p50 0.44ms</a:t>
+              <a:t>gate latency  n=10000     p50 0.43ms</a:t>
             </a:r>
             <a:endParaRPr lang="en-US" sz="1400" dirty="0"/>
           </a:p>
           <a:p>
-            <a:pPr indent="0" marL="0">
-              <a:buNone/>
-            </a:pPr>
             <a:r>
               <a:rPr lang="en-US" sz="1400" dirty="0">
                 <a:solidFill>
@@ -10137,14 +9736,11 @@
                 <a:ea typeface="SF Mono" pitchFamily="34" charset="-122"/>
                 <a:cs typeface="SF Mono" pitchFamily="34" charset="-120"/>
               </a:rPr>
-              <a:t>                          p95 0.57ms</a:t>
+              <a:t>                          p95 0.48ms</a:t>
             </a:r>
             <a:endParaRPr lang="en-US" sz="1400" dirty="0"/>
           </a:p>
           <a:p>
-            <a:pPr indent="0" marL="0">
-              <a:buNone/>
-            </a:pPr>
             <a:r>
               <a:rPr lang="en-US" sz="1400" dirty="0">
                 <a:solidFill>
@@ -10154,7 +9750,7 @@
                 <a:ea typeface="SF Mono" pitchFamily="34" charset="-122"/>
                 <a:cs typeface="SF Mono" pitchFamily="34" charset="-120"/>
               </a:rPr>
-              <a:t>                          p99 0.72ms</a:t>
+              <a:t>                          p99 0.60ms</a:t>
             </a:r>
             <a:endParaRPr lang="en-US" sz="1400" dirty="0"/>
           </a:p>
@@ -10226,9 +9822,6 @@
           <a:bodyPr wrap="square" lIns="0" tIns="0" rIns="0" bIns="0" rtlCol="0" anchor="ctr"/>
           <a:lstStyle/>
           <a:p>
-            <a:pPr indent="0" marL="0">
-              <a:buNone/>
-            </a:pPr>
             <a:r>
               <a:rPr lang="en-US" sz="1200" spc="140" kern="0" dirty="0">
                 <a:solidFill>
@@ -10265,9 +9858,6 @@
           <a:bodyPr wrap="square" lIns="0" tIns="0" rIns="0" bIns="0" rtlCol="0" anchor="ctr"/>
           <a:lstStyle/>
           <a:p>
-            <a:pPr indent="0" marL="0">
-              <a:buNone/>
-            </a:pPr>
             <a:r>
               <a:rPr lang="en-US" sz="2000" b="1" dirty="0">
                 <a:solidFill>
@@ -10304,9 +9894,6 @@
           <a:bodyPr wrap="square" lIns="0" tIns="0" rIns="0" bIns="0" rtlCol="0" anchor="t"/>
           <a:lstStyle/>
           <a:p>
-            <a:pPr indent="0" marL="0">
-              <a:buNone/>
-            </a:pPr>
             <a:r>
               <a:rPr lang="en-US" sz="1500" dirty="0">
                 <a:solidFill>
@@ -10388,9 +9975,6 @@
           <a:bodyPr wrap="square" lIns="0" tIns="0" rIns="0" bIns="0" rtlCol="0" anchor="ctr"/>
           <a:lstStyle/>
           <a:p>
-            <a:pPr indent="0" marL="0">
-              <a:buNone/>
-            </a:pPr>
             <a:r>
               <a:rPr lang="en-US" sz="1200" spc="120" kern="0" dirty="0">
                 <a:solidFill>
@@ -10427,9 +10011,6 @@
           <a:bodyPr wrap="square" lIns="0" tIns="0" rIns="0" bIns="0" rtlCol="0" anchor="ctr"/>
           <a:lstStyle/>
           <a:p>
-            <a:pPr indent="0" marL="0">
-              <a:buNone/>
-            </a:pPr>
             <a:r>
               <a:rPr lang="en-US" sz="2000" b="1" dirty="0">
                 <a:solidFill>
@@ -10466,9 +10047,6 @@
           <a:bodyPr wrap="square" lIns="0" tIns="0" rIns="0" bIns="0" rtlCol="0" anchor="t"/>
           <a:lstStyle/>
           <a:p>
-            <a:pPr indent="0" marL="0">
-              <a:buNone/>
-            </a:pPr>
             <a:r>
               <a:rPr lang="en-US" sz="1500" dirty="0">
                 <a:solidFill>
@@ -10483,9 +10061,6 @@
             <a:endParaRPr lang="en-US" sz="1500" dirty="0"/>
           </a:p>
           <a:p>
-            <a:pPr indent="0" marL="0">
-              <a:buNone/>
-            </a:pPr>
             <a:r>
               <a:rPr lang="en-US" sz="1500" dirty="0">
                 <a:solidFill>
@@ -10500,9 +10075,6 @@
             <a:endParaRPr lang="en-US" sz="1500" dirty="0"/>
           </a:p>
           <a:p>
-            <a:pPr indent="0" marL="0">
-              <a:buNone/>
-            </a:pPr>
             <a:r>
               <a:rPr lang="en-US" sz="1500" dirty="0">
                 <a:solidFill>
@@ -10517,9 +10089,6 @@
             <a:endParaRPr lang="en-US" sz="1500" dirty="0"/>
           </a:p>
           <a:p>
-            <a:pPr indent="0" marL="0">
-              <a:buNone/>
-            </a:pPr>
             <a:r>
               <a:rPr lang="en-US" sz="1500" dirty="0">
                 <a:solidFill>
@@ -10534,9 +10103,6 @@
             <a:endParaRPr lang="en-US" sz="1500" dirty="0"/>
           </a:p>
           <a:p>
-            <a:pPr indent="0" marL="0">
-              <a:buNone/>
-            </a:pPr>
             <a:r>
               <a:rPr lang="en-US" sz="1500" dirty="0">
                 <a:solidFill>
@@ -10551,9 +10117,6 @@
             <a:endParaRPr lang="en-US" sz="1500" dirty="0"/>
           </a:p>
           <a:p>
-            <a:pPr indent="0" marL="0">
-              <a:buNone/>
-            </a:pPr>
             <a:r>
               <a:rPr lang="en-US" sz="1500" dirty="0">
                 <a:solidFill>
@@ -10610,9 +10173,6 @@
           <a:bodyPr wrap="square" lIns="0" tIns="0" rIns="0" bIns="0" rtlCol="0" anchor="t"/>
           <a:lstStyle/>
           <a:p>
-            <a:pPr indent="0" marL="0">
-              <a:buNone/>
-            </a:pPr>
             <a:r>
               <a:rPr lang="en-US" sz="1500" dirty="0">
                 <a:solidFill>
@@ -10649,9 +10209,6 @@
           <a:bodyPr wrap="square" lIns="0" tIns="0" rIns="0" bIns="0" rtlCol="0" anchor="t"/>
           <a:lstStyle/>
           <a:p>
-            <a:pPr indent="0" marL="0">
-              <a:buNone/>
-            </a:pPr>
             <a:r>
               <a:rPr lang="en-US" sz="1700" b="1" dirty="0">
                 <a:solidFill>
@@ -10678,6 +10235,943 @@
 <file path=ppt/slides/slide14.xml><?xml version="1.0" encoding="utf-8"?>
 <p:sld xmlns:a="http://schemas.openxmlformats.org/drawingml/2006/main" xmlns:r="http://schemas.openxmlformats.org/officeDocument/2006/relationships" xmlns:p="http://schemas.openxmlformats.org/presentationml/2006/main">
   <p:cSld name="Slide 14">
+    <p:bg>
+      <p:bgPr>
+        <a:solidFill>
+          <a:srgbClr val="0B0F1A"/>
+        </a:solidFill>
+      </p:bgPr>
+    </p:bg>
+    <p:spTree>
+      <p:nvGrpSpPr>
+        <p:cNvPr id="1" name=""/>
+        <p:cNvGrpSpPr/>
+        <p:nvPr/>
+      </p:nvGrpSpPr>
+      <p:grpSpPr>
+        <a:xfrm>
+          <a:off x="0" y="0"/>
+          <a:ext cx="0" cy="0"/>
+          <a:chOff x="0" y="0"/>
+          <a:chExt cx="0" cy="0"/>
+        </a:xfrm>
+      </p:grpSpPr>
+      <p:sp>
+        <p:nvSpPr>
+          <p:cNvPr id="2" name="Shape 0"/>
+          <p:cNvSpPr/>
+          <p:nvPr/>
+        </p:nvSpPr>
+        <p:spPr>
+          <a:xfrm>
+            <a:off x="0" y="0"/>
+            <a:ext cx="18288000" cy="10287000"/>
+          </a:xfrm>
+          <a:prstGeom prst="rect">
+            <a:avLst/>
+          </a:prstGeom>
+          <a:solidFill>
+            <a:srgbClr val="12182A">
+              <a:alpha val="30000"/>
+            </a:srgbClr>
+          </a:solidFill>
+          <a:ln/>
+        </p:spPr>
+      </p:sp>
+      <p:sp>
+        <p:nvSpPr>
+          <p:cNvPr id="3" name="Text 1"/>
+          <p:cNvSpPr/>
+          <p:nvPr/>
+        </p:nvSpPr>
+        <p:spPr>
+          <a:xfrm>
+            <a:off x="384048" y="402336"/>
+            <a:ext cx="210312" cy="228600"/>
+          </a:xfrm>
+          <a:prstGeom prst="rect">
+            <a:avLst/>
+          </a:prstGeom>
+          <a:noFill/>
+          <a:ln/>
+        </p:spPr>
+        <p:txBody>
+          <a:bodyPr wrap="square" lIns="0" tIns="0" rIns="0" bIns="0" rtlCol="0" anchor="ctr"/>
+          <a:lstStyle/>
+          <a:p>
+            <a:r>
+              <a:rPr lang="en-US" sz="1200" dirty="0">
+                <a:solidFill>
+                  <a:srgbClr val="C9A227"/>
+                </a:solidFill>
+                <a:latin typeface="Segoe UI" pitchFamily="34" charset="0"/>
+                <a:ea typeface="Segoe UI" pitchFamily="34" charset="-122"/>
+                <a:cs typeface="Segoe UI" pitchFamily="34" charset="-120"/>
+              </a:rPr>
+              <a:t>◢</a:t>
+            </a:r>
+            <a:endParaRPr lang="en-US" sz="1200" dirty="0"/>
+          </a:p>
+        </p:txBody>
+      </p:sp>
+      <p:sp>
+        <p:nvSpPr>
+          <p:cNvPr id="4" name="Text 2"/>
+          <p:cNvSpPr/>
+          <p:nvPr/>
+        </p:nvSpPr>
+        <p:spPr>
+          <a:xfrm>
+            <a:off x="621792" y="384048"/>
+            <a:ext cx="3840480" cy="265176"/>
+          </a:xfrm>
+          <a:prstGeom prst="rect">
+            <a:avLst/>
+          </a:prstGeom>
+          <a:noFill/>
+          <a:ln/>
+        </p:spPr>
+        <p:txBody>
+          <a:bodyPr wrap="square" lIns="0" tIns="0" rIns="0" bIns="0" rtlCol="0" anchor="ctr"/>
+          <a:lstStyle/>
+          <a:p>
+            <a:r>
+              <a:rPr lang="en-US" sz="1500" spc="150" kern="0" dirty="0">
+                <a:solidFill>
+                  <a:srgbClr val="F5F0EB"/>
+                </a:solidFill>
+                <a:latin typeface="Segoe UI" pitchFamily="34" charset="0"/>
+                <a:ea typeface="Segoe UI" pitchFamily="34" charset="-122"/>
+                <a:cs typeface="Segoe UI" pitchFamily="34" charset="-120"/>
+              </a:rPr>
+              <a:t>CONTROLPLANE//SYS</a:t>
+            </a:r>
+            <a:endParaRPr lang="en-US" sz="1500" dirty="0"/>
+          </a:p>
+        </p:txBody>
+      </p:sp>
+      <p:sp>
+        <p:nvSpPr>
+          <p:cNvPr id="5" name="Text 3"/>
+          <p:cNvSpPr/>
+          <p:nvPr/>
+        </p:nvSpPr>
+        <p:spPr>
+          <a:xfrm>
+            <a:off x="11521440" y="384048"/>
+            <a:ext cx="6217920" cy="265176"/>
+          </a:xfrm>
+          <a:prstGeom prst="rect">
+            <a:avLst/>
+          </a:prstGeom>
+          <a:noFill/>
+          <a:ln/>
+        </p:spPr>
+        <p:txBody>
+          <a:bodyPr wrap="square" lIns="0" tIns="0" rIns="0" bIns="0" rtlCol="0" anchor="ctr"/>
+          <a:lstStyle/>
+          <a:p>
+            <a:pPr algn="r"/>
+            <a:r>
+              <a:rPr lang="en-US" sz="1500" spc="150" kern="0" dirty="0">
+                <a:solidFill>
+                  <a:srgbClr val="8892B0"/>
+                </a:solidFill>
+                <a:latin typeface="Segoe UI" pitchFamily="34" charset="0"/>
+                <a:ea typeface="Segoe UI" pitchFamily="34" charset="-122"/>
+                <a:cs typeface="Segoe UI" pitchFamily="34" charset="-120"/>
+              </a:rPr>
+              <a:t>10 // TEAM</a:t>
+            </a:r>
+            <a:endParaRPr lang="en-US" sz="1500" dirty="0"/>
+          </a:p>
+        </p:txBody>
+      </p:sp>
+      <p:sp>
+        <p:nvSpPr>
+          <p:cNvPr id="6" name="Text 4"/>
+          <p:cNvSpPr/>
+          <p:nvPr/>
+        </p:nvSpPr>
+        <p:spPr>
+          <a:xfrm>
+            <a:off x="17775936" y="402336"/>
+            <a:ext cx="210312" cy="228600"/>
+          </a:xfrm>
+          <a:prstGeom prst="rect">
+            <a:avLst/>
+          </a:prstGeom>
+          <a:noFill/>
+          <a:ln/>
+        </p:spPr>
+        <p:txBody>
+          <a:bodyPr wrap="square" lIns="0" tIns="0" rIns="0" bIns="0" rtlCol="0" anchor="ctr"/>
+          <a:lstStyle/>
+          <a:p>
+            <a:r>
+              <a:rPr lang="en-US" sz="1200" dirty="0">
+                <a:solidFill>
+                  <a:srgbClr val="C9A227"/>
+                </a:solidFill>
+                <a:latin typeface="Segoe UI" pitchFamily="34" charset="0"/>
+                <a:ea typeface="Segoe UI" pitchFamily="34" charset="-122"/>
+                <a:cs typeface="Segoe UI" pitchFamily="34" charset="-120"/>
+              </a:rPr>
+              <a:t>◣</a:t>
+            </a:r>
+            <a:endParaRPr lang="en-US" sz="1200" dirty="0"/>
+          </a:p>
+        </p:txBody>
+      </p:sp>
+      <p:sp>
+        <p:nvSpPr>
+          <p:cNvPr id="7" name="Shape 5"/>
+          <p:cNvSpPr/>
+          <p:nvPr/>
+        </p:nvSpPr>
+        <p:spPr>
+          <a:xfrm>
+            <a:off x="384048" y="9747504"/>
+            <a:ext cx="91440" cy="91440"/>
+          </a:xfrm>
+          <a:prstGeom prst="rect">
+            <a:avLst/>
+          </a:prstGeom>
+          <a:solidFill>
+            <a:srgbClr val="C9A227"/>
+          </a:solidFill>
+          <a:ln/>
+        </p:spPr>
+      </p:sp>
+      <p:sp>
+        <p:nvSpPr>
+          <p:cNvPr id="8" name="Text 6"/>
+          <p:cNvSpPr/>
+          <p:nvPr/>
+        </p:nvSpPr>
+        <p:spPr>
+          <a:xfrm>
+            <a:off x="566928" y="9683496"/>
+            <a:ext cx="2194560" cy="265176"/>
+          </a:xfrm>
+          <a:prstGeom prst="rect">
+            <a:avLst/>
+          </a:prstGeom>
+          <a:noFill/>
+          <a:ln/>
+        </p:spPr>
+        <p:txBody>
+          <a:bodyPr wrap="square" lIns="0" tIns="0" rIns="0" bIns="0" rtlCol="0" anchor="ctr"/>
+          <a:lstStyle/>
+          <a:p>
+            <a:r>
+              <a:rPr lang="en-US" sz="1500" dirty="0">
+                <a:solidFill>
+                  <a:srgbClr val="8892B0"/>
+                </a:solidFill>
+                <a:latin typeface="Segoe UI" pitchFamily="34" charset="0"/>
+                <a:ea typeface="Segoe UI" pitchFamily="34" charset="-122"/>
+                <a:cs typeface="Segoe UI" pitchFamily="34" charset="-120"/>
+              </a:rPr>
+              <a:t>ADMIT//PROVE</a:t>
+            </a:r>
+            <a:endParaRPr lang="en-US" sz="1500" dirty="0"/>
+          </a:p>
+        </p:txBody>
+      </p:sp>
+      <p:sp>
+        <p:nvSpPr>
+          <p:cNvPr id="9" name="Text 7"/>
+          <p:cNvSpPr/>
+          <p:nvPr/>
+        </p:nvSpPr>
+        <p:spPr>
+          <a:xfrm>
+            <a:off x="13350240" y="9683496"/>
+            <a:ext cx="4480560" cy="265176"/>
+          </a:xfrm>
+          <a:prstGeom prst="rect">
+            <a:avLst/>
+          </a:prstGeom>
+          <a:noFill/>
+          <a:ln/>
+        </p:spPr>
+        <p:txBody>
+          <a:bodyPr wrap="square" lIns="0" tIns="0" rIns="0" bIns="0" rtlCol="0" anchor="ctr"/>
+          <a:lstStyle/>
+          <a:p>
+            <a:pPr algn="r"/>
+            <a:r>
+              <a:rPr lang="en-US" sz="1500" spc="150" kern="0" dirty="0">
+                <a:solidFill>
+                  <a:srgbClr val="8892B0"/>
+                </a:solidFill>
+                <a:latin typeface="Segoe UI" pitchFamily="34" charset="0"/>
+                <a:ea typeface="Segoe UI" pitchFamily="34" charset="-122"/>
+                <a:cs typeface="Segoe UI" pitchFamily="34" charset="-120"/>
+              </a:rPr>
+              <a:t>AIC.2026 · PS #1 · IITGN</a:t>
+            </a:r>
+            <a:endParaRPr lang="en-US" sz="1500" dirty="0"/>
+          </a:p>
+        </p:txBody>
+      </p:sp>
+      <p:sp>
+        <p:nvSpPr>
+          <p:cNvPr id="11" name="Text 8"/>
+          <p:cNvSpPr/>
+          <p:nvPr/>
+        </p:nvSpPr>
+        <p:spPr>
+          <a:xfrm>
+            <a:off x="950976" y="914400"/>
+            <a:ext cx="7315200" cy="265176"/>
+          </a:xfrm>
+          <a:prstGeom prst="rect">
+            <a:avLst/>
+          </a:prstGeom>
+          <a:noFill/>
+          <a:ln/>
+        </p:spPr>
+        <p:txBody>
+          <a:bodyPr wrap="square" lIns="0" tIns="0" rIns="0" bIns="0" rtlCol="0" anchor="ctr"/>
+          <a:lstStyle/>
+          <a:p>
+            <a:pPr algn="l"/>
+            <a:r>
+              <a:rPr lang="en-US" sz="1500" spc="300" kern="0" dirty="0">
+                <a:solidFill>
+                  <a:srgbClr val="C9A227"/>
+                </a:solidFill>
+                <a:latin typeface="Segoe UI" pitchFamily="34" charset="0"/>
+                <a:ea typeface="Segoe UI" pitchFamily="34" charset="-122"/>
+                <a:cs typeface="Segoe UI" pitchFamily="34" charset="-120"/>
+              </a:rPr>
+              <a:t>10 · TEAM</a:t>
+            </a:r>
+            <a:endParaRPr lang="en-US" sz="1500" dirty="0"/>
+          </a:p>
+        </p:txBody>
+      </p:sp>
+      <p:sp>
+        <p:nvSpPr>
+          <p:cNvPr id="12" name="Text 9"/>
+          <p:cNvSpPr/>
+          <p:nvPr/>
+        </p:nvSpPr>
+        <p:spPr>
+          <a:xfrm>
+            <a:off x="950976" y="1225296"/>
+            <a:ext cx="16367760" cy="566928"/>
+          </a:xfrm>
+          <a:prstGeom prst="rect">
+            <a:avLst/>
+          </a:prstGeom>
+          <a:noFill/>
+          <a:ln/>
+        </p:spPr>
+        <p:txBody>
+          <a:bodyPr wrap="square" lIns="0" tIns="0" rIns="0" bIns="0" rtlCol="0" anchor="t"/>
+          <a:lstStyle/>
+          <a:p>
+            <a:pPr algn="l"/>
+            <a:r>
+              <a:rPr lang="en-US" sz="3200" b="1" spc="-75" kern="0" dirty="0">
+                <a:solidFill>
+                  <a:srgbClr val="F5F0EB"/>
+                </a:solidFill>
+                <a:latin typeface="Segoe UI" pitchFamily="34" charset="0"/>
+                <a:ea typeface="Segoe UI" pitchFamily="34" charset="-122"/>
+                <a:cs typeface="Segoe UI" pitchFamily="34" charset="-120"/>
+              </a:rPr>
+              <a:t>THE TEAM THAT </a:t>
+            </a:r>
+            <a:pPr algn="l"/>
+            <a:r>
+              <a:rPr lang="en-US" sz="3200" b="1" spc="-75" kern="0" dirty="0">
+                <a:solidFill>
+                  <a:srgbClr val="C9A227"/>
+                </a:solidFill>
+                <a:latin typeface="Segoe UI" pitchFamily="34" charset="0"/>
+                <a:ea typeface="Segoe UI" pitchFamily="34" charset="-122"/>
+                <a:cs typeface="Segoe UI" pitchFamily="34" charset="-120"/>
+              </a:rPr>
+              <a:t>BUILT IT</a:t>
+            </a:r>
+            <a:pPr algn="l"/>
+            <a:r>
+              <a:rPr lang="en-US" sz="3200" b="1" spc="-75" kern="0" dirty="0">
+                <a:solidFill>
+                  <a:srgbClr val="F5F0EB"/>
+                </a:solidFill>
+                <a:latin typeface="Segoe UI" pitchFamily="34" charset="0"/>
+                <a:ea typeface="Segoe UI" pitchFamily="34" charset="-122"/>
+                <a:cs typeface="Segoe UI" pitchFamily="34" charset="-120"/>
+              </a:rPr>
+              <a:t>.</a:t>
+            </a:r>
+            <a:endParaRPr lang="en-US" sz="3200" dirty="0"/>
+          </a:p>
+        </p:txBody>
+      </p:sp>
+      <p:sp>
+        <p:nvSpPr>
+          <p:cNvPr id="13" name="Text 10"/>
+          <p:cNvSpPr/>
+          <p:nvPr/>
+        </p:nvSpPr>
+        <p:spPr>
+          <a:xfrm>
+            <a:off x="950976" y="1810512"/>
+            <a:ext cx="16367760" cy="329184"/>
+          </a:xfrm>
+          <a:prstGeom prst="rect">
+            <a:avLst/>
+          </a:prstGeom>
+          <a:noFill/>
+          <a:ln/>
+        </p:spPr>
+        <p:txBody>
+          <a:bodyPr wrap="square" lIns="0" tIns="0" rIns="0" bIns="0" rtlCol="0" anchor="ctr"/>
+          <a:lstStyle/>
+          <a:p>
+            <a:r>
+              <a:rPr lang="en-US" sz="1700" dirty="0">
+                <a:solidFill>
+                  <a:srgbClr val="D0C8B8"/>
+                </a:solidFill>
+                <a:latin typeface="Segoe UI" pitchFamily="34" charset="0"/>
+                <a:ea typeface="Segoe UI" pitchFamily="34" charset="-122"/>
+                <a:cs typeface="Segoe UI" pitchFamily="34" charset="-120"/>
+              </a:rPr>
+              <a:t>Two people. One graph. Every portal artifact regenerated from measured JSON.</a:t>
+            </a:r>
+            <a:endParaRPr lang="en-US" sz="1700" dirty="0"/>
+          </a:p>
+        </p:txBody>
+      </p:sp>
+      <p:sp>
+        <p:nvSpPr>
+          <p:cNvPr id="14" name="Shape 11"/>
+          <p:cNvSpPr/>
+          <p:nvPr/>
+        </p:nvSpPr>
+        <p:spPr>
+          <a:xfrm>
+            <a:off x="950976" y="2542032"/>
+            <a:ext cx="8101584" cy="4754880"/>
+          </a:xfrm>
+          <a:prstGeom prst="rect">
+            <a:avLst/>
+          </a:prstGeom>
+          <a:solidFill>
+            <a:srgbClr val="0F1525"/>
+          </a:solidFill>
+          <a:ln w="13970">
+            <a:solidFill>
+              <a:srgbClr val="C9A227"/>
+            </a:solidFill>
+            <a:prstDash val="solid"/>
+          </a:ln>
+        </p:spPr>
+      </p:sp>
+      <p:sp>
+        <p:nvSpPr>
+          <p:cNvPr id="15" name="Shape 12"/>
+          <p:cNvSpPr/>
+          <p:nvPr/>
+        </p:nvSpPr>
+        <p:spPr>
+          <a:xfrm>
+            <a:off x="950976" y="2542032"/>
+            <a:ext cx="8101584" cy="41148"/>
+          </a:xfrm>
+          <a:prstGeom prst="rect">
+            <a:avLst/>
+          </a:prstGeom>
+          <a:solidFill>
+            <a:srgbClr val="C9A227"/>
+          </a:solidFill>
+          <a:ln/>
+        </p:spPr>
+      </p:sp>
+      <p:sp>
+        <p:nvSpPr>
+          <p:cNvPr id="16" name="Text 13"/>
+          <p:cNvSpPr/>
+          <p:nvPr/>
+        </p:nvSpPr>
+        <p:spPr>
+          <a:xfrm>
+            <a:off x="1225296" y="2743200"/>
+            <a:ext cx="7552944" cy="384048"/>
+          </a:xfrm>
+          <a:prstGeom prst="rect">
+            <a:avLst/>
+          </a:prstGeom>
+          <a:noFill/>
+          <a:ln/>
+        </p:spPr>
+        <p:txBody>
+          <a:bodyPr wrap="square" lIns="0" tIns="0" rIns="0" bIns="0" rtlCol="0" anchor="ctr"/>
+          <a:lstStyle/>
+          <a:p>
+            <a:r>
+              <a:rPr lang="en-US" sz="2200" b="1" spc="120" kern="0" dirty="0">
+                <a:solidFill>
+                  <a:srgbClr val="F5F0EB"/>
+                </a:solidFill>
+                <a:latin typeface="Segoe UI" pitchFamily="34" charset="0"/>
+                <a:ea typeface="Segoe UI" pitchFamily="34" charset="-122"/>
+                <a:cs typeface="Segoe UI" pitchFamily="34" charset="-120"/>
+              </a:rPr>
+              <a:t>CHODA SRUJAN SAI</a:t>
+            </a:r>
+            <a:endParaRPr lang="en-US" sz="2200" dirty="0"/>
+          </a:p>
+        </p:txBody>
+      </p:sp>
+      <p:sp>
+        <p:nvSpPr>
+          <p:cNvPr id="17" name="Text 14"/>
+          <p:cNvSpPr/>
+          <p:nvPr/>
+        </p:nvSpPr>
+        <p:spPr>
+          <a:xfrm>
+            <a:off x="1225296" y="3218688"/>
+            <a:ext cx="7552944" cy="292608"/>
+          </a:xfrm>
+          <a:prstGeom prst="rect">
+            <a:avLst/>
+          </a:prstGeom>
+          <a:noFill/>
+          <a:ln/>
+        </p:spPr>
+        <p:txBody>
+          <a:bodyPr wrap="square" lIns="0" tIns="0" rIns="0" bIns="0" rtlCol="0" anchor="ctr"/>
+          <a:lstStyle/>
+          <a:p>
+            <a:r>
+              <a:rPr lang="en-US" sz="1300" spc="160" kern="0" dirty="0">
+                <a:solidFill>
+                  <a:srgbClr val="C9A227"/>
+                </a:solidFill>
+                <a:latin typeface="Segoe UI" pitchFamily="34" charset="0"/>
+                <a:ea typeface="Segoe UI" pitchFamily="34" charset="-122"/>
+                <a:cs typeface="Segoe UI" pitchFamily="34" charset="-120"/>
+              </a:rPr>
+              <a:t>ARCHITECTURE  ·  MECHANISM  ·  DEMO</a:t>
+            </a:r>
+            <a:endParaRPr lang="en-US" sz="1300" dirty="0"/>
+          </a:p>
+        </p:txBody>
+      </p:sp>
+      <p:sp>
+        <p:nvSpPr>
+          <p:cNvPr id="18" name="Text 15"/>
+          <p:cNvSpPr/>
+          <p:nvPr/>
+        </p:nvSpPr>
+        <p:spPr>
+          <a:xfrm>
+            <a:off x="1225296" y="3639312"/>
+            <a:ext cx="7552944" cy="1645920"/>
+          </a:xfrm>
+          <a:prstGeom prst="rect">
+            <a:avLst/>
+          </a:prstGeom>
+          <a:noFill/>
+          <a:ln/>
+        </p:spPr>
+        <p:txBody>
+          <a:bodyPr wrap="square" lIns="0" tIns="0" rIns="0" bIns="0" rtlCol="0" anchor="t"/>
+          <a:lstStyle/>
+          <a:p>
+            <a:r>
+              <a:rPr lang="en-US" sz="1500" dirty="0">
+                <a:solidFill>
+                  <a:srgbClr val="D0C8B8"/>
+                </a:solidFill>
+                <a:latin typeface="Segoe UI" pitchFamily="34" charset="0"/>
+                <a:ea typeface="Segoe UI" pitchFamily="34" charset="-122"/>
+                <a:cs typeface="Segoe UI" pitchFamily="34" charset="-120"/>
+              </a:rPr>
+              <a:t>Designs the interlock, builds the gate, runs the load bench. Owns the latency and eval numbers and the reproducible rebuild of every portal artifact.</a:t>
+            </a:r>
+            <a:endParaRPr lang="en-US" sz="1500" dirty="0"/>
+          </a:p>
+        </p:txBody>
+      </p:sp>
+      <p:sp>
+        <p:nvSpPr>
+          <p:cNvPr id="19" name="Text 16"/>
+          <p:cNvSpPr/>
+          <p:nvPr/>
+        </p:nvSpPr>
+        <p:spPr>
+          <a:xfrm>
+            <a:off x="1225296" y="5577840"/>
+            <a:ext cx="7552944" cy="1554480"/>
+          </a:xfrm>
+          <a:prstGeom prst="rect">
+            <a:avLst/>
+          </a:prstGeom>
+          <a:noFill/>
+          <a:ln/>
+        </p:spPr>
+        <p:txBody>
+          <a:bodyPr wrap="square" lIns="0" tIns="0" rIns="0" bIns="0" rtlCol="0" anchor="t"/>
+          <a:lstStyle/>
+          <a:p>
+            <a:r>
+              <a:rPr lang="en-US" sz="1200" dirty="0">
+                <a:solidFill>
+                  <a:srgbClr val="8892B0"/>
+                </a:solidFill>
+                <a:latin typeface="SF Mono" pitchFamily="34" charset="0"/>
+                <a:ea typeface="SF Mono" pitchFamily="34" charset="-122"/>
+                <a:cs typeface="SF Mono" pitchFamily="34" charset="-120"/>
+              </a:rPr>
+              <a:t>controlplane/interlock.py  ·  scripts/load_bench.py  ·  scripts/build_*_pdf.py</a:t>
+            </a:r>
+            <a:endParaRPr lang="en-US" sz="1200" dirty="0"/>
+          </a:p>
+        </p:txBody>
+      </p:sp>
+      <p:sp>
+        <p:nvSpPr>
+          <p:cNvPr id="20" name="Shape 17"/>
+          <p:cNvSpPr/>
+          <p:nvPr/>
+        </p:nvSpPr>
+        <p:spPr>
+          <a:xfrm>
+            <a:off x="9272016" y="2542032"/>
+            <a:ext cx="8101584" cy="4754880"/>
+          </a:xfrm>
+          <a:prstGeom prst="rect">
+            <a:avLst/>
+          </a:prstGeom>
+          <a:solidFill>
+            <a:srgbClr val="0F1525"/>
+          </a:solidFill>
+          <a:ln w="13970">
+            <a:solidFill>
+              <a:srgbClr val="C9A227"/>
+            </a:solidFill>
+            <a:prstDash val="solid"/>
+          </a:ln>
+        </p:spPr>
+      </p:sp>
+      <p:sp>
+        <p:nvSpPr>
+          <p:cNvPr id="21" name="Shape 18"/>
+          <p:cNvSpPr/>
+          <p:nvPr/>
+        </p:nvSpPr>
+        <p:spPr>
+          <a:xfrm>
+            <a:off x="9272016" y="2542032"/>
+            <a:ext cx="8101584" cy="41148"/>
+          </a:xfrm>
+          <a:prstGeom prst="rect">
+            <a:avLst/>
+          </a:prstGeom>
+          <a:solidFill>
+            <a:srgbClr val="C9A227"/>
+          </a:solidFill>
+          <a:ln/>
+        </p:spPr>
+      </p:sp>
+      <p:sp>
+        <p:nvSpPr>
+          <p:cNvPr id="22" name="Text 19"/>
+          <p:cNvSpPr/>
+          <p:nvPr/>
+        </p:nvSpPr>
+        <p:spPr>
+          <a:xfrm>
+            <a:off x="9546336" y="2743200"/>
+            <a:ext cx="7552944" cy="384048"/>
+          </a:xfrm>
+          <a:prstGeom prst="rect">
+            <a:avLst/>
+          </a:prstGeom>
+          <a:noFill/>
+          <a:ln/>
+        </p:spPr>
+        <p:txBody>
+          <a:bodyPr wrap="square" lIns="0" tIns="0" rIns="0" bIns="0" rtlCol="0" anchor="ctr"/>
+          <a:lstStyle/>
+          <a:p>
+            <a:r>
+              <a:rPr lang="en-US" sz="2200" b="1" spc="120" kern="0" dirty="0">
+                <a:solidFill>
+                  <a:srgbClr val="F5F0EB"/>
+                </a:solidFill>
+                <a:latin typeface="Segoe UI" pitchFamily="34" charset="0"/>
+                <a:ea typeface="Segoe UI" pitchFamily="34" charset="-122"/>
+                <a:cs typeface="Segoe UI" pitchFamily="34" charset="-120"/>
+              </a:rPr>
+              <a:t>DHRITHIKA</a:t>
+            </a:r>
+            <a:endParaRPr lang="en-US" sz="2200" dirty="0"/>
+          </a:p>
+        </p:txBody>
+      </p:sp>
+      <p:sp>
+        <p:nvSpPr>
+          <p:cNvPr id="23" name="Text 20"/>
+          <p:cNvSpPr/>
+          <p:nvPr/>
+        </p:nvSpPr>
+        <p:spPr>
+          <a:xfrm>
+            <a:off x="9546336" y="3218688"/>
+            <a:ext cx="7552944" cy="292608"/>
+          </a:xfrm>
+          <a:prstGeom prst="rect">
+            <a:avLst/>
+          </a:prstGeom>
+          <a:noFill/>
+          <a:ln/>
+        </p:spPr>
+        <p:txBody>
+          <a:bodyPr wrap="square" lIns="0" tIns="0" rIns="0" bIns="0" rtlCol="0" anchor="ctr"/>
+          <a:lstStyle/>
+          <a:p>
+            <a:r>
+              <a:rPr lang="en-US" sz="1300" spc="160" kern="0" dirty="0">
+                <a:solidFill>
+                  <a:srgbClr val="C9A227"/>
+                </a:solidFill>
+                <a:latin typeface="Segoe UI" pitchFamily="34" charset="0"/>
+                <a:ea typeface="Segoe UI" pitchFamily="34" charset="-122"/>
+                <a:cs typeface="Segoe UI" pitchFamily="34" charset="-120"/>
+              </a:rPr>
+              <a:t>NARRATIVE  ·  PITCH  ·  HOSTILE Q&amp;A</a:t>
+            </a:r>
+            <a:endParaRPr lang="en-US" sz="1300" dirty="0"/>
+          </a:p>
+        </p:txBody>
+      </p:sp>
+      <p:sp>
+        <p:nvSpPr>
+          <p:cNvPr id="24" name="Text 21"/>
+          <p:cNvSpPr/>
+          <p:nvPr/>
+        </p:nvSpPr>
+        <p:spPr>
+          <a:xfrm>
+            <a:off x="9546336" y="3639312"/>
+            <a:ext cx="7552944" cy="1645920"/>
+          </a:xfrm>
+          <a:prstGeom prst="rect">
+            <a:avLst/>
+          </a:prstGeom>
+          <a:noFill/>
+          <a:ln/>
+        </p:spPr>
+        <p:txBody>
+          <a:bodyPr wrap="square" lIns="0" tIns="0" rIns="0" bIns="0" rtlCol="0" anchor="t"/>
+          <a:lstStyle/>
+          <a:p>
+            <a:r>
+              <a:rPr lang="en-US" sz="1500" dirty="0">
+                <a:solidFill>
+                  <a:srgbClr val="D0C8B8"/>
+                </a:solidFill>
+                <a:latin typeface="Segoe UI" pitchFamily="34" charset="0"/>
+                <a:ea typeface="Segoe UI" pitchFamily="34" charset="-122"/>
+                <a:cs typeface="Segoe UI" pitchFamily="34" charset="-120"/>
+              </a:rPr>
+              <a:t>Owns the story arc and the room defense. Leads the hostile-Q&amp;A drill (B1 and B5 hardest) and keeps the vocabulary disciplined (admit, authorise, hold — never watch, detect, trust).</a:t>
+            </a:r>
+            <a:endParaRPr lang="en-US" sz="1500" dirty="0"/>
+          </a:p>
+        </p:txBody>
+      </p:sp>
+      <p:sp>
+        <p:nvSpPr>
+          <p:cNvPr id="25" name="Text 22"/>
+          <p:cNvSpPr/>
+          <p:nvPr/>
+        </p:nvSpPr>
+        <p:spPr>
+          <a:xfrm>
+            <a:off x="9546336" y="5577840"/>
+            <a:ext cx="7552944" cy="1554480"/>
+          </a:xfrm>
+          <a:prstGeom prst="rect">
+            <a:avLst/>
+          </a:prstGeom>
+          <a:noFill/>
+          <a:ln/>
+        </p:spPr>
+        <p:txBody>
+          <a:bodyPr wrap="square" lIns="0" tIns="0" rIns="0" bIns="0" rtlCol="0" anchor="t"/>
+          <a:lstStyle/>
+          <a:p>
+            <a:r>
+              <a:rPr lang="en-US" sz="1200" dirty="0">
+                <a:solidFill>
+                  <a:srgbClr val="8892B0"/>
+                </a:solidFill>
+                <a:latin typeface="SF Mono" pitchFamily="34" charset="0"/>
+                <a:ea typeface="SF Mono" pitchFamily="34" charset="-122"/>
+                <a:cs typeface="SF Mono" pitchFamily="34" charset="-120"/>
+              </a:rPr>
+              <a:t>round2/R2S5.md  ·  docs/JUDGE_RUNBOOK.md  ·  docs/reference/QA.md</a:t>
+            </a:r>
+            <a:endParaRPr lang="en-US" sz="1200" dirty="0"/>
+          </a:p>
+        </p:txBody>
+      </p:sp>
+      <p:sp>
+        <p:nvSpPr>
+          <p:cNvPr id="26" name="Shape 23"/>
+          <p:cNvSpPr/>
+          <p:nvPr/>
+        </p:nvSpPr>
+        <p:spPr>
+          <a:xfrm>
+            <a:off x="950976" y="7479792"/>
+            <a:ext cx="16386048" cy="1993392"/>
+          </a:xfrm>
+          <a:prstGeom prst="rect">
+            <a:avLst/>
+          </a:prstGeom>
+          <a:solidFill>
+            <a:srgbClr val="0F1525"/>
+          </a:solidFill>
+          <a:ln w="8636">
+            <a:solidFill>
+              <a:srgbClr val="1E2A3D"/>
+            </a:solidFill>
+            <a:prstDash val="solid"/>
+          </a:ln>
+        </p:spPr>
+      </p:sp>
+      <p:sp>
+        <p:nvSpPr>
+          <p:cNvPr id="27" name="Text 24"/>
+          <p:cNvSpPr/>
+          <p:nvPr/>
+        </p:nvSpPr>
+        <p:spPr>
+          <a:xfrm>
+            <a:off x="1243584" y="7699248"/>
+            <a:ext cx="15819120" cy="329184"/>
+          </a:xfrm>
+          <a:prstGeom prst="rect">
+            <a:avLst/>
+          </a:prstGeom>
+          <a:noFill/>
+          <a:ln/>
+        </p:spPr>
+        <p:txBody>
+          <a:bodyPr wrap="square" lIns="0" tIns="0" rIns="0" bIns="0" rtlCol="0" anchor="ctr"/>
+          <a:lstStyle/>
+          <a:p>
+            <a:r>
+              <a:rPr lang="en-US" sz="1500" b="1" spc="140" kern="0" dirty="0">
+                <a:solidFill>
+                  <a:srgbClr val="F5F0EB"/>
+                </a:solidFill>
+                <a:latin typeface="Segoe UI" pitchFamily="34" charset="0"/>
+                <a:ea typeface="Segoe UI" pitchFamily="34" charset="-122"/>
+                <a:cs typeface="Segoe UI" pitchFamily="34" charset="-120"/>
+              </a:rPr>
+              <a:t>IIT GANDHINAGAR  ·  TEAM CONTROLPLANE  ·  ACCENTURE INNOVATION CHALLENGE 2026  ·  PS #1</a:t>
+            </a:r>
+            <a:endParaRPr lang="en-US" sz="1500" dirty="0"/>
+          </a:p>
+        </p:txBody>
+      </p:sp>
+      <p:sp>
+        <p:nvSpPr>
+          <p:cNvPr id="28" name="Text 25"/>
+          <p:cNvSpPr/>
+          <p:nvPr/>
+        </p:nvSpPr>
+        <p:spPr>
+          <a:xfrm>
+            <a:off x="1243584" y="8101584"/>
+            <a:ext cx="15819120" cy="329184"/>
+          </a:xfrm>
+          <a:prstGeom prst="rect">
+            <a:avLst/>
+          </a:prstGeom>
+          <a:noFill/>
+          <a:ln/>
+        </p:spPr>
+        <p:txBody>
+          <a:bodyPr wrap="square" lIns="0" tIns="0" rIns="0" bIns="0" rtlCol="0" anchor="ctr"/>
+          <a:lstStyle/>
+          <a:p>
+            <a:r>
+              <a:rPr lang="en-US" sz="1400" dirty="0">
+                <a:solidFill>
+                  <a:srgbClr val="D0C8B8"/>
+                </a:solidFill>
+                <a:latin typeface="Segoe UI" pitchFamily="34" charset="0"/>
+                <a:ea typeface="Segoe UI" pitchFamily="34" charset="-122"/>
+                <a:cs typeface="Segoe UI" pitchFamily="34" charset="-120"/>
+              </a:rPr>
+              <a:t>Public GitHub: github.com/Srujan0798/controlplane-ai  ·  branch main  ·  frozen tag v0.2.0-round2.</a:t>
+            </a:r>
+            <a:endParaRPr lang="en-US" sz="1400" dirty="0"/>
+          </a:p>
+        </p:txBody>
+      </p:sp>
+      <p:sp>
+        <p:nvSpPr>
+          <p:cNvPr id="29" name="Text 26"/>
+          <p:cNvSpPr/>
+          <p:nvPr/>
+        </p:nvSpPr>
+        <p:spPr>
+          <a:xfrm>
+            <a:off x="1243584" y="8485632"/>
+            <a:ext cx="15819120" cy="713232"/>
+          </a:xfrm>
+          <a:prstGeom prst="rect">
+            <a:avLst/>
+          </a:prstGeom>
+          <a:noFill/>
+          <a:ln/>
+        </p:spPr>
+        <p:txBody>
+          <a:bodyPr wrap="square" lIns="0" tIns="0" rIns="0" bIns="0" rtlCol="0" anchor="t"/>
+          <a:lstStyle/>
+          <a:p>
+            <a:r>
+              <a:rPr lang="en-US" sz="1400" dirty="0">
+                <a:solidFill>
+                  <a:srgbClr val="8892B0"/>
+                </a:solidFill>
+                <a:latin typeface="Segoe UI" pitchFamily="34" charset="0"/>
+                <a:ea typeface="Segoe UI" pitchFamily="34" charset="-122"/>
+                <a:cs typeface="Segoe UI" pitchFamily="34" charset="-120"/>
+              </a:rPr>
+              <a:t>Every artifact in /submission regenerates from the live JSON. make verify is the source of truth — if a number is not in submission/latency_bench.json, it does not exist.</a:t>
+            </a:r>
+            <a:endParaRPr lang="en-US" sz="1400" dirty="0"/>
+          </a:p>
+        </p:txBody>
+      </p:sp>
+    </p:spTree>
+  </p:cSld>
+  <p:clrMapOvr>
+    <a:masterClrMapping/>
+  </p:clrMapOvr>
+</p:sld>
+</file>
+
+<file path=ppt/slides/slide15.xml><?xml version="1.0" encoding="utf-8"?>
+<p:sld xmlns:a="http://schemas.openxmlformats.org/drawingml/2006/main" xmlns:r="http://schemas.openxmlformats.org/officeDocument/2006/relationships" xmlns:p="http://schemas.openxmlformats.org/presentationml/2006/main">
+  <p:cSld name="Slide 15">
     <p:bg>
       <p:bgPr>
         <a:solidFill>
@@ -10742,9 +11236,6 @@
           <a:bodyPr wrap="square" lIns="0" tIns="0" rIns="0" bIns="0" rtlCol="0" anchor="ctr"/>
           <a:lstStyle/>
           <a:p>
-            <a:pPr indent="0" marL="0">
-              <a:buNone/>
-            </a:pPr>
             <a:r>
               <a:rPr lang="en-US" sz="1200" dirty="0">
                 <a:solidFill>
@@ -10781,9 +11272,6 @@
           <a:bodyPr wrap="square" lIns="0" tIns="0" rIns="0" bIns="0" rtlCol="0" anchor="ctr"/>
           <a:lstStyle/>
           <a:p>
-            <a:pPr indent="0" marL="0">
-              <a:buNone/>
-            </a:pPr>
             <a:r>
               <a:rPr lang="en-US" sz="1500" spc="150" kern="0" dirty="0">
                 <a:solidFill>
@@ -10820,9 +11308,7 @@
           <a:bodyPr wrap="square" lIns="0" tIns="0" rIns="0" bIns="0" rtlCol="0" anchor="ctr"/>
           <a:lstStyle/>
           <a:p>
-            <a:pPr algn="r" indent="0" marL="0">
-              <a:buNone/>
-            </a:pPr>
+            <a:pPr algn="r"/>
             <a:r>
               <a:rPr lang="en-US" sz="1500" spc="150" kern="0" dirty="0">
                 <a:solidFill>
@@ -10832,7 +11318,7 @@
                 <a:ea typeface="Segoe UI" pitchFamily="34" charset="-122"/>
                 <a:cs typeface="Segoe UI" pitchFamily="34" charset="-120"/>
               </a:rPr>
-              <a:t>12 // ASK</a:t>
+              <a:t>14 // ASK</a:t>
             </a:r>
             <a:endParaRPr lang="en-US" sz="1500" dirty="0"/>
           </a:p>
@@ -10859,9 +11345,6 @@
           <a:bodyPr wrap="square" lIns="0" tIns="0" rIns="0" bIns="0" rtlCol="0" anchor="ctr"/>
           <a:lstStyle/>
           <a:p>
-            <a:pPr indent="0" marL="0">
-              <a:buNone/>
-            </a:pPr>
             <a:r>
               <a:rPr lang="en-US" sz="1200" dirty="0">
                 <a:solidFill>
@@ -10918,9 +11401,6 @@
           <a:bodyPr wrap="square" lIns="0" tIns="0" rIns="0" bIns="0" rtlCol="0" anchor="ctr"/>
           <a:lstStyle/>
           <a:p>
-            <a:pPr indent="0" marL="0">
-              <a:buNone/>
-            </a:pPr>
             <a:r>
               <a:rPr lang="en-US" sz="1500" dirty="0">
                 <a:solidFill>
@@ -10957,9 +11437,7 @@
           <a:bodyPr wrap="square" lIns="0" tIns="0" rIns="0" bIns="0" rtlCol="0" anchor="ctr"/>
           <a:lstStyle/>
           <a:p>
-            <a:pPr algn="r" indent="0" marL="0">
-              <a:buNone/>
-            </a:pPr>
+            <a:pPr algn="r"/>
             <a:r>
               <a:rPr lang="en-US" sz="1500" spc="150" kern="0" dirty="0">
                 <a:solidFill>
@@ -10996,9 +11474,7 @@
           <a:bodyPr wrap="square" lIns="0" tIns="0" rIns="0" bIns="0" rtlCol="0" anchor="ctr"/>
           <a:lstStyle/>
           <a:p>
-            <a:pPr algn="l" indent="0" marL="0">
-              <a:buNone/>
-            </a:pPr>
+            <a:pPr algn="l"/>
             <a:r>
               <a:rPr lang="en-US" sz="1500" spc="300" kern="0" dirty="0">
                 <a:solidFill>
@@ -11008,7 +11484,7 @@
                 <a:ea typeface="Segoe UI" pitchFamily="34" charset="-122"/>
                 <a:cs typeface="Segoe UI" pitchFamily="34" charset="-120"/>
               </a:rPr>
-              <a:t>12 · ASK</a:t>
+              <a:t>14 · ASK</a:t>
             </a:r>
             <a:endParaRPr lang="en-US" sz="1500" dirty="0"/>
           </a:p>
@@ -11035,9 +11511,6 @@
           <a:bodyPr wrap="square" lIns="0" tIns="0" rIns="0" bIns="0" rtlCol="0" anchor="ctr"/>
           <a:lstStyle/>
           <a:p>
-            <a:pPr indent="0" marL="0">
-              <a:buNone/>
-            </a:pPr>
             <a:r>
               <a:rPr lang="en-US" sz="1600" spc="300" kern="0" dirty="0">
                 <a:solidFill>
@@ -11074,9 +11547,6 @@
           <a:bodyPr wrap="square" lIns="0" tIns="0" rIns="0" bIns="0" rtlCol="0" anchor="ctr"/>
           <a:lstStyle/>
           <a:p>
-            <a:pPr indent="0" marL="0">
-              <a:buNone/>
-            </a:pPr>
             <a:r>
               <a:rPr lang="en-US" sz="1600" dirty="0">
                 <a:solidFill>
@@ -11113,9 +11583,7 @@
           <a:bodyPr wrap="square" lIns="0" tIns="0" rIns="0" bIns="0" rtlCol="0" anchor="t"/>
           <a:lstStyle/>
           <a:p>
-            <a:pPr algn="l" indent="0" marL="0">
-              <a:buNone/>
-            </a:pPr>
+            <a:pPr algn="l"/>
             <a:r>
               <a:rPr lang="en-US" sz="3600" b="1" spc="-75" kern="0" dirty="0">
                 <a:solidFill>
@@ -11130,9 +11598,7 @@
             <a:endParaRPr lang="en-US" sz="3600" dirty="0"/>
           </a:p>
           <a:p>
-            <a:pPr algn="l" indent="0" marL="0">
-              <a:buNone/>
-            </a:pPr>
+            <a:pPr algn="l"/>
             <a:r>
               <a:rPr lang="en-US" sz="3600" b="1" spc="-75" kern="0" dirty="0">
                 <a:solidFill>
@@ -11169,9 +11635,6 @@
           <a:bodyPr wrap="square" lIns="0" tIns="0" rIns="0" bIns="0" rtlCol="0" anchor="ctr"/>
           <a:lstStyle/>
           <a:p>
-            <a:pPr indent="0" marL="0">
-              <a:buNone/>
-            </a:pPr>
             <a:r>
               <a:rPr lang="en-US" sz="2600" dirty="0">
                 <a:solidFill>
@@ -11233,9 +11696,6 @@
           <a:bodyPr wrap="square" lIns="0" tIns="0" rIns="0" bIns="0" rtlCol="0" anchor="ctr"/>
           <a:lstStyle/>
           <a:p>
-            <a:pPr indent="0" marL="0">
-              <a:buNone/>
-            </a:pPr>
             <a:r>
               <a:rPr lang="en-US" sz="1400" spc="180" kern="0" dirty="0">
                 <a:solidFill>
@@ -11272,9 +11732,6 @@
           <a:bodyPr wrap="square" lIns="0" tIns="0" rIns="0" bIns="0" rtlCol="0" anchor="ctr"/>
           <a:lstStyle/>
           <a:p>
-            <a:pPr indent="0" marL="0">
-              <a:buNone/>
-            </a:pPr>
             <a:r>
               <a:rPr lang="en-US" sz="2200" b="1" dirty="0">
                 <a:solidFill>
@@ -11311,9 +11768,6 @@
           <a:bodyPr wrap="square" lIns="0" tIns="0" rIns="0" bIns="0" rtlCol="0" anchor="t"/>
           <a:lstStyle/>
           <a:p>
-            <a:pPr indent="0" marL="0">
-              <a:buNone/>
-            </a:pPr>
             <a:r>
               <a:rPr lang="en-US" sz="1600" dirty="0">
                 <a:solidFill>
@@ -11350,9 +11804,6 @@
           <a:bodyPr wrap="square" lIns="0" tIns="0" rIns="0" bIns="0" rtlCol="0" anchor="ctr"/>
           <a:lstStyle/>
           <a:p>
-            <a:pPr indent="0" marL="0">
-              <a:buNone/>
-            </a:pPr>
             <a:r>
               <a:rPr lang="en-US" sz="1800" dirty="0">
                 <a:solidFill>
@@ -11389,9 +11840,6 @@
           <a:bodyPr wrap="square" lIns="0" tIns="0" rIns="0" bIns="0" rtlCol="0" anchor="ctr"/>
           <a:lstStyle/>
           <a:p>
-            <a:pPr indent="0" marL="0">
-              <a:buNone/>
-            </a:pPr>
             <a:r>
               <a:rPr lang="en-US" sz="1400" spc="120" kern="0" dirty="0">
                 <a:solidFill>
@@ -11482,9 +11930,6 @@
           <a:bodyPr wrap="square" lIns="0" tIns="0" rIns="0" bIns="0" rtlCol="0" anchor="ctr"/>
           <a:lstStyle/>
           <a:p>
-            <a:pPr indent="0" marL="0">
-              <a:buNone/>
-            </a:pPr>
             <a:r>
               <a:rPr lang="en-US" sz="1200" dirty="0">
                 <a:solidFill>
@@ -11521,9 +11966,6 @@
           <a:bodyPr wrap="square" lIns="0" tIns="0" rIns="0" bIns="0" rtlCol="0" anchor="ctr"/>
           <a:lstStyle/>
           <a:p>
-            <a:pPr indent="0" marL="0">
-              <a:buNone/>
-            </a:pPr>
             <a:r>
               <a:rPr lang="en-US" sz="1500" spc="150" kern="0" dirty="0">
                 <a:solidFill>
@@ -11560,9 +12002,7 @@
           <a:bodyPr wrap="square" lIns="0" tIns="0" rIns="0" bIns="0" rtlCol="0" anchor="ctr"/>
           <a:lstStyle/>
           <a:p>
-            <a:pPr algn="r" indent="0" marL="0">
-              <a:buNone/>
-            </a:pPr>
+            <a:pPr algn="r"/>
             <a:r>
               <a:rPr lang="en-US" sz="1500" spc="150" kern="0" dirty="0">
                 <a:solidFill>
@@ -11599,9 +12039,6 @@
           <a:bodyPr wrap="square" lIns="0" tIns="0" rIns="0" bIns="0" rtlCol="0" anchor="ctr"/>
           <a:lstStyle/>
           <a:p>
-            <a:pPr indent="0" marL="0">
-              <a:buNone/>
-            </a:pPr>
             <a:r>
               <a:rPr lang="en-US" sz="1200" dirty="0">
                 <a:solidFill>
@@ -11658,9 +12095,6 @@
           <a:bodyPr wrap="square" lIns="0" tIns="0" rIns="0" bIns="0" rtlCol="0" anchor="ctr"/>
           <a:lstStyle/>
           <a:p>
-            <a:pPr indent="0" marL="0">
-              <a:buNone/>
-            </a:pPr>
             <a:r>
               <a:rPr lang="en-US" sz="1500" dirty="0">
                 <a:solidFill>
@@ -11697,9 +12131,7 @@
           <a:bodyPr wrap="square" lIns="0" tIns="0" rIns="0" bIns="0" rtlCol="0" anchor="ctr"/>
           <a:lstStyle/>
           <a:p>
-            <a:pPr algn="r" indent="0" marL="0">
-              <a:buNone/>
-            </a:pPr>
+            <a:pPr algn="r"/>
             <a:r>
               <a:rPr lang="en-US" sz="1500" spc="150" kern="0" dirty="0">
                 <a:solidFill>
@@ -11736,9 +12168,7 @@
           <a:bodyPr wrap="square" lIns="0" tIns="0" rIns="0" bIns="0" rtlCol="0" anchor="ctr"/>
           <a:lstStyle/>
           <a:p>
-            <a:pPr algn="l" indent="0" marL="0">
-              <a:buNone/>
-            </a:pPr>
+            <a:pPr algn="l"/>
             <a:r>
               <a:rPr lang="en-US" sz="1500" spc="300" kern="0" dirty="0">
                 <a:solidFill>
@@ -11775,9 +12205,7 @@
           <a:bodyPr wrap="square" lIns="0" tIns="0" rIns="0" bIns="0" rtlCol="0" anchor="t"/>
           <a:lstStyle/>
           <a:p>
-            <a:pPr algn="l" indent="0" marL="0">
-              <a:buNone/>
-            </a:pPr>
+            <a:pPr algn="l"/>
             <a:r>
               <a:rPr lang="en-US" sz="3600" b="1" spc="-75" kern="0" dirty="0">
                 <a:solidFill>
@@ -11789,9 +12217,7 @@
               </a:rPr>
               <a:t>IT USED TO BE A BAD </a:t>
             </a:r>
-            <a:pPr algn="l" indent="0" marL="0">
-              <a:buNone/>
-            </a:pPr>
+            <a:pPr algn="l"/>
             <a:r>
               <a:rPr lang="en-US" sz="3600" b="1" spc="-75" kern="0" dirty="0">
                 <a:solidFill>
@@ -11803,9 +12229,7 @@
               </a:rPr>
               <a:t>PARAGRAPH</a:t>
             </a:r>
-            <a:pPr algn="l" indent="0" marL="0">
-              <a:buNone/>
-            </a:pPr>
+            <a:pPr algn="l"/>
             <a:r>
               <a:rPr lang="en-US" sz="3600" b="1" spc="-75" kern="0" dirty="0">
                 <a:solidFill>
@@ -11842,9 +12266,6 @@
           <a:bodyPr wrap="square" lIns="0" tIns="0" rIns="0" bIns="0" rtlCol="0" anchor="ctr"/>
           <a:lstStyle/>
           <a:p>
-            <a:pPr indent="0" marL="0">
-              <a:buNone/>
-            </a:pPr>
             <a:r>
               <a:rPr lang="en-US" sz="2200" dirty="0">
                 <a:solidFill>
@@ -11926,9 +12347,6 @@
           <a:bodyPr wrap="square" lIns="0" tIns="0" rIns="0" bIns="0" rtlCol="0" anchor="ctr"/>
           <a:lstStyle/>
           <a:p>
-            <a:pPr indent="0" marL="0">
-              <a:buNone/>
-            </a:pPr>
             <a:r>
               <a:rPr lang="en-US" sz="1300" spc="120" kern="0" dirty="0">
                 <a:solidFill>
@@ -11965,9 +12383,7 @@
           <a:bodyPr wrap="square" lIns="0" tIns="0" rIns="0" bIns="0" rtlCol="0" anchor="ctr"/>
           <a:lstStyle/>
           <a:p>
-            <a:pPr algn="r" indent="0" marL="0">
-              <a:buNone/>
-            </a:pPr>
+            <a:pPr algn="r"/>
             <a:r>
               <a:rPr lang="en-US" sz="1300" spc="100" kern="0" dirty="0">
                 <a:solidFill>
@@ -12004,9 +12420,6 @@
           <a:bodyPr wrap="square" lIns="0" tIns="0" rIns="0" bIns="0" rtlCol="0" anchor="ctr"/>
           <a:lstStyle/>
           <a:p>
-            <a:pPr indent="0" marL="0">
-              <a:buNone/>
-            </a:pPr>
             <a:r>
               <a:rPr lang="en-US" sz="2800" i="1" dirty="0">
                 <a:solidFill>
@@ -12063,9 +12476,6 @@
           <a:bodyPr wrap="square" lIns="0" tIns="0" rIns="0" bIns="0" rtlCol="0" anchor="ctr"/>
           <a:lstStyle/>
           <a:p>
-            <a:pPr indent="0" marL="0">
-              <a:buNone/>
-            </a:pPr>
             <a:r>
               <a:rPr lang="en-US" sz="1800" b="1" spc="140" kern="0" dirty="0">
                 <a:solidFill>
@@ -12102,9 +12512,6 @@
           <a:bodyPr wrap="square" lIns="0" tIns="0" rIns="0" bIns="0" rtlCol="0" anchor="ctr"/>
           <a:lstStyle/>
           <a:p>
-            <a:pPr indent="0" marL="0">
-              <a:buNone/>
-            </a:pPr>
             <a:r>
               <a:rPr lang="en-US" sz="1600" dirty="0">
                 <a:solidFill>
@@ -12186,9 +12593,6 @@
           <a:bodyPr wrap="square" lIns="0" tIns="0" rIns="0" bIns="0" rtlCol="0" anchor="ctr"/>
           <a:lstStyle/>
           <a:p>
-            <a:pPr indent="0" marL="0">
-              <a:buNone/>
-            </a:pPr>
             <a:r>
               <a:rPr lang="en-US" sz="1400" spc="200" kern="0" dirty="0">
                 <a:solidFill>
@@ -12225,9 +12629,6 @@
           <a:bodyPr wrap="square" lIns="0" tIns="0" rIns="0" bIns="0" rtlCol="0" anchor="ctr"/>
           <a:lstStyle/>
           <a:p>
-            <a:pPr indent="0" marL="0">
-              <a:buNone/>
-            </a:pPr>
             <a:r>
               <a:rPr lang="en-US" sz="4800" b="1" dirty="0">
                 <a:solidFill>
@@ -12264,9 +12665,6 @@
           <a:bodyPr wrap="square" lIns="0" tIns="0" rIns="0" bIns="0" rtlCol="0" anchor="ctr"/>
           <a:lstStyle/>
           <a:p>
-            <a:pPr indent="0" marL="0">
-              <a:buNone/>
-            </a:pPr>
             <a:r>
               <a:rPr lang="en-US" sz="2000" b="1" dirty="0">
                 <a:solidFill>
@@ -12303,9 +12701,6 @@
           <a:bodyPr wrap="square" lIns="0" tIns="0" rIns="0" bIns="0" rtlCol="0" anchor="ctr"/>
           <a:lstStyle/>
           <a:p>
-            <a:pPr indent="0" marL="0">
-              <a:buNone/>
-            </a:pPr>
             <a:r>
               <a:rPr lang="en-US" sz="1600" dirty="0">
                 <a:solidFill>
@@ -12342,9 +12737,6 @@
           <a:bodyPr wrap="square" lIns="0" tIns="0" rIns="0" bIns="0" rtlCol="0" anchor="ctr"/>
           <a:lstStyle/>
           <a:p>
-            <a:pPr indent="0" marL="0">
-              <a:buNone/>
-            </a:pPr>
             <a:r>
               <a:rPr lang="en-US" sz="1600" dirty="0">
                 <a:solidFill>
@@ -12359,9 +12751,6 @@
             <a:endParaRPr lang="en-US" sz="1600" dirty="0"/>
           </a:p>
           <a:p>
-            <a:pPr indent="0" marL="0">
-              <a:buNone/>
-            </a:pPr>
             <a:r>
               <a:rPr lang="en-US" sz="1600" dirty="0">
                 <a:solidFill>
@@ -12423,9 +12812,6 @@
           <a:bodyPr wrap="square" lIns="0" tIns="0" rIns="0" bIns="0" rtlCol="0" anchor="ctr"/>
           <a:lstStyle/>
           <a:p>
-            <a:pPr indent="0" marL="0">
-              <a:buNone/>
-            </a:pPr>
             <a:r>
               <a:rPr lang="en-US" sz="2000" b="1" spc="60" kern="0" dirty="0">
                 <a:solidFill>
@@ -12462,9 +12848,6 @@
           <a:bodyPr wrap="square" lIns="0" tIns="0" rIns="0" bIns="0" rtlCol="0" anchor="ctr"/>
           <a:lstStyle/>
           <a:p>
-            <a:pPr indent="0" marL="0">
-              <a:buNone/>
-            </a:pPr>
             <a:r>
               <a:rPr lang="en-US" sz="1600" dirty="0">
                 <a:solidFill>
@@ -12555,9 +12938,6 @@
           <a:bodyPr wrap="square" lIns="0" tIns="0" rIns="0" bIns="0" rtlCol="0" anchor="ctr"/>
           <a:lstStyle/>
           <a:p>
-            <a:pPr indent="0" marL="0">
-              <a:buNone/>
-            </a:pPr>
             <a:r>
               <a:rPr lang="en-US" sz="1200" dirty="0">
                 <a:solidFill>
@@ -12594,9 +12974,6 @@
           <a:bodyPr wrap="square" lIns="0" tIns="0" rIns="0" bIns="0" rtlCol="0" anchor="ctr"/>
           <a:lstStyle/>
           <a:p>
-            <a:pPr indent="0" marL="0">
-              <a:buNone/>
-            </a:pPr>
             <a:r>
               <a:rPr lang="en-US" sz="1500" spc="150" kern="0" dirty="0">
                 <a:solidFill>
@@ -12633,9 +13010,7 @@
           <a:bodyPr wrap="square" lIns="0" tIns="0" rIns="0" bIns="0" rtlCol="0" anchor="ctr"/>
           <a:lstStyle/>
           <a:p>
-            <a:pPr algn="r" indent="0" marL="0">
-              <a:buNone/>
-            </a:pPr>
+            <a:pPr algn="r"/>
             <a:r>
               <a:rPr lang="en-US" sz="1500" spc="150" kern="0" dirty="0">
                 <a:solidFill>
@@ -12672,9 +13047,6 @@
           <a:bodyPr wrap="square" lIns="0" tIns="0" rIns="0" bIns="0" rtlCol="0" anchor="ctr"/>
           <a:lstStyle/>
           <a:p>
-            <a:pPr indent="0" marL="0">
-              <a:buNone/>
-            </a:pPr>
             <a:r>
               <a:rPr lang="en-US" sz="1200" dirty="0">
                 <a:solidFill>
@@ -12731,9 +13103,6 @@
           <a:bodyPr wrap="square" lIns="0" tIns="0" rIns="0" bIns="0" rtlCol="0" anchor="ctr"/>
           <a:lstStyle/>
           <a:p>
-            <a:pPr indent="0" marL="0">
-              <a:buNone/>
-            </a:pPr>
             <a:r>
               <a:rPr lang="en-US" sz="1500" dirty="0">
                 <a:solidFill>
@@ -12770,9 +13139,7 @@
           <a:bodyPr wrap="square" lIns="0" tIns="0" rIns="0" bIns="0" rtlCol="0" anchor="ctr"/>
           <a:lstStyle/>
           <a:p>
-            <a:pPr algn="r" indent="0" marL="0">
-              <a:buNone/>
-            </a:pPr>
+            <a:pPr algn="r"/>
             <a:r>
               <a:rPr lang="en-US" sz="1500" spc="150" kern="0" dirty="0">
                 <a:solidFill>
@@ -12809,9 +13176,7 @@
           <a:bodyPr wrap="square" lIns="0" tIns="0" rIns="0" bIns="0" rtlCol="0" anchor="ctr"/>
           <a:lstStyle/>
           <a:p>
-            <a:pPr algn="l" indent="0" marL="0">
-              <a:buNone/>
-            </a:pPr>
+            <a:pPr algn="l"/>
             <a:r>
               <a:rPr lang="en-US" sz="1500" spc="300" kern="0" dirty="0">
                 <a:solidFill>
@@ -12848,9 +13213,7 @@
           <a:bodyPr wrap="square" lIns="0" tIns="0" rIns="0" bIns="0" rtlCol="0" anchor="t"/>
           <a:lstStyle/>
           <a:p>
-            <a:pPr algn="l" indent="0" marL="0">
-              <a:buNone/>
-            </a:pPr>
+            <a:pPr algn="l"/>
             <a:r>
               <a:rPr lang="en-US" sz="3600" b="1" spc="-75" kern="0" dirty="0">
                 <a:solidFill>
@@ -12887,9 +13250,6 @@
           <a:bodyPr wrap="square" lIns="0" tIns="0" rIns="0" bIns="0" rtlCol="0" anchor="ctr"/>
           <a:lstStyle/>
           <a:p>
-            <a:pPr indent="0" marL="0">
-              <a:buNone/>
-            </a:pPr>
             <a:r>
               <a:rPr lang="en-US" sz="2400" dirty="0">
                 <a:solidFill>
@@ -12971,9 +13331,6 @@
           <a:bodyPr wrap="square" lIns="0" tIns="0" rIns="0" bIns="0" rtlCol="0" anchor="ctr"/>
           <a:lstStyle/>
           <a:p>
-            <a:pPr indent="0" marL="0">
-              <a:buNone/>
-            </a:pPr>
             <a:r>
               <a:rPr lang="en-US" sz="1800" b="1" spc="200" kern="0" dirty="0">
                 <a:solidFill>
@@ -13010,9 +13367,6 @@
           <a:bodyPr wrap="square" lIns="0" tIns="0" rIns="0" bIns="0" rtlCol="0" anchor="ctr"/>
           <a:lstStyle/>
           <a:p>
-            <a:pPr indent="0" marL="0">
-              <a:buNone/>
-            </a:pPr>
             <a:r>
               <a:rPr lang="en-US" sz="2200" b="1" dirty="0">
                 <a:solidFill>
@@ -13049,9 +13403,6 @@
           <a:bodyPr wrap="square" lIns="0" tIns="0" rIns="0" bIns="0" rtlCol="0" anchor="t"/>
           <a:lstStyle/>
           <a:p>
-            <a:pPr indent="0" marL="0">
-              <a:buNone/>
-            </a:pPr>
             <a:r>
               <a:rPr lang="en-US" sz="1600" dirty="0">
                 <a:solidFill>
@@ -13133,9 +13484,6 @@
           <a:bodyPr wrap="square" lIns="0" tIns="0" rIns="0" bIns="0" rtlCol="0" anchor="ctr"/>
           <a:lstStyle/>
           <a:p>
-            <a:pPr indent="0" marL="0">
-              <a:buNone/>
-            </a:pPr>
             <a:r>
               <a:rPr lang="en-US" sz="1800" b="1" spc="200" kern="0" dirty="0">
                 <a:solidFill>
@@ -13172,9 +13520,6 @@
           <a:bodyPr wrap="square" lIns="0" tIns="0" rIns="0" bIns="0" rtlCol="0" anchor="ctr"/>
           <a:lstStyle/>
           <a:p>
-            <a:pPr indent="0" marL="0">
-              <a:buNone/>
-            </a:pPr>
             <a:r>
               <a:rPr lang="en-US" sz="2200" b="1" dirty="0">
                 <a:solidFill>
@@ -13211,9 +13556,6 @@
           <a:bodyPr wrap="square" lIns="0" tIns="0" rIns="0" bIns="0" rtlCol="0" anchor="t"/>
           <a:lstStyle/>
           <a:p>
-            <a:pPr indent="0" marL="0">
-              <a:buNone/>
-            </a:pPr>
             <a:r>
               <a:rPr lang="en-US" sz="1600" dirty="0">
                 <a:solidFill>
@@ -13295,9 +13637,6 @@
           <a:bodyPr wrap="square" lIns="0" tIns="0" rIns="0" bIns="0" rtlCol="0" anchor="ctr"/>
           <a:lstStyle/>
           <a:p>
-            <a:pPr indent="0" marL="0">
-              <a:buNone/>
-            </a:pPr>
             <a:r>
               <a:rPr lang="en-US" sz="1800" b="1" spc="200" kern="0" dirty="0">
                 <a:solidFill>
@@ -13334,9 +13673,6 @@
           <a:bodyPr wrap="square" lIns="0" tIns="0" rIns="0" bIns="0" rtlCol="0" anchor="ctr"/>
           <a:lstStyle/>
           <a:p>
-            <a:pPr indent="0" marL="0">
-              <a:buNone/>
-            </a:pPr>
             <a:r>
               <a:rPr lang="en-US" sz="2200" b="1" dirty="0">
                 <a:solidFill>
@@ -13373,9 +13709,6 @@
           <a:bodyPr wrap="square" lIns="0" tIns="0" rIns="0" bIns="0" rtlCol="0" anchor="t"/>
           <a:lstStyle/>
           <a:p>
-            <a:pPr indent="0" marL="0">
-              <a:buNone/>
-            </a:pPr>
             <a:r>
               <a:rPr lang="en-US" sz="1600" dirty="0">
                 <a:solidFill>
@@ -13412,9 +13745,6 @@
           <a:bodyPr wrap="square" lIns="0" tIns="0" rIns="0" bIns="0" rtlCol="0" anchor="ctr"/>
           <a:lstStyle/>
           <a:p>
-            <a:pPr indent="0" marL="0">
-              <a:buNone/>
-            </a:pPr>
             <a:r>
               <a:rPr lang="en-US" sz="1600" dirty="0">
                 <a:solidFill>
@@ -13505,9 +13835,6 @@
           <a:bodyPr wrap="square" lIns="0" tIns="0" rIns="0" bIns="0" rtlCol="0" anchor="ctr"/>
           <a:lstStyle/>
           <a:p>
-            <a:pPr indent="0" marL="0">
-              <a:buNone/>
-            </a:pPr>
             <a:r>
               <a:rPr lang="en-US" sz="1200" dirty="0">
                 <a:solidFill>
@@ -13544,9 +13871,6 @@
           <a:bodyPr wrap="square" lIns="0" tIns="0" rIns="0" bIns="0" rtlCol="0" anchor="ctr"/>
           <a:lstStyle/>
           <a:p>
-            <a:pPr indent="0" marL="0">
-              <a:buNone/>
-            </a:pPr>
             <a:r>
               <a:rPr lang="en-US" sz="1500" spc="150" kern="0" dirty="0">
                 <a:solidFill>
@@ -13583,9 +13907,7 @@
           <a:bodyPr wrap="square" lIns="0" tIns="0" rIns="0" bIns="0" rtlCol="0" anchor="ctr"/>
           <a:lstStyle/>
           <a:p>
-            <a:pPr algn="r" indent="0" marL="0">
-              <a:buNone/>
-            </a:pPr>
+            <a:pPr algn="r"/>
             <a:r>
               <a:rPr lang="en-US" sz="1500" spc="150" kern="0" dirty="0">
                 <a:solidFill>
@@ -13622,9 +13944,6 @@
           <a:bodyPr wrap="square" lIns="0" tIns="0" rIns="0" bIns="0" rtlCol="0" anchor="ctr"/>
           <a:lstStyle/>
           <a:p>
-            <a:pPr indent="0" marL="0">
-              <a:buNone/>
-            </a:pPr>
             <a:r>
               <a:rPr lang="en-US" sz="1200" dirty="0">
                 <a:solidFill>
@@ -13681,9 +14000,6 @@
           <a:bodyPr wrap="square" lIns="0" tIns="0" rIns="0" bIns="0" rtlCol="0" anchor="ctr"/>
           <a:lstStyle/>
           <a:p>
-            <a:pPr indent="0" marL="0">
-              <a:buNone/>
-            </a:pPr>
             <a:r>
               <a:rPr lang="en-US" sz="1500" dirty="0">
                 <a:solidFill>
@@ -13720,9 +14036,7 @@
           <a:bodyPr wrap="square" lIns="0" tIns="0" rIns="0" bIns="0" rtlCol="0" anchor="ctr"/>
           <a:lstStyle/>
           <a:p>
-            <a:pPr algn="r" indent="0" marL="0">
-              <a:buNone/>
-            </a:pPr>
+            <a:pPr algn="r"/>
             <a:r>
               <a:rPr lang="en-US" sz="1500" spc="150" kern="0" dirty="0">
                 <a:solidFill>
@@ -13759,9 +14073,7 @@
           <a:bodyPr wrap="square" lIns="0" tIns="0" rIns="0" bIns="0" rtlCol="0" anchor="ctr"/>
           <a:lstStyle/>
           <a:p>
-            <a:pPr algn="l" indent="0" marL="0">
-              <a:buNone/>
-            </a:pPr>
+            <a:pPr algn="l"/>
             <a:r>
               <a:rPr lang="en-US" sz="1500" spc="300" kern="0" dirty="0">
                 <a:solidFill>
@@ -13798,9 +14110,7 @@
           <a:bodyPr wrap="square" lIns="0" tIns="0" rIns="0" bIns="0" rtlCol="0" anchor="t"/>
           <a:lstStyle/>
           <a:p>
-            <a:pPr algn="l" indent="0" marL="0">
-              <a:buNone/>
-            </a:pPr>
+            <a:pPr algn="l"/>
             <a:r>
               <a:rPr lang="en-US" sz="3200" b="1" spc="-75" kern="0" dirty="0">
                 <a:solidFill>
@@ -13812,9 +14122,7 @@
               </a:rPr>
               <a:t>AN AI RESPONSE IS A SET OF </a:t>
             </a:r>
-            <a:pPr algn="l" indent="0" marL="0">
-              <a:buNone/>
-            </a:pPr>
+            <a:pPr algn="l"/>
             <a:r>
               <a:rPr lang="en-US" sz="3200" b="1" spc="-75" kern="0" dirty="0">
                 <a:solidFill>
@@ -13826,9 +14134,7 @@
               </a:rPr>
               <a:t>CLAIMS</a:t>
             </a:r>
-            <a:pPr algn="l" indent="0" marL="0">
-              <a:buNone/>
-            </a:pPr>
+            <a:pPr algn="l"/>
             <a:r>
               <a:rPr lang="en-US" sz="3200" b="1" spc="-75" kern="0" dirty="0">
                 <a:solidFill>
@@ -13865,9 +14171,6 @@
           <a:bodyPr wrap="square" lIns="0" tIns="0" rIns="0" bIns="0" rtlCol="0" anchor="ctr"/>
           <a:lstStyle/>
           <a:p>
-            <a:pPr indent="0" marL="0">
-              <a:buNone/>
-            </a:pPr>
             <a:r>
               <a:rPr lang="en-US" sz="1600" dirty="0">
                 <a:solidFill>
@@ -13929,9 +14232,6 @@
           <a:bodyPr wrap="square" lIns="0" tIns="0" rIns="0" bIns="0" rtlCol="0" anchor="ctr"/>
           <a:lstStyle/>
           <a:p>
-            <a:pPr indent="0" marL="0">
-              <a:buNone/>
-            </a:pPr>
             <a:r>
               <a:rPr lang="en-US" sz="1300" spc="150" kern="0" dirty="0">
                 <a:solidFill>
@@ -13968,9 +14268,6 @@
           <a:bodyPr wrap="square" lIns="0" tIns="0" rIns="0" bIns="0" rtlCol="0" anchor="ctr"/>
           <a:lstStyle/>
           <a:p>
-            <a:pPr indent="0" marL="0">
-              <a:buNone/>
-            </a:pPr>
             <a:r>
               <a:rPr lang="en-US" sz="2600" b="1" dirty="0">
                 <a:solidFill>
@@ -14007,9 +14304,6 @@
           <a:bodyPr wrap="square" lIns="0" tIns="0" rIns="0" bIns="0" rtlCol="0" anchor="t"/>
           <a:lstStyle/>
           <a:p>
-            <a:pPr indent="0" marL="0">
-              <a:buNone/>
-            </a:pPr>
             <a:r>
               <a:rPr lang="en-US" sz="1500" dirty="0">
                 <a:solidFill>
@@ -14046,9 +14340,6 @@
           <a:bodyPr wrap="square" lIns="0" tIns="0" rIns="0" bIns="0" rtlCol="0" anchor="ctr"/>
           <a:lstStyle/>
           <a:p>
-            <a:pPr indent="0" marL="0">
-              <a:buNone/>
-            </a:pPr>
             <a:r>
               <a:rPr lang="en-US" sz="1600" b="1" dirty="0">
                 <a:solidFill>
@@ -14110,9 +14401,6 @@
           <a:bodyPr wrap="square" lIns="0" tIns="0" rIns="0" bIns="0" rtlCol="0" anchor="ctr"/>
           <a:lstStyle/>
           <a:p>
-            <a:pPr indent="0" marL="0">
-              <a:buNone/>
-            </a:pPr>
             <a:r>
               <a:rPr lang="en-US" sz="1300" spc="150" kern="0" dirty="0">
                 <a:solidFill>
@@ -14149,9 +14437,6 @@
           <a:bodyPr wrap="square" lIns="0" tIns="0" rIns="0" bIns="0" rtlCol="0" anchor="ctr"/>
           <a:lstStyle/>
           <a:p>
-            <a:pPr indent="0" marL="0">
-              <a:buNone/>
-            </a:pPr>
             <a:r>
               <a:rPr lang="en-US" sz="2600" b="1" dirty="0">
                 <a:solidFill>
@@ -14188,9 +14473,6 @@
           <a:bodyPr wrap="square" lIns="0" tIns="0" rIns="0" bIns="0" rtlCol="0" anchor="t"/>
           <a:lstStyle/>
           <a:p>
-            <a:pPr indent="0" marL="0">
-              <a:buNone/>
-            </a:pPr>
             <a:r>
               <a:rPr lang="en-US" sz="1500" dirty="0">
                 <a:solidFill>
@@ -14227,9 +14509,6 @@
           <a:bodyPr wrap="square" lIns="0" tIns="0" rIns="0" bIns="0" rtlCol="0" anchor="ctr"/>
           <a:lstStyle/>
           <a:p>
-            <a:pPr indent="0" marL="0">
-              <a:buNone/>
-            </a:pPr>
             <a:r>
               <a:rPr lang="en-US" sz="1600" b="1" dirty="0">
                 <a:solidFill>
@@ -14291,9 +14570,6 @@
           <a:bodyPr wrap="square" lIns="0" tIns="0" rIns="0" bIns="0" rtlCol="0" anchor="ctr"/>
           <a:lstStyle/>
           <a:p>
-            <a:pPr indent="0" marL="0">
-              <a:buNone/>
-            </a:pPr>
             <a:r>
               <a:rPr lang="en-US" sz="1300" spc="150" kern="0" dirty="0">
                 <a:solidFill>
@@ -14330,9 +14606,6 @@
           <a:bodyPr wrap="square" lIns="0" tIns="0" rIns="0" bIns="0" rtlCol="0" anchor="ctr"/>
           <a:lstStyle/>
           <a:p>
-            <a:pPr indent="0" marL="0">
-              <a:buNone/>
-            </a:pPr>
             <a:r>
               <a:rPr lang="en-US" sz="2600" b="1" dirty="0">
                 <a:solidFill>
@@ -14369,9 +14642,6 @@
           <a:bodyPr wrap="square" lIns="0" tIns="0" rIns="0" bIns="0" rtlCol="0" anchor="t"/>
           <a:lstStyle/>
           <a:p>
-            <a:pPr indent="0" marL="0">
-              <a:buNone/>
-            </a:pPr>
             <a:r>
               <a:rPr lang="en-US" sz="1500" dirty="0">
                 <a:solidFill>
@@ -14408,9 +14678,6 @@
           <a:bodyPr wrap="square" lIns="0" tIns="0" rIns="0" bIns="0" rtlCol="0" anchor="ctr"/>
           <a:lstStyle/>
           <a:p>
-            <a:pPr indent="0" marL="0">
-              <a:buNone/>
-            </a:pPr>
             <a:r>
               <a:rPr lang="en-US" sz="1600" b="1" dirty="0">
                 <a:solidFill>
@@ -14472,9 +14739,6 @@
           <a:bodyPr wrap="square" lIns="0" tIns="0" rIns="0" bIns="0" rtlCol="0" anchor="ctr"/>
           <a:lstStyle/>
           <a:p>
-            <a:pPr indent="0" marL="0">
-              <a:buNone/>
-            </a:pPr>
             <a:r>
               <a:rPr lang="en-US" sz="1300" spc="150" kern="0" dirty="0">
                 <a:solidFill>
@@ -14511,9 +14775,6 @@
           <a:bodyPr wrap="square" lIns="0" tIns="0" rIns="0" bIns="0" rtlCol="0" anchor="ctr"/>
           <a:lstStyle/>
           <a:p>
-            <a:pPr indent="0" marL="0">
-              <a:buNone/>
-            </a:pPr>
             <a:r>
               <a:rPr lang="en-US" sz="2600" b="1" dirty="0">
                 <a:solidFill>
@@ -14550,9 +14811,6 @@
           <a:bodyPr wrap="square" lIns="0" tIns="0" rIns="0" bIns="0" rtlCol="0" anchor="t"/>
           <a:lstStyle/>
           <a:p>
-            <a:pPr indent="0" marL="0">
-              <a:buNone/>
-            </a:pPr>
             <a:r>
               <a:rPr lang="en-US" sz="1500" dirty="0">
                 <a:solidFill>
@@ -14614,9 +14872,6 @@
           <a:bodyPr wrap="square" lIns="0" tIns="0" rIns="0" bIns="0" rtlCol="0" anchor="ctr"/>
           <a:lstStyle/>
           <a:p>
-            <a:pPr indent="0" marL="0">
-              <a:buNone/>
-            </a:pPr>
             <a:r>
               <a:rPr lang="en-US" sz="1500" b="1" spc="140" kern="0" dirty="0">
                 <a:solidFill>
@@ -14653,9 +14908,6 @@
           <a:bodyPr wrap="square" lIns="0" tIns="0" rIns="0" bIns="0" rtlCol="0" anchor="t"/>
           <a:lstStyle/>
           <a:p>
-            <a:pPr indent="0" marL="0">
-              <a:buNone/>
-            </a:pPr>
             <a:r>
               <a:rPr lang="en-US" sz="1800" dirty="0">
                 <a:solidFill>
@@ -14717,9 +14969,6 @@
           <a:bodyPr wrap="square" lIns="0" tIns="0" rIns="0" bIns="0" rtlCol="0" anchor="ctr"/>
           <a:lstStyle/>
           <a:p>
-            <a:pPr indent="0" marL="0">
-              <a:buNone/>
-            </a:pPr>
             <a:r>
               <a:rPr lang="en-US" sz="1500" b="1" spc="140" kern="0" dirty="0">
                 <a:solidFill>
@@ -14756,9 +15005,6 @@
           <a:bodyPr wrap="square" lIns="0" tIns="0" rIns="0" bIns="0" rtlCol="0" anchor="t"/>
           <a:lstStyle/>
           <a:p>
-            <a:pPr indent="0" marL="0">
-              <a:buNone/>
-            </a:pPr>
             <a:r>
               <a:rPr lang="en-US" sz="1800" dirty="0">
                 <a:solidFill>
@@ -14820,9 +15066,6 @@
           <a:bodyPr wrap="square" lIns="0" tIns="0" rIns="0" bIns="0" rtlCol="0" anchor="ctr"/>
           <a:lstStyle/>
           <a:p>
-            <a:pPr indent="0" marL="0">
-              <a:buNone/>
-            </a:pPr>
             <a:r>
               <a:rPr lang="en-US" sz="1500" b="1" spc="140" kern="0" dirty="0">
                 <a:solidFill>
@@ -14859,9 +15102,6 @@
           <a:bodyPr wrap="square" lIns="0" tIns="0" rIns="0" bIns="0" rtlCol="0" anchor="t"/>
           <a:lstStyle/>
           <a:p>
-            <a:pPr indent="0" marL="0">
-              <a:buNone/>
-            </a:pPr>
             <a:r>
               <a:rPr lang="en-US" sz="1800" dirty="0">
                 <a:solidFill>
@@ -14923,9 +15163,6 @@
           <a:bodyPr wrap="square" lIns="0" tIns="0" rIns="0" bIns="0" rtlCol="0" anchor="ctr"/>
           <a:lstStyle/>
           <a:p>
-            <a:pPr indent="0" marL="0">
-              <a:buNone/>
-            </a:pPr>
             <a:r>
               <a:rPr lang="en-US" sz="1400" spc="180" kern="0" dirty="0">
                 <a:solidFill>
@@ -14962,9 +15199,6 @@
           <a:bodyPr wrap="square" lIns="0" tIns="0" rIns="0" bIns="0" rtlCol="0" anchor="ctr"/>
           <a:lstStyle/>
           <a:p>
-            <a:pPr indent="0" marL="0">
-              <a:buNone/>
-            </a:pPr>
             <a:r>
               <a:rPr lang="en-US" sz="2200" b="1" dirty="0">
                 <a:solidFill>
@@ -15001,9 +15235,6 @@
           <a:bodyPr wrap="square" lIns="0" tIns="0" rIns="0" bIns="0" rtlCol="0" anchor="ctr"/>
           <a:lstStyle/>
           <a:p>
-            <a:pPr indent="0" marL="0">
-              <a:buNone/>
-            </a:pPr>
             <a:r>
               <a:rPr lang="en-US" sz="1600" dirty="0">
                 <a:solidFill>
@@ -15094,9 +15325,6 @@
           <a:bodyPr wrap="square" lIns="0" tIns="0" rIns="0" bIns="0" rtlCol="0" anchor="ctr"/>
           <a:lstStyle/>
           <a:p>
-            <a:pPr indent="0" marL="0">
-              <a:buNone/>
-            </a:pPr>
             <a:r>
               <a:rPr lang="en-US" sz="1200" dirty="0">
                 <a:solidFill>
@@ -15133,9 +15361,6 @@
           <a:bodyPr wrap="square" lIns="0" tIns="0" rIns="0" bIns="0" rtlCol="0" anchor="ctr"/>
           <a:lstStyle/>
           <a:p>
-            <a:pPr indent="0" marL="0">
-              <a:buNone/>
-            </a:pPr>
             <a:r>
               <a:rPr lang="en-US" sz="1500" spc="150" kern="0" dirty="0">
                 <a:solidFill>
@@ -15172,9 +15397,7 @@
           <a:bodyPr wrap="square" lIns="0" tIns="0" rIns="0" bIns="0" rtlCol="0" anchor="ctr"/>
           <a:lstStyle/>
           <a:p>
-            <a:pPr algn="r" indent="0" marL="0">
-              <a:buNone/>
-            </a:pPr>
+            <a:pPr algn="r"/>
             <a:r>
               <a:rPr lang="en-US" sz="1500" spc="150" kern="0" dirty="0">
                 <a:solidFill>
@@ -15211,9 +15434,6 @@
           <a:bodyPr wrap="square" lIns="0" tIns="0" rIns="0" bIns="0" rtlCol="0" anchor="ctr"/>
           <a:lstStyle/>
           <a:p>
-            <a:pPr indent="0" marL="0">
-              <a:buNone/>
-            </a:pPr>
             <a:r>
               <a:rPr lang="en-US" sz="1200" dirty="0">
                 <a:solidFill>
@@ -15270,9 +15490,6 @@
           <a:bodyPr wrap="square" lIns="0" tIns="0" rIns="0" bIns="0" rtlCol="0" anchor="ctr"/>
           <a:lstStyle/>
           <a:p>
-            <a:pPr indent="0" marL="0">
-              <a:buNone/>
-            </a:pPr>
             <a:r>
               <a:rPr lang="en-US" sz="1500" dirty="0">
                 <a:solidFill>
@@ -15309,9 +15526,7 @@
           <a:bodyPr wrap="square" lIns="0" tIns="0" rIns="0" bIns="0" rtlCol="0" anchor="ctr"/>
           <a:lstStyle/>
           <a:p>
-            <a:pPr algn="r" indent="0" marL="0">
-              <a:buNone/>
-            </a:pPr>
+            <a:pPr algn="r"/>
             <a:r>
               <a:rPr lang="en-US" sz="1500" spc="150" kern="0" dirty="0">
                 <a:solidFill>
@@ -15348,9 +15563,7 @@
           <a:bodyPr wrap="square" lIns="0" tIns="0" rIns="0" bIns="0" rtlCol="0" anchor="ctr"/>
           <a:lstStyle/>
           <a:p>
-            <a:pPr algn="l" indent="0" marL="0">
-              <a:buNone/>
-            </a:pPr>
+            <a:pPr algn="l"/>
             <a:r>
               <a:rPr lang="en-US" sz="1500" spc="300" kern="0" dirty="0">
                 <a:solidFill>
@@ -15387,9 +15600,7 @@
           <a:bodyPr wrap="square" lIns="0" tIns="0" rIns="0" bIns="0" rtlCol="0" anchor="t"/>
           <a:lstStyle/>
           <a:p>
-            <a:pPr algn="l" indent="0" marL="0">
-              <a:buNone/>
-            </a:pPr>
+            <a:pPr algn="l"/>
             <a:r>
               <a:rPr lang="en-US" sz="3200" b="1" spc="-75" kern="0" dirty="0">
                 <a:solidFill>
@@ -15401,9 +15612,7 @@
               </a:rPr>
               <a:t>NOT LOW CONFIDENCE. </a:t>
             </a:r>
-            <a:pPr algn="l" indent="0" marL="0">
-              <a:buNone/>
-            </a:pPr>
+            <a:pPr algn="l"/>
             <a:r>
               <a:rPr lang="en-US" sz="3200" b="1" spc="-75" kern="0" dirty="0">
                 <a:solidFill>
@@ -15415,9 +15624,7 @@
               </a:rPr>
               <a:t>UNPROVEN</a:t>
             </a:r>
-            <a:pPr algn="l" indent="0" marL="0">
-              <a:buNone/>
-            </a:pPr>
+            <a:pPr algn="l"/>
             <a:r>
               <a:rPr lang="en-US" sz="3200" b="1" spc="-75" kern="0" dirty="0">
                 <a:solidFill>
@@ -15499,9 +15706,6 @@
           <a:bodyPr wrap="square" lIns="0" tIns="0" rIns="0" bIns="0" rtlCol="0" anchor="ctr"/>
           <a:lstStyle/>
           <a:p>
-            <a:pPr indent="0" marL="0">
-              <a:buNone/>
-            </a:pPr>
             <a:r>
               <a:rPr lang="en-US" sz="1300" spc="120" kern="0" dirty="0">
                 <a:solidFill>
@@ -15538,9 +15742,7 @@
           <a:bodyPr wrap="square" lIns="0" tIns="0" rIns="0" bIns="0" rtlCol="0" anchor="ctr"/>
           <a:lstStyle/>
           <a:p>
-            <a:pPr algn="r" indent="0" marL="0">
-              <a:buNone/>
-            </a:pPr>
+            <a:pPr algn="r"/>
             <a:r>
               <a:rPr lang="en-US" sz="1300" spc="100" kern="0" dirty="0">
                 <a:solidFill>
@@ -15577,9 +15779,6 @@
           <a:bodyPr wrap="square" lIns="0" tIns="0" rIns="0" bIns="0" rtlCol="0" anchor="ctr"/>
           <a:lstStyle/>
           <a:p>
-            <a:pPr indent="0" marL="0">
-              <a:buNone/>
-            </a:pPr>
             <a:r>
               <a:rPr lang="en-US" sz="2200" i="1" dirty="0">
                 <a:solidFill>
@@ -15616,9 +15815,6 @@
           <a:bodyPr wrap="square" lIns="0" tIns="0" rIns="0" bIns="0" rtlCol="0" anchor="ctr"/>
           <a:lstStyle/>
           <a:p>
-            <a:pPr indent="0" marL="0">
-              <a:buNone/>
-            </a:pPr>
             <a:r>
               <a:rPr lang="en-US" sz="1500" dirty="0">
                 <a:solidFill>
@@ -15655,9 +15851,6 @@
           <a:bodyPr wrap="square" lIns="0" tIns="0" rIns="0" bIns="0" rtlCol="0" anchor="ctr"/>
           <a:lstStyle/>
           <a:p>
-            <a:pPr indent="0" marL="0">
-              <a:buNone/>
-            </a:pPr>
             <a:r>
               <a:rPr lang="en-US" sz="1600" dirty="0">
                 <a:solidFill>
@@ -15694,9 +15887,6 @@
           <a:bodyPr wrap="square" lIns="0" tIns="0" rIns="0" bIns="0" rtlCol="0" anchor="ctr"/>
           <a:lstStyle/>
           <a:p>
-            <a:pPr indent="0" marL="0">
-              <a:buNone/>
-            </a:pPr>
             <a:r>
               <a:rPr lang="en-US" sz="1600" b="1" dirty="0">
                 <a:solidFill>
@@ -15778,9 +15968,6 @@
           <a:bodyPr wrap="square" lIns="0" tIns="0" rIns="0" bIns="0" rtlCol="0" anchor="ctr"/>
           <a:lstStyle/>
           <a:p>
-            <a:pPr indent="0" marL="0">
-              <a:buNone/>
-            </a:pPr>
             <a:r>
               <a:rPr lang="en-US" sz="1300" spc="120" kern="0" dirty="0">
                 <a:solidFill>
@@ -15817,9 +16004,7 @@
           <a:bodyPr wrap="square" lIns="0" tIns="0" rIns="0" bIns="0" rtlCol="0" anchor="ctr"/>
           <a:lstStyle/>
           <a:p>
-            <a:pPr algn="r" indent="0" marL="0">
-              <a:buNone/>
-            </a:pPr>
+            <a:pPr algn="r"/>
             <a:r>
               <a:rPr lang="en-US" sz="1300" spc="100" kern="0" dirty="0">
                 <a:solidFill>
@@ -15856,9 +16041,6 @@
           <a:bodyPr wrap="square" lIns="0" tIns="0" rIns="0" bIns="0" rtlCol="0" anchor="ctr"/>
           <a:lstStyle/>
           <a:p>
-            <a:pPr indent="0" marL="0">
-              <a:buNone/>
-            </a:pPr>
             <a:r>
               <a:rPr lang="en-US" sz="1300" dirty="0">
                 <a:solidFill>
@@ -15895,9 +16077,6 @@
           <a:bodyPr wrap="square" lIns="0" tIns="0" rIns="0" bIns="0" rtlCol="0" anchor="ctr"/>
           <a:lstStyle/>
           <a:p>
-            <a:pPr indent="0" marL="0">
-              <a:buNone/>
-            </a:pPr>
             <a:r>
               <a:rPr lang="en-US" sz="1400" dirty="0">
                 <a:solidFill>
@@ -15934,9 +16113,6 @@
           <a:bodyPr wrap="square" lIns="0" tIns="0" rIns="0" bIns="0" rtlCol="0" anchor="ctr"/>
           <a:lstStyle/>
           <a:p>
-            <a:pPr indent="0" marL="0">
-              <a:buNone/>
-            </a:pPr>
             <a:r>
               <a:rPr lang="en-US" sz="1300" dirty="0">
                 <a:solidFill>
@@ -15973,9 +16149,6 @@
           <a:bodyPr wrap="square" lIns="0" tIns="0" rIns="0" bIns="0" rtlCol="0" anchor="ctr"/>
           <a:lstStyle/>
           <a:p>
-            <a:pPr indent="0" marL="0">
-              <a:buNone/>
-            </a:pPr>
             <a:r>
               <a:rPr lang="en-US" sz="1300" dirty="0">
                 <a:solidFill>
@@ -16012,9 +16185,6 @@
           <a:bodyPr wrap="square" lIns="0" tIns="0" rIns="0" bIns="0" rtlCol="0" anchor="ctr"/>
           <a:lstStyle/>
           <a:p>
-            <a:pPr indent="0" marL="0">
-              <a:buNone/>
-            </a:pPr>
             <a:r>
               <a:rPr lang="en-US" sz="1400" dirty="0">
                 <a:solidFill>
@@ -16051,9 +16221,6 @@
           <a:bodyPr wrap="square" lIns="0" tIns="0" rIns="0" bIns="0" rtlCol="0" anchor="ctr"/>
           <a:lstStyle/>
           <a:p>
-            <a:pPr indent="0" marL="0">
-              <a:buNone/>
-            </a:pPr>
             <a:r>
               <a:rPr lang="en-US" sz="1300" dirty="0">
                 <a:solidFill>
@@ -16090,9 +16257,6 @@
           <a:bodyPr wrap="square" lIns="0" tIns="0" rIns="0" bIns="0" rtlCol="0" anchor="ctr"/>
           <a:lstStyle/>
           <a:p>
-            <a:pPr indent="0" marL="0">
-              <a:buNone/>
-            </a:pPr>
             <a:r>
               <a:rPr lang="en-US" sz="1300" dirty="0">
                 <a:solidFill>
@@ -16129,9 +16293,6 @@
           <a:bodyPr wrap="square" lIns="0" tIns="0" rIns="0" bIns="0" rtlCol="0" anchor="ctr"/>
           <a:lstStyle/>
           <a:p>
-            <a:pPr indent="0" marL="0">
-              <a:buNone/>
-            </a:pPr>
             <a:r>
               <a:rPr lang="en-US" sz="1400" dirty="0">
                 <a:solidFill>
@@ -16168,9 +16329,6 @@
           <a:bodyPr wrap="square" lIns="0" tIns="0" rIns="0" bIns="0" rtlCol="0" anchor="ctr"/>
           <a:lstStyle/>
           <a:p>
-            <a:pPr indent="0" marL="0">
-              <a:buNone/>
-            </a:pPr>
             <a:r>
               <a:rPr lang="en-US" sz="1300" dirty="0">
                 <a:solidFill>
@@ -16207,9 +16365,6 @@
           <a:bodyPr wrap="square" lIns="0" tIns="0" rIns="0" bIns="0" rtlCol="0" anchor="ctr"/>
           <a:lstStyle/>
           <a:p>
-            <a:pPr indent="0" marL="0">
-              <a:buNone/>
-            </a:pPr>
             <a:r>
               <a:rPr lang="en-US" sz="1300" dirty="0">
                 <a:solidFill>
@@ -16246,9 +16401,6 @@
           <a:bodyPr wrap="square" lIns="0" tIns="0" rIns="0" bIns="0" rtlCol="0" anchor="ctr"/>
           <a:lstStyle/>
           <a:p>
-            <a:pPr indent="0" marL="0">
-              <a:buNone/>
-            </a:pPr>
             <a:r>
               <a:rPr lang="en-US" sz="1400" dirty="0">
                 <a:solidFill>
@@ -16285,9 +16437,6 @@
           <a:bodyPr wrap="square" lIns="0" tIns="0" rIns="0" bIns="0" rtlCol="0" anchor="ctr"/>
           <a:lstStyle/>
           <a:p>
-            <a:pPr indent="0" marL="0">
-              <a:buNone/>
-            </a:pPr>
             <a:r>
               <a:rPr lang="en-US" sz="1300" dirty="0">
                 <a:solidFill>
@@ -16324,9 +16473,6 @@
           <a:bodyPr wrap="square" lIns="0" tIns="0" rIns="0" bIns="0" rtlCol="0" anchor="ctr"/>
           <a:lstStyle/>
           <a:p>
-            <a:pPr indent="0" marL="0">
-              <a:buNone/>
-            </a:pPr>
             <a:r>
               <a:rPr lang="en-US" sz="1300" dirty="0">
                 <a:solidFill>
@@ -16363,9 +16509,6 @@
           <a:bodyPr wrap="square" lIns="0" tIns="0" rIns="0" bIns="0" rtlCol="0" anchor="ctr"/>
           <a:lstStyle/>
           <a:p>
-            <a:pPr indent="0" marL="0">
-              <a:buNone/>
-            </a:pPr>
             <a:r>
               <a:rPr lang="en-US" sz="1400" dirty="0">
                 <a:solidFill>
@@ -16402,9 +16545,6 @@
           <a:bodyPr wrap="square" lIns="0" tIns="0" rIns="0" bIns="0" rtlCol="0" anchor="ctr"/>
           <a:lstStyle/>
           <a:p>
-            <a:pPr indent="0" marL="0">
-              <a:buNone/>
-            </a:pPr>
             <a:r>
               <a:rPr lang="en-US" sz="1300" dirty="0">
                 <a:solidFill>
@@ -16453,9 +16593,7 @@
                     <a:bodyPr/>
                     <a:lstStyle/>
                     <a:p>
-                      <a:pPr algn="l" indent="0" marL="0">
-                        <a:buNone/>
-                      </a:pPr>
+                      <a:pPr algn="l"/>
                       <a:r>
                         <a:rPr lang="en-US" sz="1300" b="1" dirty="0">
                           <a:solidFill>
@@ -16521,9 +16659,7 @@
                     <a:bodyPr/>
                     <a:lstStyle/>
                     <a:p>
-                      <a:pPr algn="l" indent="0" marL="0">
-                        <a:buNone/>
-                      </a:pPr>
+                      <a:pPr algn="l"/>
                       <a:r>
                         <a:rPr lang="en-US" sz="1300" b="1" dirty="0">
                           <a:solidFill>
@@ -16589,9 +16725,7 @@
                     <a:bodyPr/>
                     <a:lstStyle/>
                     <a:p>
-                      <a:pPr algn="l" indent="0" marL="0">
-                        <a:buNone/>
-                      </a:pPr>
+                      <a:pPr algn="l"/>
                       <a:r>
                         <a:rPr lang="en-US" sz="1300" b="1" dirty="0">
                           <a:solidFill>
@@ -16659,9 +16793,6 @@
                     <a:bodyPr/>
                     <a:lstStyle/>
                     <a:p>
-                      <a:pPr indent="0" marL="0">
-                        <a:buNone/>
-                      </a:pPr>
                       <a:r>
                         <a:rPr lang="en-US" sz="1400" dirty="0">
                           <a:solidFill>
@@ -16727,9 +16858,6 @@
                     <a:bodyPr/>
                     <a:lstStyle/>
                     <a:p>
-                      <a:pPr indent="0" marL="0">
-                        <a:buNone/>
-                      </a:pPr>
                       <a:r>
                         <a:rPr lang="en-US" sz="1400" b="1" dirty="0">
                           <a:solidFill>
@@ -16795,9 +16923,6 @@
                     <a:bodyPr/>
                     <a:lstStyle/>
                     <a:p>
-                      <a:pPr indent="0" marL="0">
-                        <a:buNone/>
-                      </a:pPr>
                       <a:r>
                         <a:rPr lang="en-US" sz="1300" dirty="0">
                           <a:solidFill>
@@ -16865,9 +16990,6 @@
                     <a:bodyPr/>
                     <a:lstStyle/>
                     <a:p>
-                      <a:pPr indent="0" marL="0">
-                        <a:buNone/>
-                      </a:pPr>
                       <a:r>
                         <a:rPr lang="en-US" sz="1500" b="1" dirty="0">
                           <a:solidFill>
@@ -16933,9 +17055,6 @@
                     <a:bodyPr/>
                     <a:lstStyle/>
                     <a:p>
-                      <a:pPr indent="0" marL="0">
-                        <a:buNone/>
-                      </a:pPr>
                       <a:r>
                         <a:rPr lang="en-US" sz="1500" b="1" dirty="0">
                           <a:solidFill>
@@ -17001,9 +17120,6 @@
                     <a:bodyPr/>
                     <a:lstStyle/>
                     <a:p>
-                      <a:pPr indent="0" marL="0">
-                        <a:buNone/>
-                      </a:pPr>
                       <a:r>
                         <a:rPr lang="en-US" sz="1500" b="1" dirty="0">
                           <a:solidFill>
@@ -17090,9 +17206,6 @@
           <a:bodyPr wrap="square" lIns="0" tIns="0" rIns="0" bIns="0" rtlCol="0" anchor="ctr"/>
           <a:lstStyle/>
           <a:p>
-            <a:pPr indent="0" marL="0">
-              <a:buNone/>
-            </a:pPr>
             <a:r>
               <a:rPr lang="en-US" sz="1600" dirty="0">
                 <a:solidFill>
@@ -17129,9 +17242,6 @@
           <a:bodyPr wrap="square" lIns="0" tIns="0" rIns="0" bIns="0" rtlCol="0" anchor="ctr"/>
           <a:lstStyle/>
           <a:p>
-            <a:pPr indent="0" marL="0">
-              <a:buNone/>
-            </a:pPr>
             <a:r>
               <a:rPr lang="en-US" sz="1600" dirty="0">
                 <a:solidFill>
@@ -17222,9 +17332,6 @@
           <a:bodyPr wrap="square" lIns="0" tIns="0" rIns="0" bIns="0" rtlCol="0" anchor="ctr"/>
           <a:lstStyle/>
           <a:p>
-            <a:pPr indent="0" marL="0">
-              <a:buNone/>
-            </a:pPr>
             <a:r>
               <a:rPr lang="en-US" sz="1200" dirty="0">
                 <a:solidFill>
@@ -17261,9 +17368,6 @@
           <a:bodyPr wrap="square" lIns="0" tIns="0" rIns="0" bIns="0" rtlCol="0" anchor="ctr"/>
           <a:lstStyle/>
           <a:p>
-            <a:pPr indent="0" marL="0">
-              <a:buNone/>
-            </a:pPr>
             <a:r>
               <a:rPr lang="en-US" sz="1500" spc="150" kern="0" dirty="0">
                 <a:solidFill>
@@ -17300,9 +17404,7 @@
           <a:bodyPr wrap="square" lIns="0" tIns="0" rIns="0" bIns="0" rtlCol="0" anchor="ctr"/>
           <a:lstStyle/>
           <a:p>
-            <a:pPr algn="r" indent="0" marL="0">
-              <a:buNone/>
-            </a:pPr>
+            <a:pPr algn="r"/>
             <a:r>
               <a:rPr lang="en-US" sz="1500" spc="150" kern="0" dirty="0">
                 <a:solidFill>
@@ -17339,9 +17441,6 @@
           <a:bodyPr wrap="square" lIns="0" tIns="0" rIns="0" bIns="0" rtlCol="0" anchor="ctr"/>
           <a:lstStyle/>
           <a:p>
-            <a:pPr indent="0" marL="0">
-              <a:buNone/>
-            </a:pPr>
             <a:r>
               <a:rPr lang="en-US" sz="1200" dirty="0">
                 <a:solidFill>
@@ -17398,9 +17497,6 @@
           <a:bodyPr wrap="square" lIns="0" tIns="0" rIns="0" bIns="0" rtlCol="0" anchor="ctr"/>
           <a:lstStyle/>
           <a:p>
-            <a:pPr indent="0" marL="0">
-              <a:buNone/>
-            </a:pPr>
             <a:r>
               <a:rPr lang="en-US" sz="1500" dirty="0">
                 <a:solidFill>
@@ -17437,9 +17533,7 @@
           <a:bodyPr wrap="square" lIns="0" tIns="0" rIns="0" bIns="0" rtlCol="0" anchor="ctr"/>
           <a:lstStyle/>
           <a:p>
-            <a:pPr algn="r" indent="0" marL="0">
-              <a:buNone/>
-            </a:pPr>
+            <a:pPr algn="r"/>
             <a:r>
               <a:rPr lang="en-US" sz="1500" spc="150" kern="0" dirty="0">
                 <a:solidFill>
@@ -17476,9 +17570,7 @@
           <a:bodyPr wrap="square" lIns="0" tIns="0" rIns="0" bIns="0" rtlCol="0" anchor="ctr"/>
           <a:lstStyle/>
           <a:p>
-            <a:pPr algn="l" indent="0" marL="0">
-              <a:buNone/>
-            </a:pPr>
+            <a:pPr algn="l"/>
             <a:r>
               <a:rPr lang="en-US" sz="1500" spc="300" kern="0" dirty="0">
                 <a:solidFill>
@@ -17515,9 +17607,7 @@
           <a:bodyPr wrap="square" lIns="0" tIns="0" rIns="0" bIns="0" rtlCol="0" anchor="t"/>
           <a:lstStyle/>
           <a:p>
-            <a:pPr algn="l" indent="0" marL="0">
-              <a:buNone/>
-            </a:pPr>
+            <a:pPr algn="l"/>
             <a:r>
               <a:rPr lang="en-US" sz="3200" b="1" spc="-75" kern="0" dirty="0">
                 <a:solidFill>
@@ -17529,9 +17619,7 @@
               </a:rPr>
               <a:t>RETRIEVAL IS NOT </a:t>
             </a:r>
-            <a:pPr algn="l" indent="0" marL="0">
-              <a:buNone/>
-            </a:pPr>
+            <a:pPr algn="l"/>
             <a:r>
               <a:rPr lang="en-US" sz="3200" b="1" spc="-75" kern="0" dirty="0">
                 <a:solidFill>
@@ -17543,9 +17631,7 @@
               </a:rPr>
               <a:t>PERMISSION</a:t>
             </a:r>
-            <a:pPr algn="l" indent="0" marL="0">
-              <a:buNone/>
-            </a:pPr>
+            <a:pPr algn="l"/>
             <a:r>
               <a:rPr lang="en-US" sz="3200" b="1" spc="-75" kern="0" dirty="0">
                 <a:solidFill>
@@ -17627,9 +17713,6 @@
           <a:bodyPr wrap="square" lIns="0" tIns="0" rIns="0" bIns="0" rtlCol="0" anchor="ctr"/>
           <a:lstStyle/>
           <a:p>
-            <a:pPr indent="0" marL="0">
-              <a:buNone/>
-            </a:pPr>
             <a:r>
               <a:rPr lang="en-US" sz="1300" spc="120" kern="0" dirty="0">
                 <a:solidFill>
@@ -17666,9 +17749,7 @@
           <a:bodyPr wrap="square" lIns="0" tIns="0" rIns="0" bIns="0" rtlCol="0" anchor="ctr"/>
           <a:lstStyle/>
           <a:p>
-            <a:pPr algn="r" indent="0" marL="0">
-              <a:buNone/>
-            </a:pPr>
+            <a:pPr algn="r"/>
             <a:r>
               <a:rPr lang="en-US" sz="1300" spc="100" kern="0" dirty="0">
                 <a:solidFill>
@@ -17705,9 +17786,6 @@
           <a:bodyPr wrap="square" lIns="0" tIns="0" rIns="0" bIns="0" rtlCol="0" anchor="ctr"/>
           <a:lstStyle/>
           <a:p>
-            <a:pPr indent="0" marL="0">
-              <a:buNone/>
-            </a:pPr>
             <a:r>
               <a:rPr lang="en-US" sz="1800" dirty="0">
                 <a:solidFill>
@@ -17744,9 +17822,6 @@
           <a:bodyPr wrap="square" lIns="0" tIns="0" rIns="0" bIns="0" rtlCol="0" anchor="ctr"/>
           <a:lstStyle/>
           <a:p>
-            <a:pPr indent="0" marL="0">
-              <a:buNone/>
-            </a:pPr>
             <a:r>
               <a:rPr lang="en-US" sz="1600" dirty="0">
                 <a:solidFill>
@@ -17783,9 +17858,6 @@
           <a:bodyPr wrap="square" lIns="0" tIns="0" rIns="0" bIns="0" rtlCol="0" anchor="ctr"/>
           <a:lstStyle/>
           <a:p>
-            <a:pPr indent="0" marL="0">
-              <a:buNone/>
-            </a:pPr>
             <a:r>
               <a:rPr lang="en-US" sz="1300" b="1" spc="100" kern="0" dirty="0">
                 <a:solidFill>
@@ -17822,9 +17894,6 @@
           <a:bodyPr wrap="square" lIns="0" tIns="0" rIns="0" bIns="0" rtlCol="0" anchor="ctr"/>
           <a:lstStyle/>
           <a:p>
-            <a:pPr indent="0" marL="0">
-              <a:buNone/>
-            </a:pPr>
             <a:r>
               <a:rPr lang="en-US" sz="1400" dirty="0">
                 <a:solidFill>
@@ -17861,9 +17930,6 @@
           <a:bodyPr wrap="square" lIns="0" tIns="0" rIns="0" bIns="0" rtlCol="0" anchor="ctr"/>
           <a:lstStyle/>
           <a:p>
-            <a:pPr indent="0" marL="0">
-              <a:buNone/>
-            </a:pPr>
             <a:r>
               <a:rPr lang="en-US" sz="1300" b="1" spc="100" kern="0" dirty="0">
                 <a:solidFill>
@@ -17900,9 +17966,6 @@
           <a:bodyPr wrap="square" lIns="0" tIns="0" rIns="0" bIns="0" rtlCol="0" anchor="ctr"/>
           <a:lstStyle/>
           <a:p>
-            <a:pPr indent="0" marL="0">
-              <a:buNone/>
-            </a:pPr>
             <a:r>
               <a:rPr lang="en-US" sz="1400" dirty="0">
                 <a:solidFill>
@@ -17939,9 +18002,6 @@
           <a:bodyPr wrap="square" lIns="0" tIns="0" rIns="0" bIns="0" rtlCol="0" anchor="ctr"/>
           <a:lstStyle/>
           <a:p>
-            <a:pPr indent="0" marL="0">
-              <a:buNone/>
-            </a:pPr>
             <a:r>
               <a:rPr lang="en-US" sz="1300" b="1" spc="100" kern="0" dirty="0">
                 <a:solidFill>
@@ -17978,9 +18038,6 @@
           <a:bodyPr wrap="square" lIns="0" tIns="0" rIns="0" bIns="0" rtlCol="0" anchor="ctr"/>
           <a:lstStyle/>
           <a:p>
-            <a:pPr indent="0" marL="0">
-              <a:buNone/>
-            </a:pPr>
             <a:r>
               <a:rPr lang="en-US" sz="1400" dirty="0">
                 <a:solidFill>
@@ -18017,9 +18074,6 @@
           <a:bodyPr wrap="square" lIns="0" tIns="0" rIns="0" bIns="0" rtlCol="0" anchor="ctr"/>
           <a:lstStyle/>
           <a:p>
-            <a:pPr indent="0" marL="0">
-              <a:buNone/>
-            </a:pPr>
             <a:r>
               <a:rPr lang="en-US" sz="1300" b="1" spc="100" kern="0" dirty="0">
                 <a:solidFill>
@@ -18056,9 +18110,6 @@
           <a:bodyPr wrap="square" lIns="0" tIns="0" rIns="0" bIns="0" rtlCol="0" anchor="ctr"/>
           <a:lstStyle/>
           <a:p>
-            <a:pPr indent="0" marL="0">
-              <a:buNone/>
-            </a:pPr>
             <a:r>
               <a:rPr lang="en-US" sz="1400" dirty="0">
                 <a:solidFill>
@@ -18140,9 +18191,6 @@
           <a:bodyPr wrap="square" lIns="0" tIns="0" rIns="0" bIns="0" rtlCol="0" anchor="ctr"/>
           <a:lstStyle/>
           <a:p>
-            <a:pPr indent="0" marL="0">
-              <a:buNone/>
-            </a:pPr>
             <a:r>
               <a:rPr lang="en-US" sz="1300" spc="200" kern="0" dirty="0">
                 <a:solidFill>
@@ -18179,9 +18227,6 @@
           <a:bodyPr wrap="square" lIns="0" tIns="0" rIns="0" bIns="0" rtlCol="0" anchor="ctr"/>
           <a:lstStyle/>
           <a:p>
-            <a:pPr indent="0" marL="0">
-              <a:buNone/>
-            </a:pPr>
             <a:r>
               <a:rPr lang="en-US" sz="3600" b="1" dirty="0">
                 <a:solidFill>
@@ -18218,9 +18263,6 @@
           <a:bodyPr wrap="square" lIns="0" tIns="0" rIns="0" bIns="0" rtlCol="0" anchor="ctr"/>
           <a:lstStyle/>
           <a:p>
-            <a:pPr indent="0" marL="0">
-              <a:buNone/>
-            </a:pPr>
             <a:r>
               <a:rPr lang="en-US" sz="1600" dirty="0">
                 <a:solidFill>
@@ -18257,9 +18299,6 @@
           <a:bodyPr wrap="square" lIns="0" tIns="0" rIns="0" bIns="0" rtlCol="0" anchor="ctr"/>
           <a:lstStyle/>
           <a:p>
-            <a:pPr indent="0" marL="0">
-              <a:buNone/>
-            </a:pPr>
             <a:r>
               <a:rPr lang="en-US" sz="1300" spc="200" kern="0" dirty="0">
                 <a:solidFill>
@@ -18296,9 +18335,6 @@
           <a:bodyPr wrap="square" lIns="0" tIns="0" rIns="0" bIns="0" rtlCol="0" anchor="ctr"/>
           <a:lstStyle/>
           <a:p>
-            <a:pPr indent="0" marL="0">
-              <a:buNone/>
-            </a:pPr>
             <a:r>
               <a:rPr lang="en-US" sz="3200" b="1" dirty="0">
                 <a:solidFill>
@@ -18335,9 +18371,6 @@
           <a:bodyPr wrap="square" lIns="0" tIns="0" rIns="0" bIns="0" rtlCol="0" anchor="t"/>
           <a:lstStyle/>
           <a:p>
-            <a:pPr indent="0" marL="0">
-              <a:buNone/>
-            </a:pPr>
             <a:r>
               <a:rPr lang="en-US" sz="1600" dirty="0">
                 <a:solidFill>
@@ -18399,9 +18432,6 @@
           <a:bodyPr wrap="square" lIns="0" tIns="0" rIns="0" bIns="0" rtlCol="0" anchor="ctr"/>
           <a:lstStyle/>
           <a:p>
-            <a:pPr indent="0" marL="0">
-              <a:buNone/>
-            </a:pPr>
             <a:r>
               <a:rPr lang="en-US" sz="1800" b="1" dirty="0">
                 <a:solidFill>
@@ -18438,9 +18468,6 @@
           <a:bodyPr wrap="square" lIns="0" tIns="0" rIns="0" bIns="0" rtlCol="0" anchor="ctr"/>
           <a:lstStyle/>
           <a:p>
-            <a:pPr indent="0" marL="0">
-              <a:buNone/>
-            </a:pPr>
             <a:r>
               <a:rPr lang="en-US" sz="1600" dirty="0">
                 <a:solidFill>
@@ -18477,9 +18504,6 @@
           <a:bodyPr wrap="square" lIns="0" tIns="0" rIns="0" bIns="0" rtlCol="0" anchor="t"/>
           <a:lstStyle/>
           <a:p>
-            <a:pPr indent="0" marL="0">
-              <a:buNone/>
-            </a:pPr>
             <a:r>
               <a:rPr lang="en-US" sz="1600" dirty="0">
                 <a:solidFill>
@@ -18570,9 +18594,6 @@
           <a:bodyPr wrap="square" lIns="0" tIns="0" rIns="0" bIns="0" rtlCol="0" anchor="ctr"/>
           <a:lstStyle/>
           <a:p>
-            <a:pPr indent="0" marL="0">
-              <a:buNone/>
-            </a:pPr>
             <a:r>
               <a:rPr lang="en-US" sz="1200" dirty="0">
                 <a:solidFill>
@@ -18609,9 +18630,6 @@
           <a:bodyPr wrap="square" lIns="0" tIns="0" rIns="0" bIns="0" rtlCol="0" anchor="ctr"/>
           <a:lstStyle/>
           <a:p>
-            <a:pPr indent="0" marL="0">
-              <a:buNone/>
-            </a:pPr>
             <a:r>
               <a:rPr lang="en-US" sz="1500" spc="150" kern="0" dirty="0">
                 <a:solidFill>
@@ -18648,9 +18666,7 @@
           <a:bodyPr wrap="square" lIns="0" tIns="0" rIns="0" bIns="0" rtlCol="0" anchor="ctr"/>
           <a:lstStyle/>
           <a:p>
-            <a:pPr algn="r" indent="0" marL="0">
-              <a:buNone/>
-            </a:pPr>
+            <a:pPr algn="r"/>
             <a:r>
               <a:rPr lang="en-US" sz="1500" spc="150" kern="0" dirty="0">
                 <a:solidFill>
@@ -18687,9 +18703,6 @@
           <a:bodyPr wrap="square" lIns="0" tIns="0" rIns="0" bIns="0" rtlCol="0" anchor="ctr"/>
           <a:lstStyle/>
           <a:p>
-            <a:pPr indent="0" marL="0">
-              <a:buNone/>
-            </a:pPr>
             <a:r>
               <a:rPr lang="en-US" sz="1200" dirty="0">
                 <a:solidFill>
@@ -18746,9 +18759,6 @@
           <a:bodyPr wrap="square" lIns="0" tIns="0" rIns="0" bIns="0" rtlCol="0" anchor="ctr"/>
           <a:lstStyle/>
           <a:p>
-            <a:pPr indent="0" marL="0">
-              <a:buNone/>
-            </a:pPr>
             <a:r>
               <a:rPr lang="en-US" sz="1500" dirty="0">
                 <a:solidFill>
@@ -18785,9 +18795,7 @@
           <a:bodyPr wrap="square" lIns="0" tIns="0" rIns="0" bIns="0" rtlCol="0" anchor="ctr"/>
           <a:lstStyle/>
           <a:p>
-            <a:pPr algn="r" indent="0" marL="0">
-              <a:buNone/>
-            </a:pPr>
+            <a:pPr algn="r"/>
             <a:r>
               <a:rPr lang="en-US" sz="1500" spc="150" kern="0" dirty="0">
                 <a:solidFill>
@@ -18824,9 +18832,7 @@
           <a:bodyPr wrap="square" lIns="0" tIns="0" rIns="0" bIns="0" rtlCol="0" anchor="ctr"/>
           <a:lstStyle/>
           <a:p>
-            <a:pPr algn="l" indent="0" marL="0">
-              <a:buNone/>
-            </a:pPr>
+            <a:pPr algn="l"/>
             <a:r>
               <a:rPr lang="en-US" sz="1500" spc="300" kern="0" dirty="0">
                 <a:solidFill>
@@ -18863,9 +18869,7 @@
           <a:bodyPr wrap="square" lIns="0" tIns="0" rIns="0" bIns="0" rtlCol="0" anchor="t"/>
           <a:lstStyle/>
           <a:p>
-            <a:pPr algn="l" indent="0" marL="0">
-              <a:buNone/>
-            </a:pPr>
+            <a:pPr algn="l"/>
             <a:r>
               <a:rPr lang="en-US" sz="3200" b="1" spc="-75" kern="0" dirty="0">
                 <a:solidFill>
@@ -18877,9 +18881,7 @@
               </a:rPr>
               <a:t>PROOF SCALES WITH </a:t>
             </a:r>
-            <a:pPr algn="l" indent="0" marL="0">
-              <a:buNone/>
-            </a:pPr>
+            <a:pPr algn="l"/>
             <a:r>
               <a:rPr lang="en-US" sz="3200" b="1" spc="-75" kern="0" dirty="0">
                 <a:solidFill>
@@ -18891,9 +18893,7 @@
               </a:rPr>
               <a:t>CONSEQUENCE</a:t>
             </a:r>
-            <a:pPr algn="l" indent="0" marL="0">
-              <a:buNone/>
-            </a:pPr>
+            <a:pPr algn="l"/>
             <a:r>
               <a:rPr lang="en-US" sz="3200" b="1" spc="-75" kern="0" dirty="0">
                 <a:solidFill>
@@ -18975,9 +18975,6 @@
           <a:bodyPr wrap="square" lIns="0" tIns="0" rIns="0" bIns="0" rtlCol="0" anchor="ctr"/>
           <a:lstStyle/>
           <a:p>
-            <a:pPr indent="0" marL="0">
-              <a:buNone/>
-            </a:pPr>
             <a:r>
               <a:rPr lang="en-US" sz="1300" spc="120" kern="0" dirty="0">
                 <a:solidFill>
@@ -19014,9 +19011,7 @@
           <a:bodyPr wrap="square" lIns="0" tIns="0" rIns="0" bIns="0" rtlCol="0" anchor="ctr"/>
           <a:lstStyle/>
           <a:p>
-            <a:pPr algn="r" indent="0" marL="0">
-              <a:buNone/>
-            </a:pPr>
+            <a:pPr algn="r"/>
             <a:r>
               <a:rPr lang="en-US" sz="1300" spc="100" kern="0" dirty="0">
                 <a:solidFill>
@@ -19053,9 +19048,6 @@
           <a:bodyPr wrap="square" lIns="0" tIns="0" rIns="0" bIns="0" rtlCol="0" anchor="ctr"/>
           <a:lstStyle/>
           <a:p>
-            <a:pPr indent="0" marL="0">
-              <a:buNone/>
-            </a:pPr>
             <a:r>
               <a:rPr lang="en-US" sz="1800" dirty="0">
                 <a:solidFill>
@@ -19092,9 +19084,6 @@
           <a:bodyPr wrap="square" lIns="0" tIns="0" rIns="0" bIns="0" rtlCol="0" anchor="ctr"/>
           <a:lstStyle/>
           <a:p>
-            <a:pPr indent="0" marL="0">
-              <a:buNone/>
-            </a:pPr>
             <a:r>
               <a:rPr lang="en-US" sz="1300" b="1" spc="100" kern="0" dirty="0">
                 <a:solidFill>
@@ -19131,9 +19120,6 @@
           <a:bodyPr wrap="square" lIns="0" tIns="0" rIns="0" bIns="0" rtlCol="0" anchor="ctr"/>
           <a:lstStyle/>
           <a:p>
-            <a:pPr indent="0" marL="0">
-              <a:buNone/>
-            </a:pPr>
             <a:r>
               <a:rPr lang="en-US" sz="1500" dirty="0">
                 <a:solidFill>
@@ -19170,9 +19156,6 @@
           <a:bodyPr wrap="square" lIns="0" tIns="0" rIns="0" bIns="0" rtlCol="0" anchor="ctr"/>
           <a:lstStyle/>
           <a:p>
-            <a:pPr indent="0" marL="0">
-              <a:buNone/>
-            </a:pPr>
             <a:r>
               <a:rPr lang="en-US" sz="1300" b="1" spc="100" kern="0" dirty="0">
                 <a:solidFill>
@@ -19209,9 +19192,6 @@
           <a:bodyPr wrap="square" lIns="0" tIns="0" rIns="0" bIns="0" rtlCol="0" anchor="ctr"/>
           <a:lstStyle/>
           <a:p>
-            <a:pPr indent="0" marL="0">
-              <a:buNone/>
-            </a:pPr>
             <a:r>
               <a:rPr lang="en-US" sz="1500" dirty="0">
                 <a:solidFill>
@@ -19248,9 +19228,6 @@
           <a:bodyPr wrap="square" lIns="0" tIns="0" rIns="0" bIns="0" rtlCol="0" anchor="ctr"/>
           <a:lstStyle/>
           <a:p>
-            <a:pPr indent="0" marL="0">
-              <a:buNone/>
-            </a:pPr>
             <a:r>
               <a:rPr lang="en-US" sz="1300" b="1" spc="100" kern="0" dirty="0">
                 <a:solidFill>
@@ -19287,9 +19264,6 @@
           <a:bodyPr wrap="square" lIns="0" tIns="0" rIns="0" bIns="0" rtlCol="0" anchor="ctr"/>
           <a:lstStyle/>
           <a:p>
-            <a:pPr indent="0" marL="0">
-              <a:buNone/>
-            </a:pPr>
             <a:r>
               <a:rPr lang="en-US" sz="1500" dirty="0">
                 <a:solidFill>
@@ -19326,9 +19300,6 @@
           <a:bodyPr wrap="square" lIns="0" tIns="0" rIns="0" bIns="0" rtlCol="0" anchor="ctr"/>
           <a:lstStyle/>
           <a:p>
-            <a:pPr indent="0" marL="0">
-              <a:buNone/>
-            </a:pPr>
             <a:r>
               <a:rPr lang="en-US" sz="1300" b="1" spc="100" kern="0" dirty="0">
                 <a:solidFill>
@@ -19365,9 +19336,6 @@
           <a:bodyPr wrap="square" lIns="0" tIns="0" rIns="0" bIns="0" rtlCol="0" anchor="ctr"/>
           <a:lstStyle/>
           <a:p>
-            <a:pPr indent="0" marL="0">
-              <a:buNone/>
-            </a:pPr>
             <a:r>
               <a:rPr lang="en-US" sz="1500" dirty="0">
                 <a:solidFill>
@@ -19404,9 +19372,6 @@
           <a:bodyPr wrap="square" lIns="0" tIns="0" rIns="0" bIns="0" rtlCol="0" anchor="ctr"/>
           <a:lstStyle/>
           <a:p>
-            <a:pPr indent="0" marL="0">
-              <a:buNone/>
-            </a:pPr>
             <a:r>
               <a:rPr lang="en-US" sz="1300" b="1" spc="100" kern="0" dirty="0">
                 <a:solidFill>
@@ -19443,9 +19408,6 @@
           <a:bodyPr wrap="square" lIns="0" tIns="0" rIns="0" bIns="0" rtlCol="0" anchor="ctr"/>
           <a:lstStyle/>
           <a:p>
-            <a:pPr indent="0" marL="0">
-              <a:buNone/>
-            </a:pPr>
             <a:r>
               <a:rPr lang="en-US" sz="1500" dirty="0">
                 <a:solidFill>
@@ -19527,9 +19489,6 @@
           <a:bodyPr wrap="square" lIns="0" tIns="0" rIns="0" bIns="0" rtlCol="0" anchor="ctr"/>
           <a:lstStyle/>
           <a:p>
-            <a:pPr indent="0" marL="0">
-              <a:buNone/>
-            </a:pPr>
             <a:r>
               <a:rPr lang="en-US" sz="1300" spc="200" kern="0" dirty="0">
                 <a:solidFill>
@@ -19566,9 +19525,6 @@
           <a:bodyPr wrap="square" lIns="0" tIns="0" rIns="0" bIns="0" rtlCol="0" anchor="ctr"/>
           <a:lstStyle/>
           <a:p>
-            <a:pPr indent="0" marL="0">
-              <a:buNone/>
-            </a:pPr>
             <a:r>
               <a:rPr lang="en-US" sz="4000" b="1" dirty="0">
                 <a:solidFill>
@@ -19605,9 +19561,6 @@
           <a:bodyPr wrap="square" lIns="0" tIns="0" rIns="0" bIns="0" rtlCol="0" anchor="ctr"/>
           <a:lstStyle/>
           <a:p>
-            <a:pPr indent="0" marL="0">
-              <a:buNone/>
-            </a:pPr>
             <a:r>
               <a:rPr lang="en-US" sz="1800" dirty="0">
                 <a:solidFill>
@@ -19622,9 +19575,6 @@
             <a:endParaRPr lang="en-US" sz="1800" dirty="0"/>
           </a:p>
           <a:p>
-            <a:pPr indent="0" marL="0">
-              <a:buNone/>
-            </a:pPr>
             <a:r>
               <a:rPr lang="en-US" sz="1800" dirty="0">
                 <a:solidFill>
@@ -19661,9 +19611,6 @@
           <a:bodyPr wrap="square" lIns="0" tIns="0" rIns="0" bIns="0" rtlCol="0" anchor="ctr"/>
           <a:lstStyle/>
           <a:p>
-            <a:pPr indent="0" marL="0">
-              <a:buNone/>
-            </a:pPr>
             <a:r>
               <a:rPr lang="en-US" sz="1300" spc="160" kern="0" dirty="0">
                 <a:solidFill>
@@ -19700,9 +19647,6 @@
           <a:bodyPr wrap="square" lIns="0" tIns="0" rIns="0" bIns="0" rtlCol="0" anchor="ctr"/>
           <a:lstStyle/>
           <a:p>
-            <a:pPr indent="0" marL="0">
-              <a:buNone/>
-            </a:pPr>
             <a:r>
               <a:rPr lang="en-US" sz="2000" b="1" dirty="0">
                 <a:solidFill>
@@ -19739,9 +19683,6 @@
           <a:bodyPr wrap="square" lIns="0" tIns="0" rIns="0" bIns="0" rtlCol="0" anchor="ctr"/>
           <a:lstStyle/>
           <a:p>
-            <a:pPr indent="0" marL="0">
-              <a:buNone/>
-            </a:pPr>
             <a:r>
               <a:rPr lang="en-US" sz="2000" b="1" dirty="0">
                 <a:solidFill>
@@ -19778,9 +19719,6 @@
           <a:bodyPr wrap="square" lIns="0" tIns="0" rIns="0" bIns="0" rtlCol="0" anchor="ctr"/>
           <a:lstStyle/>
           <a:p>
-            <a:pPr indent="0" marL="0">
-              <a:buNone/>
-            </a:pPr>
             <a:r>
               <a:rPr lang="en-US" sz="1600" dirty="0">
                 <a:solidFill>
@@ -19842,9 +19780,6 @@
           <a:bodyPr wrap="square" lIns="0" tIns="0" rIns="0" bIns="0" rtlCol="0" anchor="ctr"/>
           <a:lstStyle/>
           <a:p>
-            <a:pPr indent="0" marL="0">
-              <a:buNone/>
-            </a:pPr>
             <a:r>
               <a:rPr lang="en-US" sz="1800" dirty="0">
                 <a:solidFill>
@@ -19881,9 +19816,6 @@
           <a:bodyPr wrap="square" lIns="0" tIns="0" rIns="0" bIns="0" rtlCol="0" anchor="t"/>
           <a:lstStyle/>
           <a:p>
-            <a:pPr indent="0" marL="0">
-              <a:buNone/>
-            </a:pPr>
             <a:r>
               <a:rPr lang="en-US" sz="1600" dirty="0">
                 <a:solidFill>
@@ -19974,9 +19906,6 @@
           <a:bodyPr wrap="square" lIns="0" tIns="0" rIns="0" bIns="0" rtlCol="0" anchor="ctr"/>
           <a:lstStyle/>
           <a:p>
-            <a:pPr indent="0" marL="0">
-              <a:buNone/>
-            </a:pPr>
             <a:r>
               <a:rPr lang="en-US" sz="1200" dirty="0">
                 <a:solidFill>
@@ -20013,9 +19942,6 @@
           <a:bodyPr wrap="square" lIns="0" tIns="0" rIns="0" bIns="0" rtlCol="0" anchor="ctr"/>
           <a:lstStyle/>
           <a:p>
-            <a:pPr indent="0" marL="0">
-              <a:buNone/>
-            </a:pPr>
             <a:r>
               <a:rPr lang="en-US" sz="1500" spc="150" kern="0" dirty="0">
                 <a:solidFill>
@@ -20052,9 +19978,7 @@
           <a:bodyPr wrap="square" lIns="0" tIns="0" rIns="0" bIns="0" rtlCol="0" anchor="ctr"/>
           <a:lstStyle/>
           <a:p>
-            <a:pPr algn="r" indent="0" marL="0">
-              <a:buNone/>
-            </a:pPr>
+            <a:pPr algn="r"/>
             <a:r>
               <a:rPr lang="en-US" sz="1500" spc="150" kern="0" dirty="0">
                 <a:solidFill>
@@ -20091,9 +20015,6 @@
           <a:bodyPr wrap="square" lIns="0" tIns="0" rIns="0" bIns="0" rtlCol="0" anchor="ctr"/>
           <a:lstStyle/>
           <a:p>
-            <a:pPr indent="0" marL="0">
-              <a:buNone/>
-            </a:pPr>
             <a:r>
               <a:rPr lang="en-US" sz="1200" dirty="0">
                 <a:solidFill>
@@ -20150,9 +20071,6 @@
           <a:bodyPr wrap="square" lIns="0" tIns="0" rIns="0" bIns="0" rtlCol="0" anchor="ctr"/>
           <a:lstStyle/>
           <a:p>
-            <a:pPr indent="0" marL="0">
-              <a:buNone/>
-            </a:pPr>
             <a:r>
               <a:rPr lang="en-US" sz="1500" dirty="0">
                 <a:solidFill>
@@ -20189,9 +20107,7 @@
           <a:bodyPr wrap="square" lIns="0" tIns="0" rIns="0" bIns="0" rtlCol="0" anchor="ctr"/>
           <a:lstStyle/>
           <a:p>
-            <a:pPr algn="r" indent="0" marL="0">
-              <a:buNone/>
-            </a:pPr>
+            <a:pPr algn="r"/>
             <a:r>
               <a:rPr lang="en-US" sz="1500" spc="150" kern="0" dirty="0">
                 <a:solidFill>
@@ -20228,9 +20144,7 @@
           <a:bodyPr wrap="square" lIns="0" tIns="0" rIns="0" bIns="0" rtlCol="0" anchor="ctr"/>
           <a:lstStyle/>
           <a:p>
-            <a:pPr algn="l" indent="0" marL="0">
-              <a:buNone/>
-            </a:pPr>
+            <a:pPr algn="l"/>
             <a:r>
               <a:rPr lang="en-US" sz="1500" spc="300" kern="0" dirty="0">
                 <a:solidFill>
@@ -20267,9 +20181,7 @@
           <a:bodyPr wrap="square" lIns="0" tIns="0" rIns="0" bIns="0" rtlCol="0" anchor="t"/>
           <a:lstStyle/>
           <a:p>
-            <a:pPr algn="l" indent="0" marL="0">
-              <a:buNone/>
-            </a:pPr>
+            <a:pPr algn="l"/>
             <a:r>
               <a:rPr lang="en-US" sz="2600" b="1" spc="-75" kern="0" dirty="0">
                 <a:solidFill>
@@ -20281,9 +20193,7 @@
               </a:rPr>
               <a:t>SAME SPAN. SAME CLAIM. SAME HASH.</a:t>
             </a:r>
-            <a:pPr algn="l" indent="0" marL="0">
-              <a:buNone/>
-            </a:pPr>
+            <a:pPr algn="l"/>
             <a:r>
               <a:rPr lang="en-US" sz="2600" b="1" spc="-75" kern="0" dirty="0">
                 <a:solidFill>
@@ -20365,9 +20275,6 @@
           <a:bodyPr wrap="square" lIns="0" tIns="0" rIns="0" bIns="0" rtlCol="0" anchor="ctr"/>
           <a:lstStyle/>
           <a:p>
-            <a:pPr indent="0" marL="0">
-              <a:buNone/>
-            </a:pPr>
             <a:r>
               <a:rPr lang="en-US" sz="2000" b="1" dirty="0">
                 <a:solidFill>
@@ -20404,9 +20311,6 @@
           <a:bodyPr wrap="square" lIns="0" tIns="0" rIns="0" bIns="0" rtlCol="0" anchor="ctr"/>
           <a:lstStyle/>
           <a:p>
-            <a:pPr indent="0" marL="0">
-              <a:buNone/>
-            </a:pPr>
             <a:r>
               <a:rPr lang="en-US" sz="1400" dirty="0">
                 <a:solidFill>
@@ -20443,9 +20347,6 @@
           <a:bodyPr wrap="square" lIns="0" tIns="0" rIns="0" bIns="0" rtlCol="0" anchor="ctr"/>
           <a:lstStyle/>
           <a:p>
-            <a:pPr indent="0" marL="0">
-              <a:buNone/>
-            </a:pPr>
             <a:r>
               <a:rPr lang="en-US" sz="1400" dirty="0">
                 <a:solidFill>
@@ -20482,9 +20383,6 @@
           <a:bodyPr wrap="square" lIns="0" tIns="0" rIns="0" bIns="0" rtlCol="0" anchor="t"/>
           <a:lstStyle/>
           <a:p>
-            <a:pPr indent="0" marL="0">
-              <a:buNone/>
-            </a:pPr>
             <a:r>
               <a:rPr lang="en-US" sz="1600" i="1" dirty="0">
                 <a:solidFill>
@@ -20521,9 +20419,6 @@
           <a:bodyPr wrap="square" lIns="0" tIns="0" rIns="0" bIns="0" rtlCol="0" anchor="ctr"/>
           <a:lstStyle/>
           <a:p>
-            <a:pPr indent="0" marL="0">
-              <a:buNone/>
-            </a:pPr>
             <a:r>
               <a:rPr lang="en-US" sz="1500" b="1" dirty="0">
                 <a:solidFill>
@@ -20560,9 +20455,6 @@
           <a:bodyPr wrap="square" lIns="0" tIns="0" rIns="0" bIns="0" rtlCol="0" anchor="ctr"/>
           <a:lstStyle/>
           <a:p>
-            <a:pPr indent="0" marL="0">
-              <a:buNone/>
-            </a:pPr>
             <a:r>
               <a:rPr lang="en-US" sz="1400" dirty="0">
                 <a:solidFill>
@@ -20599,9 +20491,6 @@
           <a:bodyPr wrap="square" lIns="0" tIns="0" rIns="0" bIns="0" rtlCol="0" anchor="ctr"/>
           <a:lstStyle/>
           <a:p>
-            <a:pPr indent="0" marL="0">
-              <a:buNone/>
-            </a:pPr>
             <a:r>
               <a:rPr lang="en-US" sz="1300" spc="200" kern="0" dirty="0">
                 <a:solidFill>
@@ -20638,9 +20527,6 @@
           <a:bodyPr wrap="square" lIns="0" tIns="0" rIns="0" bIns="0" rtlCol="0" anchor="ctr"/>
           <a:lstStyle/>
           <a:p>
-            <a:pPr indent="0" marL="0">
-              <a:buNone/>
-            </a:pPr>
             <a:r>
               <a:rPr lang="en-US" sz="4000" b="1" dirty="0">
                 <a:solidFill>
@@ -20722,9 +20608,6 @@
           <a:bodyPr wrap="square" lIns="0" tIns="0" rIns="0" bIns="0" rtlCol="0" anchor="ctr"/>
           <a:lstStyle/>
           <a:p>
-            <a:pPr indent="0" marL="0">
-              <a:buNone/>
-            </a:pPr>
             <a:r>
               <a:rPr lang="en-US" sz="2000" b="1" dirty="0">
                 <a:solidFill>
@@ -20761,9 +20644,6 @@
           <a:bodyPr wrap="square" lIns="0" tIns="0" rIns="0" bIns="0" rtlCol="0" anchor="ctr"/>
           <a:lstStyle/>
           <a:p>
-            <a:pPr indent="0" marL="0">
-              <a:buNone/>
-            </a:pPr>
             <a:r>
               <a:rPr lang="en-US" sz="1400" dirty="0">
                 <a:solidFill>
@@ -20800,9 +20680,6 @@
           <a:bodyPr wrap="square" lIns="0" tIns="0" rIns="0" bIns="0" rtlCol="0" anchor="ctr"/>
           <a:lstStyle/>
           <a:p>
-            <a:pPr indent="0" marL="0">
-              <a:buNone/>
-            </a:pPr>
             <a:r>
               <a:rPr lang="en-US" sz="1400" dirty="0">
                 <a:solidFill>
@@ -20839,9 +20716,6 @@
           <a:bodyPr wrap="square" lIns="0" tIns="0" rIns="0" bIns="0" rtlCol="0" anchor="t"/>
           <a:lstStyle/>
           <a:p>
-            <a:pPr indent="0" marL="0">
-              <a:buNone/>
-            </a:pPr>
             <a:r>
               <a:rPr lang="en-US" sz="1600" i="1" dirty="0">
                 <a:solidFill>
@@ -20878,9 +20752,6 @@
           <a:bodyPr wrap="square" lIns="0" tIns="0" rIns="0" bIns="0" rtlCol="0" anchor="ctr"/>
           <a:lstStyle/>
           <a:p>
-            <a:pPr indent="0" marL="0">
-              <a:buNone/>
-            </a:pPr>
             <a:r>
               <a:rPr lang="en-US" sz="1500" b="1" dirty="0">
                 <a:solidFill>
@@ -20917,9 +20788,6 @@
           <a:bodyPr wrap="square" lIns="0" tIns="0" rIns="0" bIns="0" rtlCol="0" anchor="ctr"/>
           <a:lstStyle/>
           <a:p>
-            <a:pPr indent="0" marL="0">
-              <a:buNone/>
-            </a:pPr>
             <a:r>
               <a:rPr lang="en-US" sz="1400" dirty="0">
                 <a:solidFill>
@@ -20956,9 +20824,6 @@
           <a:bodyPr wrap="square" lIns="0" tIns="0" rIns="0" bIns="0" rtlCol="0" anchor="ctr"/>
           <a:lstStyle/>
           <a:p>
-            <a:pPr indent="0" marL="0">
-              <a:buNone/>
-            </a:pPr>
             <a:r>
               <a:rPr lang="en-US" sz="1300" spc="200" kern="0" dirty="0">
                 <a:solidFill>
@@ -20995,9 +20860,6 @@
           <a:bodyPr wrap="square" lIns="0" tIns="0" rIns="0" bIns="0" rtlCol="0" anchor="ctr"/>
           <a:lstStyle/>
           <a:p>
-            <a:pPr indent="0" marL="0">
-              <a:buNone/>
-            </a:pPr>
             <a:r>
               <a:rPr lang="en-US" sz="4000" b="1" dirty="0">
                 <a:solidFill>
@@ -21059,9 +20921,6 @@
           <a:bodyPr wrap="square" lIns="0" tIns="0" rIns="0" bIns="0" rtlCol="0" anchor="ctr"/>
           <a:lstStyle/>
           <a:p>
-            <a:pPr indent="0" marL="0">
-              <a:buNone/>
-            </a:pPr>
             <a:r>
               <a:rPr lang="en-US" sz="1800" b="1" dirty="0">
                 <a:solidFill>
@@ -21098,9 +20957,6 @@
           <a:bodyPr wrap="square" lIns="0" tIns="0" rIns="0" bIns="0" rtlCol="0" anchor="t"/>
           <a:lstStyle/>
           <a:p>
-            <a:pPr indent="0" marL="0">
-              <a:buNone/>
-            </a:pPr>
             <a:r>
               <a:rPr lang="en-US" sz="1500" dirty="0">
                 <a:solidFill>
@@ -21191,9 +21047,6 @@
           <a:bodyPr wrap="square" lIns="0" tIns="0" rIns="0" bIns="0" rtlCol="0" anchor="ctr"/>
           <a:lstStyle/>
           <a:p>
-            <a:pPr indent="0" marL="0">
-              <a:buNone/>
-            </a:pPr>
             <a:r>
               <a:rPr lang="en-US" sz="1200" dirty="0">
                 <a:solidFill>
@@ -21230,9 +21083,6 @@
           <a:bodyPr wrap="square" lIns="0" tIns="0" rIns="0" bIns="0" rtlCol="0" anchor="ctr"/>
           <a:lstStyle/>
           <a:p>
-            <a:pPr indent="0" marL="0">
-              <a:buNone/>
-            </a:pPr>
             <a:r>
               <a:rPr lang="en-US" sz="1500" spc="150" kern="0" dirty="0">
                 <a:solidFill>
@@ -21269,9 +21119,7 @@
           <a:bodyPr wrap="square" lIns="0" tIns="0" rIns="0" bIns="0" rtlCol="0" anchor="ctr"/>
           <a:lstStyle/>
           <a:p>
-            <a:pPr algn="r" indent="0" marL="0">
-              <a:buNone/>
-            </a:pPr>
+            <a:pPr algn="r"/>
             <a:r>
               <a:rPr lang="en-US" sz="1500" spc="150" kern="0" dirty="0">
                 <a:solidFill>
@@ -21308,9 +21156,6 @@
           <a:bodyPr wrap="square" lIns="0" tIns="0" rIns="0" bIns="0" rtlCol="0" anchor="ctr"/>
           <a:lstStyle/>
           <a:p>
-            <a:pPr indent="0" marL="0">
-              <a:buNone/>
-            </a:pPr>
             <a:r>
               <a:rPr lang="en-US" sz="1200" dirty="0">
                 <a:solidFill>
@@ -21367,9 +21212,6 @@
           <a:bodyPr wrap="square" lIns="0" tIns="0" rIns="0" bIns="0" rtlCol="0" anchor="ctr"/>
           <a:lstStyle/>
           <a:p>
-            <a:pPr indent="0" marL="0">
-              <a:buNone/>
-            </a:pPr>
             <a:r>
               <a:rPr lang="en-US" sz="1500" dirty="0">
                 <a:solidFill>
@@ -21406,9 +21248,7 @@
           <a:bodyPr wrap="square" lIns="0" tIns="0" rIns="0" bIns="0" rtlCol="0" anchor="ctr"/>
           <a:lstStyle/>
           <a:p>
-            <a:pPr algn="r" indent="0" marL="0">
-              <a:buNone/>
-            </a:pPr>
+            <a:pPr algn="r"/>
             <a:r>
               <a:rPr lang="en-US" sz="1500" spc="150" kern="0" dirty="0">
                 <a:solidFill>
@@ -21445,9 +21285,7 @@
           <a:bodyPr wrap="square" lIns="0" tIns="0" rIns="0" bIns="0" rtlCol="0" anchor="ctr"/>
           <a:lstStyle/>
           <a:p>
-            <a:pPr algn="l" indent="0" marL="0">
-              <a:buNone/>
-            </a:pPr>
+            <a:pPr algn="l"/>
             <a:r>
               <a:rPr lang="en-US" sz="1500" spc="300" kern="0" dirty="0">
                 <a:solidFill>
@@ -21457,7 +21295,7 @@
                 <a:ea typeface="Segoe UI" pitchFamily="34" charset="-122"/>
                 <a:cs typeface="Segoe UI" pitchFamily="34" charset="-120"/>
               </a:rPr>
-              <a:t>07 · WHY NOT</a:t>
+              <a:t>08 · WHY NOT</a:t>
             </a:r>
             <a:endParaRPr lang="en-US" sz="1500" dirty="0"/>
           </a:p>
@@ -21484,9 +21322,7 @@
           <a:bodyPr wrap="square" lIns="0" tIns="0" rIns="0" bIns="0" rtlCol="0" anchor="t"/>
           <a:lstStyle/>
           <a:p>
-            <a:pPr algn="l" indent="0" marL="0">
-              <a:buNone/>
-            </a:pPr>
+            <a:pPr algn="l"/>
             <a:r>
               <a:rPr lang="en-US" sz="2800" b="1" spc="-75" kern="0" dirty="0">
                 <a:solidFill>
@@ -21498,9 +21334,7 @@
               </a:rPr>
               <a:t>THEY INSPECT THE OUTPUT. WE QUERY THE </a:t>
             </a:r>
-            <a:pPr algn="l" indent="0" marL="0">
-              <a:buNone/>
-            </a:pPr>
+            <a:pPr algn="l"/>
             <a:r>
               <a:rPr lang="en-US" sz="2800" b="1" spc="-75" kern="0" dirty="0">
                 <a:solidFill>
@@ -21512,9 +21346,7 @@
               </a:rPr>
               <a:t>EVIDENCE</a:t>
             </a:r>
-            <a:pPr algn="l" indent="0" marL="0">
-              <a:buNone/>
-            </a:pPr>
+            <a:pPr algn="l"/>
             <a:r>
               <a:rPr lang="en-US" sz="2800" b="1" spc="-75" kern="0" dirty="0">
                 <a:solidFill>
@@ -21571,9 +21403,6 @@
           <a:bodyPr wrap="square" lIns="0" tIns="0" rIns="0" bIns="0" rtlCol="0" anchor="ctr"/>
           <a:lstStyle/>
           <a:p>
-            <a:pPr indent="0" marL="0">
-              <a:buNone/>
-            </a:pPr>
             <a:r>
               <a:rPr lang="en-US" sz="1200" spc="160" kern="0" dirty="0">
                 <a:solidFill>
@@ -21610,9 +21439,6 @@
           <a:bodyPr wrap="square" lIns="0" tIns="0" rIns="0" bIns="0" rtlCol="0" anchor="ctr"/>
           <a:lstStyle/>
           <a:p>
-            <a:pPr indent="0" marL="0">
-              <a:buNone/>
-            </a:pPr>
             <a:r>
               <a:rPr lang="en-US" sz="1200" spc="160" kern="0" dirty="0">
                 <a:solidFill>
@@ -21669,9 +21495,6 @@
           <a:bodyPr wrap="square" lIns="0" tIns="0" rIns="0" bIns="0" rtlCol="0" anchor="ctr"/>
           <a:lstStyle/>
           <a:p>
-            <a:pPr indent="0" marL="0">
-              <a:buNone/>
-            </a:pPr>
             <a:r>
               <a:rPr lang="en-US" sz="1500" b="1" dirty="0">
                 <a:solidFill>
@@ -21708,9 +21531,6 @@
           <a:bodyPr wrap="square" lIns="0" tIns="0" rIns="0" bIns="0" rtlCol="0" anchor="ctr"/>
           <a:lstStyle/>
           <a:p>
-            <a:pPr indent="0" marL="0">
-              <a:buNone/>
-            </a:pPr>
             <a:r>
               <a:rPr lang="en-US" sz="1300" dirty="0">
                 <a:solidFill>
@@ -21747,9 +21567,6 @@
           <a:bodyPr wrap="square" lIns="0" tIns="0" rIns="0" bIns="0" rtlCol="0" anchor="ctr"/>
           <a:lstStyle/>
           <a:p>
-            <a:pPr indent="0" marL="0">
-              <a:buNone/>
-            </a:pPr>
             <a:r>
               <a:rPr lang="en-US" sz="1500" dirty="0">
                 <a:solidFill>
@@ -21806,9 +21623,6 @@
           <a:bodyPr wrap="square" lIns="0" tIns="0" rIns="0" bIns="0" rtlCol="0" anchor="ctr"/>
           <a:lstStyle/>
           <a:p>
-            <a:pPr indent="0" marL="0">
-              <a:buNone/>
-            </a:pPr>
             <a:r>
               <a:rPr lang="en-US" sz="1500" b="1" dirty="0">
                 <a:solidFill>
@@ -21845,9 +21659,6 @@
           <a:bodyPr wrap="square" lIns="0" tIns="0" rIns="0" bIns="0" rtlCol="0" anchor="ctr"/>
           <a:lstStyle/>
           <a:p>
-            <a:pPr indent="0" marL="0">
-              <a:buNone/>
-            </a:pPr>
             <a:r>
               <a:rPr lang="en-US" sz="1300" dirty="0">
                 <a:solidFill>
@@ -21884,9 +21695,6 @@
           <a:bodyPr wrap="square" lIns="0" tIns="0" rIns="0" bIns="0" rtlCol="0" anchor="ctr"/>
           <a:lstStyle/>
           <a:p>
-            <a:pPr indent="0" marL="0">
-              <a:buNone/>
-            </a:pPr>
             <a:r>
               <a:rPr lang="en-US" sz="1500" dirty="0">
                 <a:solidFill>
@@ -21943,9 +21751,6 @@
           <a:bodyPr wrap="square" lIns="0" tIns="0" rIns="0" bIns="0" rtlCol="0" anchor="ctr"/>
           <a:lstStyle/>
           <a:p>
-            <a:pPr indent="0" marL="0">
-              <a:buNone/>
-            </a:pPr>
             <a:r>
               <a:rPr lang="en-US" sz="1500" b="1" dirty="0">
                 <a:solidFill>
@@ -21982,9 +21787,6 @@
           <a:bodyPr wrap="square" lIns="0" tIns="0" rIns="0" bIns="0" rtlCol="0" anchor="ctr"/>
           <a:lstStyle/>
           <a:p>
-            <a:pPr indent="0" marL="0">
-              <a:buNone/>
-            </a:pPr>
             <a:r>
               <a:rPr lang="en-US" sz="1300" dirty="0">
                 <a:solidFill>
@@ -22021,9 +21823,6 @@
           <a:bodyPr wrap="square" lIns="0" tIns="0" rIns="0" bIns="0" rtlCol="0" anchor="ctr"/>
           <a:lstStyle/>
           <a:p>
-            <a:pPr indent="0" marL="0">
-              <a:buNone/>
-            </a:pPr>
             <a:r>
               <a:rPr lang="en-US" sz="1500" dirty="0">
                 <a:solidFill>
@@ -22080,9 +21879,6 @@
           <a:bodyPr wrap="square" lIns="0" tIns="0" rIns="0" bIns="0" rtlCol="0" anchor="ctr"/>
           <a:lstStyle/>
           <a:p>
-            <a:pPr indent="0" marL="0">
-              <a:buNone/>
-            </a:pPr>
             <a:r>
               <a:rPr lang="en-US" sz="1500" b="1" dirty="0">
                 <a:solidFill>
@@ -22119,9 +21915,6 @@
           <a:bodyPr wrap="square" lIns="0" tIns="0" rIns="0" bIns="0" rtlCol="0" anchor="ctr"/>
           <a:lstStyle/>
           <a:p>
-            <a:pPr indent="0" marL="0">
-              <a:buNone/>
-            </a:pPr>
             <a:r>
               <a:rPr lang="en-US" sz="1300" dirty="0">
                 <a:solidFill>
@@ -22158,9 +21951,6 @@
           <a:bodyPr wrap="square" lIns="0" tIns="0" rIns="0" bIns="0" rtlCol="0" anchor="ctr"/>
           <a:lstStyle/>
           <a:p>
-            <a:pPr indent="0" marL="0">
-              <a:buNone/>
-            </a:pPr>
             <a:r>
               <a:rPr lang="en-US" sz="1500" dirty="0">
                 <a:solidFill>
@@ -22217,9 +22007,6 @@
           <a:bodyPr wrap="square" lIns="0" tIns="0" rIns="0" bIns="0" rtlCol="0" anchor="ctr"/>
           <a:lstStyle/>
           <a:p>
-            <a:pPr indent="0" marL="0">
-              <a:buNone/>
-            </a:pPr>
             <a:r>
               <a:rPr lang="en-US" sz="1500" b="1" dirty="0">
                 <a:solidFill>
@@ -22256,9 +22043,6 @@
           <a:bodyPr wrap="square" lIns="0" tIns="0" rIns="0" bIns="0" rtlCol="0" anchor="ctr"/>
           <a:lstStyle/>
           <a:p>
-            <a:pPr indent="0" marL="0">
-              <a:buNone/>
-            </a:pPr>
             <a:r>
               <a:rPr lang="en-US" sz="1300" dirty="0">
                 <a:solidFill>
@@ -22295,9 +22079,6 @@
           <a:bodyPr wrap="square" lIns="0" tIns="0" rIns="0" bIns="0" rtlCol="0" anchor="ctr"/>
           <a:lstStyle/>
           <a:p>
-            <a:pPr indent="0" marL="0">
-              <a:buNone/>
-            </a:pPr>
             <a:r>
               <a:rPr lang="en-US" sz="1500" dirty="0">
                 <a:solidFill>
@@ -22376,9 +22157,6 @@
           <a:bodyPr wrap="square" lIns="0" tIns="0" rIns="0" bIns="0" rtlCol="0" anchor="ctr"/>
           <a:lstStyle/>
           <a:p>
-            <a:pPr indent="0" marL="0">
-              <a:buNone/>
-            </a:pPr>
             <a:r>
               <a:rPr lang="en-US" sz="1800" b="1" dirty="0">
                 <a:solidFill>
@@ -22415,9 +22193,6 @@
           <a:bodyPr wrap="square" lIns="0" tIns="0" rIns="0" bIns="0" rtlCol="0" anchor="ctr"/>
           <a:lstStyle/>
           <a:p>
-            <a:pPr indent="0" marL="0">
-              <a:buNone/>
-            </a:pPr>
             <a:r>
               <a:rPr lang="en-US" sz="1500" dirty="0">
                 <a:solidFill>
